--- a/public/materials/deployment/github-first-push.pptx
+++ b/public/materials/deployment/github-first-push.pptx
@@ -2,20 +2,27 @@
 <file path=ppt/presentation.xml><?xml version="1.0" encoding="utf-8"?>
 <p:presentation xmlns:p="http://schemas.openxmlformats.org/presentationml/2006/main">
   <p:sldMasterIdLst>
-    <p:sldMasterId xmlns:r="http://schemas.openxmlformats.org/officeDocument/2006/relationships" id="2147483648" r:id="Rc12ba92059a041e0"/>
+    <p:sldMasterId xmlns:r="http://schemas.openxmlformats.org/officeDocument/2006/relationships" id="2147483648" r:id="R1d7707bc70774456"/>
   </p:sldMasterIdLst>
   <p:notesMasterIdLst>
-    <p:notesMasterId xmlns:r="http://schemas.openxmlformats.org/officeDocument/2006/relationships" r:id="Rdf0b024fe70a4db9"/>
+    <p:notesMasterId xmlns:r="http://schemas.openxmlformats.org/officeDocument/2006/relationships" r:id="R05be6c23521441d1"/>
   </p:notesMasterIdLst>
   <p:sldIdLst>
-    <p:sldId xmlns:r="http://schemas.openxmlformats.org/officeDocument/2006/relationships" id="256" r:id="Rd0161553e34c45c8"/>
-    <p:sldId xmlns:r="http://schemas.openxmlformats.org/officeDocument/2006/relationships" id="257" r:id="Rbf436dadcaf24407"/>
-    <p:sldId xmlns:r="http://schemas.openxmlformats.org/officeDocument/2006/relationships" id="258" r:id="Re3d268fdf4be464d"/>
-    <p:sldId xmlns:r="http://schemas.openxmlformats.org/officeDocument/2006/relationships" id="259" r:id="R1f402bd5bbae4389"/>
-    <p:sldId xmlns:r="http://schemas.openxmlformats.org/officeDocument/2006/relationships" id="260" r:id="Rcc2c8b73acb249be"/>
-    <p:sldId xmlns:r="http://schemas.openxmlformats.org/officeDocument/2006/relationships" id="261" r:id="R9d6bd7e273c04455"/>
-    <p:sldId xmlns:r="http://schemas.openxmlformats.org/officeDocument/2006/relationships" id="262" r:id="R08191357068d4c5f"/>
-    <p:sldId xmlns:r="http://schemas.openxmlformats.org/officeDocument/2006/relationships" id="263" r:id="R259ba75c3a0b443a"/>
+    <p:sldId xmlns:r="http://schemas.openxmlformats.org/officeDocument/2006/relationships" id="256" r:id="R3339b6225e4743a7"/>
+    <p:sldId xmlns:r="http://schemas.openxmlformats.org/officeDocument/2006/relationships" id="257" r:id="R950a244d81fd4356"/>
+    <p:sldId xmlns:r="http://schemas.openxmlformats.org/officeDocument/2006/relationships" id="258" r:id="R543a5ae55c4f415e"/>
+    <p:sldId xmlns:r="http://schemas.openxmlformats.org/officeDocument/2006/relationships" id="259" r:id="Rf9e87024f49b41ef"/>
+    <p:sldId xmlns:r="http://schemas.openxmlformats.org/officeDocument/2006/relationships" id="260" r:id="R8be5fa0f3bb64b2b"/>
+    <p:sldId xmlns:r="http://schemas.openxmlformats.org/officeDocument/2006/relationships" id="261" r:id="R57afb3ee5b974b47"/>
+    <p:sldId xmlns:r="http://schemas.openxmlformats.org/officeDocument/2006/relationships" id="262" r:id="R412ca571c7334bce"/>
+    <p:sldId xmlns:r="http://schemas.openxmlformats.org/officeDocument/2006/relationships" id="263" r:id="R3e1397302bb14597"/>
+    <p:sldId xmlns:r="http://schemas.openxmlformats.org/officeDocument/2006/relationships" id="264" r:id="R947b87b1bc124652"/>
+    <p:sldId xmlns:r="http://schemas.openxmlformats.org/officeDocument/2006/relationships" id="265" r:id="R99ee1c1b97624eef"/>
+    <p:sldId xmlns:r="http://schemas.openxmlformats.org/officeDocument/2006/relationships" id="266" r:id="Re8c690aaeb65413c"/>
+    <p:sldId xmlns:r="http://schemas.openxmlformats.org/officeDocument/2006/relationships" id="267" r:id="R7b7ecce0714945bd"/>
+    <p:sldId xmlns:r="http://schemas.openxmlformats.org/officeDocument/2006/relationships" id="268" r:id="R7d562ca0c5574d43"/>
+    <p:sldId xmlns:r="http://schemas.openxmlformats.org/officeDocument/2006/relationships" id="269" r:id="Rcc9545b09fad4378"/>
+    <p:sldId xmlns:r="http://schemas.openxmlformats.org/officeDocument/2006/relationships" id="270" r:id="R1db90deeace34ed9"/>
   </p:sldIdLst>
   <p:sldSz cx="12192000" cy="6858000"/>
   <p:notesSz cx="6858000" cy="9144000"/>
@@ -475,6 +482,402 @@
 </p:notes>
 </file>
 
+<file path=ppt/notesSlides/notesSlide10.xml><?xml version="1.0" encoding="utf-8"?>
+<p:notes xmlns:p="http://schemas.openxmlformats.org/presentationml/2006/main">
+  <p:cSld>
+    <p:spTree>
+      <p:nvGrpSpPr>
+        <p:cNvPr id="1" name=""/>
+        <p:cNvGrpSpPr/>
+        <p:nvPr/>
+      </p:nvGrpSpPr>
+      <p:grpSpPr>
+        <a:xfrm xmlns:a="http://schemas.openxmlformats.org/drawingml/2006/main"/>
+      </p:grpSpPr>
+      <p:sp>
+        <p:nvSpPr>
+          <p:cNvPr id="2" name="Slide Image Placeholder 1"/>
+          <p:cNvSpPr>
+            <a:spLocks xmlns:a="http://schemas.openxmlformats.org/drawingml/2006/main" noGrp="1"/>
+          </p:cNvSpPr>
+          <p:nvPr>
+            <p:ph type="sldImg" idx="0"/>
+          </p:nvPr>
+        </p:nvSpPr>
+        <p:spPr/>
+      </p:sp>
+      <p:sp>
+        <p:nvSpPr>
+          <p:cNvPr id="3" name="Notes Placeholder 2"/>
+          <p:cNvSpPr>
+            <a:spLocks xmlns:a="http://schemas.openxmlformats.org/drawingml/2006/main" noGrp="1"/>
+          </p:cNvSpPr>
+          <p:nvPr>
+            <p:ph type="body" idx="1"/>
+          </p:nvPr>
+        </p:nvSpPr>
+        <p:spPr/>
+        <p:txBody>
+          <a:bodyPr xmlns:a="http://schemas.openxmlformats.org/drawingml/2006/main"/>
+          <a:lstStyle xmlns:a="http://schemas.openxmlformats.org/drawingml/2006/main"/>
+          <a:p xmlns:a="http://schemas.openxmlformats.org/drawingml/2006/main"/>
+        </p:txBody>
+      </p:sp>
+      <p:sp>
+        <p:nvSpPr>
+          <p:cNvPr id="4" name="Slide Number Placeholder 3"/>
+          <p:cNvSpPr>
+            <a:spLocks xmlns:a="http://schemas.openxmlformats.org/drawingml/2006/main" noGrp="1"/>
+          </p:cNvSpPr>
+          <p:nvPr>
+            <p:ph type="sldNum" idx="5"/>
+          </p:nvPr>
+        </p:nvSpPr>
+        <p:spPr/>
+        <p:txBody>
+          <a:bodyPr xmlns:a="http://schemas.openxmlformats.org/drawingml/2006/main"/>
+          <a:lstStyle xmlns:a="http://schemas.openxmlformats.org/drawingml/2006/main"/>
+          <a:p xmlns:a="http://schemas.openxmlformats.org/drawingml/2006/main"/>
+        </p:txBody>
+      </p:sp>
+    </p:spTree>
+  </p:cSld>
+  <p:clrMapOvr>
+    <a:masterClrMapping xmlns:a="http://schemas.openxmlformats.org/drawingml/2006/main"/>
+  </p:clrMapOvr>
+</p:notes>
+</file>
+
+<file path=ppt/notesSlides/notesSlide11.xml><?xml version="1.0" encoding="utf-8"?>
+<p:notes xmlns:p="http://schemas.openxmlformats.org/presentationml/2006/main">
+  <p:cSld>
+    <p:spTree>
+      <p:nvGrpSpPr>
+        <p:cNvPr id="1" name=""/>
+        <p:cNvGrpSpPr/>
+        <p:nvPr/>
+      </p:nvGrpSpPr>
+      <p:grpSpPr>
+        <a:xfrm xmlns:a="http://schemas.openxmlformats.org/drawingml/2006/main"/>
+      </p:grpSpPr>
+      <p:sp>
+        <p:nvSpPr>
+          <p:cNvPr id="2" name="Slide Image Placeholder 1"/>
+          <p:cNvSpPr>
+            <a:spLocks xmlns:a="http://schemas.openxmlformats.org/drawingml/2006/main" noGrp="1"/>
+          </p:cNvSpPr>
+          <p:nvPr>
+            <p:ph type="sldImg" idx="0"/>
+          </p:nvPr>
+        </p:nvSpPr>
+        <p:spPr/>
+      </p:sp>
+      <p:sp>
+        <p:nvSpPr>
+          <p:cNvPr id="3" name="Notes Placeholder 2"/>
+          <p:cNvSpPr>
+            <a:spLocks xmlns:a="http://schemas.openxmlformats.org/drawingml/2006/main" noGrp="1"/>
+          </p:cNvSpPr>
+          <p:nvPr>
+            <p:ph type="body" idx="1"/>
+          </p:nvPr>
+        </p:nvSpPr>
+        <p:spPr/>
+        <p:txBody>
+          <a:bodyPr xmlns:a="http://schemas.openxmlformats.org/drawingml/2006/main"/>
+          <a:lstStyle xmlns:a="http://schemas.openxmlformats.org/drawingml/2006/main"/>
+          <a:p xmlns:a="http://schemas.openxmlformats.org/drawingml/2006/main"/>
+        </p:txBody>
+      </p:sp>
+      <p:sp>
+        <p:nvSpPr>
+          <p:cNvPr id="4" name="Slide Number Placeholder 3"/>
+          <p:cNvSpPr>
+            <a:spLocks xmlns:a="http://schemas.openxmlformats.org/drawingml/2006/main" noGrp="1"/>
+          </p:cNvSpPr>
+          <p:nvPr>
+            <p:ph type="sldNum" idx="5"/>
+          </p:nvPr>
+        </p:nvSpPr>
+        <p:spPr/>
+        <p:txBody>
+          <a:bodyPr xmlns:a="http://schemas.openxmlformats.org/drawingml/2006/main"/>
+          <a:lstStyle xmlns:a="http://schemas.openxmlformats.org/drawingml/2006/main"/>
+          <a:p xmlns:a="http://schemas.openxmlformats.org/drawingml/2006/main"/>
+        </p:txBody>
+      </p:sp>
+    </p:spTree>
+  </p:cSld>
+  <p:clrMapOvr>
+    <a:masterClrMapping xmlns:a="http://schemas.openxmlformats.org/drawingml/2006/main"/>
+  </p:clrMapOvr>
+</p:notes>
+</file>
+
+<file path=ppt/notesSlides/notesSlide12.xml><?xml version="1.0" encoding="utf-8"?>
+<p:notes xmlns:p="http://schemas.openxmlformats.org/presentationml/2006/main">
+  <p:cSld>
+    <p:spTree>
+      <p:nvGrpSpPr>
+        <p:cNvPr id="1" name=""/>
+        <p:cNvGrpSpPr/>
+        <p:nvPr/>
+      </p:nvGrpSpPr>
+      <p:grpSpPr>
+        <a:xfrm xmlns:a="http://schemas.openxmlformats.org/drawingml/2006/main"/>
+      </p:grpSpPr>
+      <p:sp>
+        <p:nvSpPr>
+          <p:cNvPr id="2" name="Slide Image Placeholder 1"/>
+          <p:cNvSpPr>
+            <a:spLocks xmlns:a="http://schemas.openxmlformats.org/drawingml/2006/main" noGrp="1"/>
+          </p:cNvSpPr>
+          <p:nvPr>
+            <p:ph type="sldImg" idx="0"/>
+          </p:nvPr>
+        </p:nvSpPr>
+        <p:spPr/>
+      </p:sp>
+      <p:sp>
+        <p:nvSpPr>
+          <p:cNvPr id="3" name="Notes Placeholder 2"/>
+          <p:cNvSpPr>
+            <a:spLocks xmlns:a="http://schemas.openxmlformats.org/drawingml/2006/main" noGrp="1"/>
+          </p:cNvSpPr>
+          <p:nvPr>
+            <p:ph type="body" idx="1"/>
+          </p:nvPr>
+        </p:nvSpPr>
+        <p:spPr/>
+        <p:txBody>
+          <a:bodyPr xmlns:a="http://schemas.openxmlformats.org/drawingml/2006/main"/>
+          <a:lstStyle xmlns:a="http://schemas.openxmlformats.org/drawingml/2006/main"/>
+          <a:p xmlns:a="http://schemas.openxmlformats.org/drawingml/2006/main"/>
+        </p:txBody>
+      </p:sp>
+      <p:sp>
+        <p:nvSpPr>
+          <p:cNvPr id="4" name="Slide Number Placeholder 3"/>
+          <p:cNvSpPr>
+            <a:spLocks xmlns:a="http://schemas.openxmlformats.org/drawingml/2006/main" noGrp="1"/>
+          </p:cNvSpPr>
+          <p:nvPr>
+            <p:ph type="sldNum" idx="5"/>
+          </p:nvPr>
+        </p:nvSpPr>
+        <p:spPr/>
+        <p:txBody>
+          <a:bodyPr xmlns:a="http://schemas.openxmlformats.org/drawingml/2006/main"/>
+          <a:lstStyle xmlns:a="http://schemas.openxmlformats.org/drawingml/2006/main"/>
+          <a:p xmlns:a="http://schemas.openxmlformats.org/drawingml/2006/main"/>
+        </p:txBody>
+      </p:sp>
+    </p:spTree>
+  </p:cSld>
+  <p:clrMapOvr>
+    <a:masterClrMapping xmlns:a="http://schemas.openxmlformats.org/drawingml/2006/main"/>
+  </p:clrMapOvr>
+</p:notes>
+</file>
+
+<file path=ppt/notesSlides/notesSlide13.xml><?xml version="1.0" encoding="utf-8"?>
+<p:notes xmlns:p="http://schemas.openxmlformats.org/presentationml/2006/main">
+  <p:cSld>
+    <p:spTree>
+      <p:nvGrpSpPr>
+        <p:cNvPr id="1" name=""/>
+        <p:cNvGrpSpPr/>
+        <p:nvPr/>
+      </p:nvGrpSpPr>
+      <p:grpSpPr>
+        <a:xfrm xmlns:a="http://schemas.openxmlformats.org/drawingml/2006/main"/>
+      </p:grpSpPr>
+      <p:sp>
+        <p:nvSpPr>
+          <p:cNvPr id="2" name="Slide Image Placeholder 1"/>
+          <p:cNvSpPr>
+            <a:spLocks xmlns:a="http://schemas.openxmlformats.org/drawingml/2006/main" noGrp="1"/>
+          </p:cNvSpPr>
+          <p:nvPr>
+            <p:ph type="sldImg" idx="0"/>
+          </p:nvPr>
+        </p:nvSpPr>
+        <p:spPr/>
+      </p:sp>
+      <p:sp>
+        <p:nvSpPr>
+          <p:cNvPr id="3" name="Notes Placeholder 2"/>
+          <p:cNvSpPr>
+            <a:spLocks xmlns:a="http://schemas.openxmlformats.org/drawingml/2006/main" noGrp="1"/>
+          </p:cNvSpPr>
+          <p:nvPr>
+            <p:ph type="body" idx="1"/>
+          </p:nvPr>
+        </p:nvSpPr>
+        <p:spPr/>
+        <p:txBody>
+          <a:bodyPr xmlns:a="http://schemas.openxmlformats.org/drawingml/2006/main"/>
+          <a:lstStyle xmlns:a="http://schemas.openxmlformats.org/drawingml/2006/main"/>
+          <a:p xmlns:a="http://schemas.openxmlformats.org/drawingml/2006/main"/>
+        </p:txBody>
+      </p:sp>
+      <p:sp>
+        <p:nvSpPr>
+          <p:cNvPr id="4" name="Slide Number Placeholder 3"/>
+          <p:cNvSpPr>
+            <a:spLocks xmlns:a="http://schemas.openxmlformats.org/drawingml/2006/main" noGrp="1"/>
+          </p:cNvSpPr>
+          <p:nvPr>
+            <p:ph type="sldNum" idx="5"/>
+          </p:nvPr>
+        </p:nvSpPr>
+        <p:spPr/>
+        <p:txBody>
+          <a:bodyPr xmlns:a="http://schemas.openxmlformats.org/drawingml/2006/main"/>
+          <a:lstStyle xmlns:a="http://schemas.openxmlformats.org/drawingml/2006/main"/>
+          <a:p xmlns:a="http://schemas.openxmlformats.org/drawingml/2006/main"/>
+        </p:txBody>
+      </p:sp>
+    </p:spTree>
+  </p:cSld>
+  <p:clrMapOvr>
+    <a:masterClrMapping xmlns:a="http://schemas.openxmlformats.org/drawingml/2006/main"/>
+  </p:clrMapOvr>
+</p:notes>
+</file>
+
+<file path=ppt/notesSlides/notesSlide14.xml><?xml version="1.0" encoding="utf-8"?>
+<p:notes xmlns:p="http://schemas.openxmlformats.org/presentationml/2006/main">
+  <p:cSld>
+    <p:spTree>
+      <p:nvGrpSpPr>
+        <p:cNvPr id="1" name=""/>
+        <p:cNvGrpSpPr/>
+        <p:nvPr/>
+      </p:nvGrpSpPr>
+      <p:grpSpPr>
+        <a:xfrm xmlns:a="http://schemas.openxmlformats.org/drawingml/2006/main"/>
+      </p:grpSpPr>
+      <p:sp>
+        <p:nvSpPr>
+          <p:cNvPr id="2" name="Slide Image Placeholder 1"/>
+          <p:cNvSpPr>
+            <a:spLocks xmlns:a="http://schemas.openxmlformats.org/drawingml/2006/main" noGrp="1"/>
+          </p:cNvSpPr>
+          <p:nvPr>
+            <p:ph type="sldImg" idx="0"/>
+          </p:nvPr>
+        </p:nvSpPr>
+        <p:spPr/>
+      </p:sp>
+      <p:sp>
+        <p:nvSpPr>
+          <p:cNvPr id="3" name="Notes Placeholder 2"/>
+          <p:cNvSpPr>
+            <a:spLocks xmlns:a="http://schemas.openxmlformats.org/drawingml/2006/main" noGrp="1"/>
+          </p:cNvSpPr>
+          <p:nvPr>
+            <p:ph type="body" idx="1"/>
+          </p:nvPr>
+        </p:nvSpPr>
+        <p:spPr/>
+        <p:txBody>
+          <a:bodyPr xmlns:a="http://schemas.openxmlformats.org/drawingml/2006/main"/>
+          <a:lstStyle xmlns:a="http://schemas.openxmlformats.org/drawingml/2006/main"/>
+          <a:p xmlns:a="http://schemas.openxmlformats.org/drawingml/2006/main"/>
+        </p:txBody>
+      </p:sp>
+      <p:sp>
+        <p:nvSpPr>
+          <p:cNvPr id="4" name="Slide Number Placeholder 3"/>
+          <p:cNvSpPr>
+            <a:spLocks xmlns:a="http://schemas.openxmlformats.org/drawingml/2006/main" noGrp="1"/>
+          </p:cNvSpPr>
+          <p:nvPr>
+            <p:ph type="sldNum" idx="5"/>
+          </p:nvPr>
+        </p:nvSpPr>
+        <p:spPr/>
+        <p:txBody>
+          <a:bodyPr xmlns:a="http://schemas.openxmlformats.org/drawingml/2006/main"/>
+          <a:lstStyle xmlns:a="http://schemas.openxmlformats.org/drawingml/2006/main"/>
+          <a:p xmlns:a="http://schemas.openxmlformats.org/drawingml/2006/main"/>
+        </p:txBody>
+      </p:sp>
+    </p:spTree>
+  </p:cSld>
+  <p:clrMapOvr>
+    <a:masterClrMapping xmlns:a="http://schemas.openxmlformats.org/drawingml/2006/main"/>
+  </p:clrMapOvr>
+</p:notes>
+</file>
+
+<file path=ppt/notesSlides/notesSlide15.xml><?xml version="1.0" encoding="utf-8"?>
+<p:notes xmlns:p="http://schemas.openxmlformats.org/presentationml/2006/main">
+  <p:cSld>
+    <p:spTree>
+      <p:nvGrpSpPr>
+        <p:cNvPr id="1" name=""/>
+        <p:cNvGrpSpPr/>
+        <p:nvPr/>
+      </p:nvGrpSpPr>
+      <p:grpSpPr>
+        <a:xfrm xmlns:a="http://schemas.openxmlformats.org/drawingml/2006/main"/>
+      </p:grpSpPr>
+      <p:sp>
+        <p:nvSpPr>
+          <p:cNvPr id="2" name="Slide Image Placeholder 1"/>
+          <p:cNvSpPr>
+            <a:spLocks xmlns:a="http://schemas.openxmlformats.org/drawingml/2006/main" noGrp="1"/>
+          </p:cNvSpPr>
+          <p:nvPr>
+            <p:ph type="sldImg" idx="0"/>
+          </p:nvPr>
+        </p:nvSpPr>
+        <p:spPr/>
+      </p:sp>
+      <p:sp>
+        <p:nvSpPr>
+          <p:cNvPr id="3" name="Notes Placeholder 2"/>
+          <p:cNvSpPr>
+            <a:spLocks xmlns:a="http://schemas.openxmlformats.org/drawingml/2006/main" noGrp="1"/>
+          </p:cNvSpPr>
+          <p:nvPr>
+            <p:ph type="body" idx="1"/>
+          </p:nvPr>
+        </p:nvSpPr>
+        <p:spPr/>
+        <p:txBody>
+          <a:bodyPr xmlns:a="http://schemas.openxmlformats.org/drawingml/2006/main"/>
+          <a:lstStyle xmlns:a="http://schemas.openxmlformats.org/drawingml/2006/main"/>
+          <a:p xmlns:a="http://schemas.openxmlformats.org/drawingml/2006/main"/>
+        </p:txBody>
+      </p:sp>
+      <p:sp>
+        <p:nvSpPr>
+          <p:cNvPr id="4" name="Slide Number Placeholder 3"/>
+          <p:cNvSpPr>
+            <a:spLocks xmlns:a="http://schemas.openxmlformats.org/drawingml/2006/main" noGrp="1"/>
+          </p:cNvSpPr>
+          <p:nvPr>
+            <p:ph type="sldNum" idx="5"/>
+          </p:nvPr>
+        </p:nvSpPr>
+        <p:spPr/>
+        <p:txBody>
+          <a:bodyPr xmlns:a="http://schemas.openxmlformats.org/drawingml/2006/main"/>
+          <a:lstStyle xmlns:a="http://schemas.openxmlformats.org/drawingml/2006/main"/>
+          <a:p xmlns:a="http://schemas.openxmlformats.org/drawingml/2006/main"/>
+        </p:txBody>
+      </p:sp>
+    </p:spTree>
+  </p:cSld>
+  <p:clrMapOvr>
+    <a:masterClrMapping xmlns:a="http://schemas.openxmlformats.org/drawingml/2006/main"/>
+  </p:clrMapOvr>
+</p:notes>
+</file>
+
 <file path=ppt/notesSlides/notesSlide2.xml><?xml version="1.0" encoding="utf-8"?>
 <p:notes xmlns:p="http://schemas.openxmlformats.org/presentationml/2006/main">
   <p:cSld>
@@ -872,6 +1275,72 @@
 </file>
 
 <file path=ppt/notesSlides/notesSlide8.xml><?xml version="1.0" encoding="utf-8"?>
+<p:notes xmlns:p="http://schemas.openxmlformats.org/presentationml/2006/main">
+  <p:cSld>
+    <p:spTree>
+      <p:nvGrpSpPr>
+        <p:cNvPr id="1" name=""/>
+        <p:cNvGrpSpPr/>
+        <p:nvPr/>
+      </p:nvGrpSpPr>
+      <p:grpSpPr>
+        <a:xfrm xmlns:a="http://schemas.openxmlformats.org/drawingml/2006/main"/>
+      </p:grpSpPr>
+      <p:sp>
+        <p:nvSpPr>
+          <p:cNvPr id="2" name="Slide Image Placeholder 1"/>
+          <p:cNvSpPr>
+            <a:spLocks xmlns:a="http://schemas.openxmlformats.org/drawingml/2006/main" noGrp="1"/>
+          </p:cNvSpPr>
+          <p:nvPr>
+            <p:ph type="sldImg" idx="0"/>
+          </p:nvPr>
+        </p:nvSpPr>
+        <p:spPr/>
+      </p:sp>
+      <p:sp>
+        <p:nvSpPr>
+          <p:cNvPr id="3" name="Notes Placeholder 2"/>
+          <p:cNvSpPr>
+            <a:spLocks xmlns:a="http://schemas.openxmlformats.org/drawingml/2006/main" noGrp="1"/>
+          </p:cNvSpPr>
+          <p:nvPr>
+            <p:ph type="body" idx="1"/>
+          </p:nvPr>
+        </p:nvSpPr>
+        <p:spPr/>
+        <p:txBody>
+          <a:bodyPr xmlns:a="http://schemas.openxmlformats.org/drawingml/2006/main"/>
+          <a:lstStyle xmlns:a="http://schemas.openxmlformats.org/drawingml/2006/main"/>
+          <a:p xmlns:a="http://schemas.openxmlformats.org/drawingml/2006/main"/>
+        </p:txBody>
+      </p:sp>
+      <p:sp>
+        <p:nvSpPr>
+          <p:cNvPr id="4" name="Slide Number Placeholder 3"/>
+          <p:cNvSpPr>
+            <a:spLocks xmlns:a="http://schemas.openxmlformats.org/drawingml/2006/main" noGrp="1"/>
+          </p:cNvSpPr>
+          <p:nvPr>
+            <p:ph type="sldNum" idx="5"/>
+          </p:nvPr>
+        </p:nvSpPr>
+        <p:spPr/>
+        <p:txBody>
+          <a:bodyPr xmlns:a="http://schemas.openxmlformats.org/drawingml/2006/main"/>
+          <a:lstStyle xmlns:a="http://schemas.openxmlformats.org/drawingml/2006/main"/>
+          <a:p xmlns:a="http://schemas.openxmlformats.org/drawingml/2006/main"/>
+        </p:txBody>
+      </p:sp>
+    </p:spTree>
+  </p:cSld>
+  <p:clrMapOvr>
+    <a:masterClrMapping xmlns:a="http://schemas.openxmlformats.org/drawingml/2006/main"/>
+  </p:clrMapOvr>
+</p:notes>
+</file>
+
+<file path=ppt/notesSlides/notesSlide9.xml><?xml version="1.0" encoding="utf-8"?>
 <p:notes xmlns:p="http://schemas.openxmlformats.org/presentationml/2006/main">
   <p:cSld>
     <p:spTree>
@@ -975,7 +1444,7 @@
   </p:cSld>
   <p:clrMap bg1="lt1" tx1="dk1" bg2="lt2" tx2="dk2" accent1="accent1" accent2="accent2" accent3="accent3" accent4="accent4" accent5="accent5" accent6="accent6" hlink="hlink" folHlink="folHlink"/>
   <p:sldLayoutIdLst>
-    <p:sldLayoutId xmlns:r="http://schemas.openxmlformats.org/officeDocument/2006/relationships" id="2147483649" r:id="R75905b6750354b1f"/>
+    <p:sldLayoutId xmlns:r="http://schemas.openxmlformats.org/officeDocument/2006/relationships" id="2147483649" r:id="Ree05913265b94b85"/>
   </p:sldLayoutIdLst>
   <p:txStyles>
     <p:titleStyle>
@@ -1526,7 +1995,7 @@
           <p:cNvPr id="9" name="">
             <a:extLst xmlns:a="http://schemas.openxmlformats.org/drawingml/2006/main">
               <a:ext uri="{FF2B5EF4-FFF2-40B4-BE49-F238E27FC236}">
-                <a16:creationId xmlns:a16="http://schemas.microsoft.com/office/drawing/2014/main" id="{2B657EDD-B592-4E47-8385-A619AC52B215}"/>
+                <a16:creationId xmlns:a16="http://schemas.microsoft.com/office/drawing/2014/main" id="{779CCCC9-FC99-4829-A075-EC1E0E14A68E}"/>
               </a:ext>
             </a:extLst>
           </p:cNvPr>
@@ -1557,7 +2026,7 @@
           <p:cNvPr id="2" name="">
             <a:extLst xmlns:a="http://schemas.openxmlformats.org/drawingml/2006/main">
               <a:ext uri="{FF2B5EF4-FFF2-40B4-BE49-F238E27FC236}">
-                <a16:creationId xmlns:a16="http://schemas.microsoft.com/office/drawing/2014/main" id="{F3331D07-B2F4-4D7E-9EE3-16513A960C1A}"/>
+                <a16:creationId xmlns:a16="http://schemas.microsoft.com/office/drawing/2014/main" id="{0A7EABE4-AEE9-4D10-9871-FFDF9D3256E1}"/>
               </a:ext>
             </a:extLst>
           </p:cNvPr>
@@ -1607,7 +2076,7 @@
           <p:cNvPr id="3" name="">
             <a:extLst xmlns:a="http://schemas.openxmlformats.org/drawingml/2006/main">
               <a:ext uri="{FF2B5EF4-FFF2-40B4-BE49-F238E27FC236}">
-                <a16:creationId xmlns:a16="http://schemas.microsoft.com/office/drawing/2014/main" id="{A9E42A8C-5287-4AAD-A8BE-942451600D0F}"/>
+                <a16:creationId xmlns:a16="http://schemas.microsoft.com/office/drawing/2014/main" id="{954B42DD-A792-456D-A052-57A79150BA15}"/>
               </a:ext>
             </a:extLst>
           </p:cNvPr>
@@ -1657,7 +2126,7 @@
           <p:cNvPr id="4" name="">
             <a:extLst xmlns:a="http://schemas.openxmlformats.org/drawingml/2006/main">
               <a:ext uri="{FF2B5EF4-FFF2-40B4-BE49-F238E27FC236}">
-                <a16:creationId xmlns:a16="http://schemas.microsoft.com/office/drawing/2014/main" id="{E3D70FF2-4F7E-4D27-99A7-E33796C888B8}"/>
+                <a16:creationId xmlns:a16="http://schemas.microsoft.com/office/drawing/2014/main" id="{0A9FFDF2-C8CC-48B9-B2DC-68E49D359F0B}"/>
               </a:ext>
             </a:extLst>
           </p:cNvPr>
@@ -1707,7 +2176,7 @@
           <p:cNvPr id="5" name="">
             <a:extLst xmlns:a="http://schemas.openxmlformats.org/drawingml/2006/main">
               <a:ext uri="{FF2B5EF4-FFF2-40B4-BE49-F238E27FC236}">
-                <a16:creationId xmlns:a16="http://schemas.microsoft.com/office/drawing/2014/main" id="{C1D4021E-BECE-4B12-BEA3-9AB6D42133AC}"/>
+                <a16:creationId xmlns:a16="http://schemas.microsoft.com/office/drawing/2014/main" id="{62023D04-0BEE-4ADA-8C06-A174A432E2D1}"/>
               </a:ext>
             </a:extLst>
           </p:cNvPr>
@@ -1740,7 +2209,7 @@
           <p:cNvPr id="6" name="">
             <a:extLst xmlns:a="http://schemas.openxmlformats.org/drawingml/2006/main">
               <a:ext uri="{FF2B5EF4-FFF2-40B4-BE49-F238E27FC236}">
-                <a16:creationId xmlns:a16="http://schemas.microsoft.com/office/drawing/2014/main" id="{9247478C-34A5-4F54-9B2F-2222831C0E72}"/>
+                <a16:creationId xmlns:a16="http://schemas.microsoft.com/office/drawing/2014/main" id="{BE929ECF-84E6-4EC5-B076-A7AACC246D43}"/>
               </a:ext>
             </a:extLst>
           </p:cNvPr>
@@ -1794,7 +2263,7 @@
           <p:nvPr/>
         </p:nvPicPr>
         <p:blipFill>
-          <a:blip xmlns:r="http://schemas.openxmlformats.org/officeDocument/2006/relationships" xmlns:a="http://schemas.openxmlformats.org/drawingml/2006/main" r:embed="R5d6e8528cb284d9c"/>
+          <a:blip xmlns:r="http://schemas.openxmlformats.org/officeDocument/2006/relationships" xmlns:a="http://schemas.openxmlformats.org/drawingml/2006/main" r:embed="Ree4564e0258e4d23"/>
           <a:srcRect xmlns:a="http://schemas.openxmlformats.org/drawingml/2006/main" l="17949" t="0" r="17949" b="0"/>
           <a:stretch xmlns:a="http://schemas.openxmlformats.org/drawingml/2006/main">
             <a:fillRect l="0" t="0" r="0" b="0"/>
@@ -1817,7 +2286,7 @@
           <p:cNvPr id="8" name="">
             <a:extLst xmlns:a="http://schemas.openxmlformats.org/drawingml/2006/main">
               <a:ext uri="{FF2B5EF4-FFF2-40B4-BE49-F238E27FC236}">
-                <a16:creationId xmlns:a16="http://schemas.microsoft.com/office/drawing/2014/main" id="{98A08771-ECB3-4B2C-9448-2BEBA80F0D00}"/>
+                <a16:creationId xmlns:a16="http://schemas.microsoft.com/office/drawing/2014/main" id="{1BE4B8A7-C23C-4894-BB92-D3CF15CF89F7}"/>
               </a:ext>
             </a:extLst>
           </p:cNvPr>
@@ -1865,7 +2334,3130 @@
     </p:spTree>
     <p:extLst>
       <p:ext uri="{BB962C8B-B14F-4D97-AF65-F5344CB8AC3E}">
-        <p14:creationId xmlns:p14="http://schemas.microsoft.com/office/powerpoint/2010/main" val="287528760"/>
+        <p14:creationId xmlns:p14="http://schemas.microsoft.com/office/powerpoint/2010/main" val="627651738"/>
+      </p:ext>
+    </p:extLst>
+  </p:cSld>
+</p:sld>
+</file>
+
+<file path=ppt/slides/slide10.xml><?xml version="1.0" encoding="utf-8"?>
+<p:sld xmlns:p="http://schemas.openxmlformats.org/presentationml/2006/main">
+  <p:cSld>
+    <p:bg>
+      <p:bgPr>
+        <a:solidFill xmlns:a="http://schemas.openxmlformats.org/drawingml/2006/main">
+          <a:srgbClr val="FFFCF8"/>
+        </a:solidFill>
+      </p:bgPr>
+    </p:bg>
+    <p:spTree>
+      <p:nvGrpSpPr>
+        <p:cNvPr id="1" name=""/>
+        <p:cNvGrpSpPr/>
+        <p:nvPr/>
+      </p:nvGrpSpPr>
+      <p:grpSpPr>
+        <a:xfrm xmlns:a="http://schemas.openxmlformats.org/drawingml/2006/main"/>
+      </p:grpSpPr>
+      <p:sp>
+        <p:nvSpPr>
+          <p:cNvPr id="16" name="">
+            <a:extLst xmlns:a="http://schemas.openxmlformats.org/drawingml/2006/main">
+              <a:ext uri="{FF2B5EF4-FFF2-40B4-BE49-F238E27FC236}">
+                <a16:creationId xmlns:a16="http://schemas.microsoft.com/office/drawing/2014/main" id="{7E473530-016C-4EC1-8742-3268005B497C}"/>
+              </a:ext>
+            </a:extLst>
+          </p:cNvPr>
+          <p:cNvSpPr>
+            <a:spLocks xmlns:a="http://schemas.openxmlformats.org/drawingml/2006/main" noGrp="1"/>
+          </p:cNvSpPr>
+          <p:nvPr/>
+        </p:nvSpPr>
+        <p:spPr>
+          <a:xfrm xmlns:a="http://schemas.openxmlformats.org/drawingml/2006/main">
+            <a:off x="0" y="0"/>
+            <a:ext cx="171450" cy="6858000"/>
+          </a:xfrm>
+          <a:prstGeom xmlns:a="http://schemas.openxmlformats.org/drawingml/2006/main" prst="rect">
+            <a:avLst/>
+          </a:prstGeom>
+          <a:solidFill xmlns:a="http://schemas.openxmlformats.org/drawingml/2006/main">
+            <a:srgbClr val="6657E8"/>
+          </a:solidFill>
+          <a:ln xmlns:a="http://schemas.openxmlformats.org/drawingml/2006/main" w="0">
+            <a:noFill/>
+            <a:prstDash val="solid"/>
+          </a:ln>
+        </p:spPr>
+      </p:sp>
+      <p:sp>
+        <p:nvSpPr>
+          <p:cNvPr id="2" name="">
+            <a:extLst xmlns:a="http://schemas.openxmlformats.org/drawingml/2006/main">
+              <a:ext uri="{FF2B5EF4-FFF2-40B4-BE49-F238E27FC236}">
+                <a16:creationId xmlns:a16="http://schemas.microsoft.com/office/drawing/2014/main" id="{0F6929FA-194D-49B0-A9A0-C525AAC81F5E}"/>
+              </a:ext>
+            </a:extLst>
+          </p:cNvPr>
+          <p:cNvSpPr>
+            <a:spLocks xmlns:a="http://schemas.openxmlformats.org/drawingml/2006/main" noGrp="1"/>
+          </p:cNvSpPr>
+          <p:nvPr/>
+        </p:nvSpPr>
+        <p:spPr>
+          <a:xfrm xmlns:a="http://schemas.openxmlformats.org/drawingml/2006/main">
+            <a:off x="647700" y="457200"/>
+            <a:ext cx="10096500" cy="552450"/>
+          </a:xfrm>
+          <a:prstGeom xmlns:a="http://schemas.openxmlformats.org/drawingml/2006/main" prst="rect">
+            <a:avLst/>
+          </a:prstGeom>
+          <a:noFill xmlns:a="http://schemas.openxmlformats.org/drawingml/2006/main"/>
+          <a:ln xmlns:a="http://schemas.openxmlformats.org/drawingml/2006/main" w="0">
+            <a:noFill/>
+            <a:prstDash val="solid"/>
+          </a:ln>
+        </p:spPr>
+        <p:txBody>
+          <a:bodyPr xmlns:a="http://schemas.openxmlformats.org/drawingml/2006/main"/>
+          <a:lstStyle xmlns:a="http://schemas.openxmlformats.org/drawingml/2006/main"/>
+          <a:p xmlns:a="http://schemas.openxmlformats.org/drawingml/2006/main">
+            <a:pPr>
+              <a:defRPr sz="2700" b="1">
+                <a:solidFill>
+                  <a:srgbClr val="182235"/>
+                </a:solidFill>
+              </a:defRPr>
+            </a:pPr>
+            <a:r>
+              <a:rPr sz="2700" b="1">
+                <a:solidFill>
+                  <a:srgbClr val="182235"/>
+                </a:solidFill>
+              </a:rPr>
+              <a:t>준비가 끝나면 실습이 훨씬 편해집니다</a:t>
+            </a:r>
+          </a:p>
+        </p:txBody>
+      </p:sp>
+      <p:sp>
+        <p:nvSpPr>
+          <p:cNvPr id="3" name="">
+            <a:extLst xmlns:a="http://schemas.openxmlformats.org/drawingml/2006/main">
+              <a:ext uri="{FF2B5EF4-FFF2-40B4-BE49-F238E27FC236}">
+                <a16:creationId xmlns:a16="http://schemas.microsoft.com/office/drawing/2014/main" id="{2EC4F077-3C61-4E1D-AB1A-0142C5AE9AC5}"/>
+              </a:ext>
+            </a:extLst>
+          </p:cNvPr>
+          <p:cNvSpPr>
+            <a:spLocks xmlns:a="http://schemas.openxmlformats.org/drawingml/2006/main" noGrp="1"/>
+          </p:cNvSpPr>
+          <p:nvPr/>
+        </p:nvSpPr>
+        <p:spPr>
+          <a:xfrm xmlns:a="http://schemas.openxmlformats.org/drawingml/2006/main">
+            <a:off x="666750" y="6419850"/>
+            <a:ext cx="10096500" cy="209550"/>
+          </a:xfrm>
+          <a:prstGeom xmlns:a="http://schemas.openxmlformats.org/drawingml/2006/main" prst="rect">
+            <a:avLst/>
+          </a:prstGeom>
+          <a:noFill xmlns:a="http://schemas.openxmlformats.org/drawingml/2006/main"/>
+          <a:ln xmlns:a="http://schemas.openxmlformats.org/drawingml/2006/main" w="0">
+            <a:noFill/>
+            <a:prstDash val="solid"/>
+          </a:ln>
+        </p:spPr>
+        <p:txBody>
+          <a:bodyPr xmlns:a="http://schemas.openxmlformats.org/drawingml/2006/main"/>
+          <a:lstStyle xmlns:a="http://schemas.openxmlformats.org/drawingml/2006/main"/>
+          <a:p xmlns:a="http://schemas.openxmlformats.org/drawingml/2006/main">
+            <a:pPr>
+              <a:defRPr sz="975">
+                <a:solidFill>
+                  <a:srgbClr val="657083"/>
+                </a:solidFill>
+              </a:defRPr>
+            </a:pPr>
+            <a:r>
+              <a:rPr sz="975">
+                <a:solidFill>
+                  <a:srgbClr val="657083"/>
+                </a:solidFill>
+              </a:rPr>
+              <a:t>EDU 웹개발 교육 플랫폼  ·  10</a:t>
+            </a:r>
+          </a:p>
+        </p:txBody>
+      </p:sp>
+      <p:sp>
+        <p:nvSpPr>
+          <p:cNvPr id="4" name="">
+            <a:extLst xmlns:a="http://schemas.openxmlformats.org/drawingml/2006/main">
+              <a:ext uri="{FF2B5EF4-FFF2-40B4-BE49-F238E27FC236}">
+                <a16:creationId xmlns:a16="http://schemas.microsoft.com/office/drawing/2014/main" id="{E22F16DD-B2C8-420E-86D6-F5771776B513}"/>
+              </a:ext>
+            </a:extLst>
+          </p:cNvPr>
+          <p:cNvSpPr>
+            <a:spLocks xmlns:a="http://schemas.openxmlformats.org/drawingml/2006/main" noGrp="1"/>
+          </p:cNvSpPr>
+          <p:nvPr/>
+        </p:nvSpPr>
+        <p:spPr>
+          <a:xfrm xmlns:a="http://schemas.openxmlformats.org/drawingml/2006/main">
+            <a:off x="742950" y="1428750"/>
+            <a:ext cx="514350" cy="514350"/>
+          </a:xfrm>
+          <a:prstGeom xmlns:a="http://schemas.openxmlformats.org/drawingml/2006/main" prst="roundRect">
+            <a:avLst>
+              <a:gd name="adj" fmla="val 22222"/>
+            </a:avLst>
+          </a:prstGeom>
+          <a:solidFill xmlns:a="http://schemas.openxmlformats.org/drawingml/2006/main">
+            <a:srgbClr val="EEEAFE"/>
+          </a:solidFill>
+          <a:ln xmlns:a="http://schemas.openxmlformats.org/drawingml/2006/main" w="0">
+            <a:noFill/>
+            <a:prstDash val="solid"/>
+          </a:ln>
+        </p:spPr>
+      </p:sp>
+      <p:sp>
+        <p:nvSpPr>
+          <p:cNvPr id="5" name="">
+            <a:extLst xmlns:a="http://schemas.openxmlformats.org/drawingml/2006/main">
+              <a:ext uri="{FF2B5EF4-FFF2-40B4-BE49-F238E27FC236}">
+                <a16:creationId xmlns:a16="http://schemas.microsoft.com/office/drawing/2014/main" id="{8BE47C9C-F332-428D-8C3A-0422DCB1A205}"/>
+              </a:ext>
+            </a:extLst>
+          </p:cNvPr>
+          <p:cNvSpPr>
+            <a:spLocks xmlns:a="http://schemas.openxmlformats.org/drawingml/2006/main" noGrp="1"/>
+          </p:cNvSpPr>
+          <p:nvPr/>
+        </p:nvSpPr>
+        <p:spPr>
+          <a:xfrm xmlns:a="http://schemas.openxmlformats.org/drawingml/2006/main">
+            <a:off x="742950" y="1524000"/>
+            <a:ext cx="514350" cy="304800"/>
+          </a:xfrm>
+          <a:prstGeom xmlns:a="http://schemas.openxmlformats.org/drawingml/2006/main" prst="rect">
+            <a:avLst/>
+          </a:prstGeom>
+          <a:noFill xmlns:a="http://schemas.openxmlformats.org/drawingml/2006/main"/>
+          <a:ln xmlns:a="http://schemas.openxmlformats.org/drawingml/2006/main" w="0">
+            <a:noFill/>
+            <a:prstDash val="solid"/>
+          </a:ln>
+        </p:spPr>
+        <p:txBody>
+          <a:bodyPr xmlns:a="http://schemas.openxmlformats.org/drawingml/2006/main"/>
+          <a:lstStyle xmlns:a="http://schemas.openxmlformats.org/drawingml/2006/main"/>
+          <a:p xmlns:a="http://schemas.openxmlformats.org/drawingml/2006/main">
+            <a:pPr algn="ctr">
+              <a:defRPr sz="1500" b="1">
+                <a:solidFill>
+                  <a:srgbClr val="57C7A5"/>
+                </a:solidFill>
+              </a:defRPr>
+            </a:pPr>
+            <a:r>
+              <a:rPr sz="1500" b="1">
+                <a:solidFill>
+                  <a:srgbClr val="57C7A5"/>
+                </a:solidFill>
+              </a:rPr>
+              <a:t>1</a:t>
+            </a:r>
+          </a:p>
+        </p:txBody>
+      </p:sp>
+      <p:sp>
+        <p:nvSpPr>
+          <p:cNvPr id="6" name="">
+            <a:extLst xmlns:a="http://schemas.openxmlformats.org/drawingml/2006/main">
+              <a:ext uri="{FF2B5EF4-FFF2-40B4-BE49-F238E27FC236}">
+                <a16:creationId xmlns:a16="http://schemas.microsoft.com/office/drawing/2014/main" id="{908E5B05-808E-49FF-9E56-7A7D9E417086}"/>
+              </a:ext>
+            </a:extLst>
+          </p:cNvPr>
+          <p:cNvSpPr>
+            <a:spLocks xmlns:a="http://schemas.openxmlformats.org/drawingml/2006/main" noGrp="1"/>
+          </p:cNvSpPr>
+          <p:nvPr/>
+        </p:nvSpPr>
+        <p:spPr>
+          <a:xfrm xmlns:a="http://schemas.openxmlformats.org/drawingml/2006/main">
+            <a:off x="1485900" y="1466850"/>
+            <a:ext cx="9239250" cy="619125"/>
+          </a:xfrm>
+          <a:prstGeom xmlns:a="http://schemas.openxmlformats.org/drawingml/2006/main" prst="rect">
+            <a:avLst/>
+          </a:prstGeom>
+          <a:noFill xmlns:a="http://schemas.openxmlformats.org/drawingml/2006/main"/>
+          <a:ln xmlns:a="http://schemas.openxmlformats.org/drawingml/2006/main" w="0">
+            <a:noFill/>
+            <a:prstDash val="solid"/>
+          </a:ln>
+        </p:spPr>
+        <p:txBody>
+          <a:bodyPr xmlns:a="http://schemas.openxmlformats.org/drawingml/2006/main"/>
+          <a:lstStyle xmlns:a="http://schemas.openxmlformats.org/drawingml/2006/main"/>
+          <a:p xmlns:a="http://schemas.openxmlformats.org/drawingml/2006/main">
+            <a:pPr>
+              <a:defRPr sz="1800">
+                <a:solidFill>
+                  <a:srgbClr val="182235"/>
+                </a:solidFill>
+              </a:defRPr>
+            </a:pPr>
+            <a:r>
+              <a:rPr sz="1800">
+                <a:solidFill>
+                  <a:srgbClr val="182235"/>
+                </a:solidFill>
+              </a:rPr>
+              <a:t>Git 설치</a:t>
+            </a:r>
+          </a:p>
+        </p:txBody>
+      </p:sp>
+      <p:sp>
+        <p:nvSpPr>
+          <p:cNvPr id="7" name="">
+            <a:extLst xmlns:a="http://schemas.openxmlformats.org/drawingml/2006/main">
+              <a:ext uri="{FF2B5EF4-FFF2-40B4-BE49-F238E27FC236}">
+                <a16:creationId xmlns:a16="http://schemas.microsoft.com/office/drawing/2014/main" id="{EF00233E-A89C-4ACC-9315-52186A1059FC}"/>
+              </a:ext>
+            </a:extLst>
+          </p:cNvPr>
+          <p:cNvSpPr>
+            <a:spLocks xmlns:a="http://schemas.openxmlformats.org/drawingml/2006/main" noGrp="1"/>
+          </p:cNvSpPr>
+          <p:nvPr/>
+        </p:nvSpPr>
+        <p:spPr>
+          <a:xfrm xmlns:a="http://schemas.openxmlformats.org/drawingml/2006/main">
+            <a:off x="742950" y="2400300"/>
+            <a:ext cx="514350" cy="514350"/>
+          </a:xfrm>
+          <a:prstGeom xmlns:a="http://schemas.openxmlformats.org/drawingml/2006/main" prst="roundRect">
+            <a:avLst>
+              <a:gd name="adj" fmla="val 22222"/>
+            </a:avLst>
+          </a:prstGeom>
+          <a:solidFill xmlns:a="http://schemas.openxmlformats.org/drawingml/2006/main">
+            <a:srgbClr val="EAF8F3"/>
+          </a:solidFill>
+          <a:ln xmlns:a="http://schemas.openxmlformats.org/drawingml/2006/main" w="0">
+            <a:noFill/>
+            <a:prstDash val="solid"/>
+          </a:ln>
+        </p:spPr>
+      </p:sp>
+      <p:sp>
+        <p:nvSpPr>
+          <p:cNvPr id="8" name="">
+            <a:extLst xmlns:a="http://schemas.openxmlformats.org/drawingml/2006/main">
+              <a:ext uri="{FF2B5EF4-FFF2-40B4-BE49-F238E27FC236}">
+                <a16:creationId xmlns:a16="http://schemas.microsoft.com/office/drawing/2014/main" id="{9DA3C1F4-5FCE-4327-8970-1F4BF17078F0}"/>
+              </a:ext>
+            </a:extLst>
+          </p:cNvPr>
+          <p:cNvSpPr>
+            <a:spLocks xmlns:a="http://schemas.openxmlformats.org/drawingml/2006/main" noGrp="1"/>
+          </p:cNvSpPr>
+          <p:nvPr/>
+        </p:nvSpPr>
+        <p:spPr>
+          <a:xfrm xmlns:a="http://schemas.openxmlformats.org/drawingml/2006/main">
+            <a:off x="742950" y="2495550"/>
+            <a:ext cx="514350" cy="304800"/>
+          </a:xfrm>
+          <a:prstGeom xmlns:a="http://schemas.openxmlformats.org/drawingml/2006/main" prst="rect">
+            <a:avLst/>
+          </a:prstGeom>
+          <a:noFill xmlns:a="http://schemas.openxmlformats.org/drawingml/2006/main"/>
+          <a:ln xmlns:a="http://schemas.openxmlformats.org/drawingml/2006/main" w="0">
+            <a:noFill/>
+            <a:prstDash val="solid"/>
+          </a:ln>
+        </p:spPr>
+        <p:txBody>
+          <a:bodyPr xmlns:a="http://schemas.openxmlformats.org/drawingml/2006/main"/>
+          <a:lstStyle xmlns:a="http://schemas.openxmlformats.org/drawingml/2006/main"/>
+          <a:p xmlns:a="http://schemas.openxmlformats.org/drawingml/2006/main">
+            <a:pPr algn="ctr">
+              <a:defRPr sz="1500" b="1">
+                <a:solidFill>
+                  <a:srgbClr val="57C7A5"/>
+                </a:solidFill>
+              </a:defRPr>
+            </a:pPr>
+            <a:r>
+              <a:rPr sz="1500" b="1">
+                <a:solidFill>
+                  <a:srgbClr val="57C7A5"/>
+                </a:solidFill>
+              </a:rPr>
+              <a:t>2</a:t>
+            </a:r>
+          </a:p>
+        </p:txBody>
+      </p:sp>
+      <p:sp>
+        <p:nvSpPr>
+          <p:cNvPr id="9" name="">
+            <a:extLst xmlns:a="http://schemas.openxmlformats.org/drawingml/2006/main">
+              <a:ext uri="{FF2B5EF4-FFF2-40B4-BE49-F238E27FC236}">
+                <a16:creationId xmlns:a16="http://schemas.microsoft.com/office/drawing/2014/main" id="{439E400A-AAE7-4B9F-9A79-D856908628E9}"/>
+              </a:ext>
+            </a:extLst>
+          </p:cNvPr>
+          <p:cNvSpPr>
+            <a:spLocks xmlns:a="http://schemas.openxmlformats.org/drawingml/2006/main" noGrp="1"/>
+          </p:cNvSpPr>
+          <p:nvPr/>
+        </p:nvSpPr>
+        <p:spPr>
+          <a:xfrm xmlns:a="http://schemas.openxmlformats.org/drawingml/2006/main">
+            <a:off x="1485900" y="2438400"/>
+            <a:ext cx="9239250" cy="619125"/>
+          </a:xfrm>
+          <a:prstGeom xmlns:a="http://schemas.openxmlformats.org/drawingml/2006/main" prst="rect">
+            <a:avLst/>
+          </a:prstGeom>
+          <a:noFill xmlns:a="http://schemas.openxmlformats.org/drawingml/2006/main"/>
+          <a:ln xmlns:a="http://schemas.openxmlformats.org/drawingml/2006/main" w="0">
+            <a:noFill/>
+            <a:prstDash val="solid"/>
+          </a:ln>
+        </p:spPr>
+        <p:txBody>
+          <a:bodyPr xmlns:a="http://schemas.openxmlformats.org/drawingml/2006/main"/>
+          <a:lstStyle xmlns:a="http://schemas.openxmlformats.org/drawingml/2006/main"/>
+          <a:p xmlns:a="http://schemas.openxmlformats.org/drawingml/2006/main">
+            <a:pPr>
+              <a:defRPr sz="1800">
+                <a:solidFill>
+                  <a:srgbClr val="182235"/>
+                </a:solidFill>
+              </a:defRPr>
+            </a:pPr>
+            <a:r>
+              <a:rPr sz="1800">
+                <a:solidFill>
+                  <a:srgbClr val="182235"/>
+                </a:solidFill>
+              </a:rPr>
+              <a:t>GitHub 계정과 저장소</a:t>
+            </a:r>
+          </a:p>
+        </p:txBody>
+      </p:sp>
+      <p:sp>
+        <p:nvSpPr>
+          <p:cNvPr id="10" name="">
+            <a:extLst xmlns:a="http://schemas.openxmlformats.org/drawingml/2006/main">
+              <a:ext uri="{FF2B5EF4-FFF2-40B4-BE49-F238E27FC236}">
+                <a16:creationId xmlns:a16="http://schemas.microsoft.com/office/drawing/2014/main" id="{CB3A143E-EBDA-4EDC-9181-FFD87B0C4C8E}"/>
+              </a:ext>
+            </a:extLst>
+          </p:cNvPr>
+          <p:cNvSpPr>
+            <a:spLocks xmlns:a="http://schemas.openxmlformats.org/drawingml/2006/main" noGrp="1"/>
+          </p:cNvSpPr>
+          <p:nvPr/>
+        </p:nvSpPr>
+        <p:spPr>
+          <a:xfrm xmlns:a="http://schemas.openxmlformats.org/drawingml/2006/main">
+            <a:off x="742950" y="3371850"/>
+            <a:ext cx="514350" cy="514350"/>
+          </a:xfrm>
+          <a:prstGeom xmlns:a="http://schemas.openxmlformats.org/drawingml/2006/main" prst="roundRect">
+            <a:avLst>
+              <a:gd name="adj" fmla="val 22222"/>
+            </a:avLst>
+          </a:prstGeom>
+          <a:solidFill xmlns:a="http://schemas.openxmlformats.org/drawingml/2006/main">
+            <a:srgbClr val="EEEAFE"/>
+          </a:solidFill>
+          <a:ln xmlns:a="http://schemas.openxmlformats.org/drawingml/2006/main" w="0">
+            <a:noFill/>
+            <a:prstDash val="solid"/>
+          </a:ln>
+        </p:spPr>
+      </p:sp>
+      <p:sp>
+        <p:nvSpPr>
+          <p:cNvPr id="11" name="">
+            <a:extLst xmlns:a="http://schemas.openxmlformats.org/drawingml/2006/main">
+              <a:ext uri="{FF2B5EF4-FFF2-40B4-BE49-F238E27FC236}">
+                <a16:creationId xmlns:a16="http://schemas.microsoft.com/office/drawing/2014/main" id="{9FDE84FC-9517-4362-BB87-98564D296A47}"/>
+              </a:ext>
+            </a:extLst>
+          </p:cNvPr>
+          <p:cNvSpPr>
+            <a:spLocks xmlns:a="http://schemas.openxmlformats.org/drawingml/2006/main" noGrp="1"/>
+          </p:cNvSpPr>
+          <p:nvPr/>
+        </p:nvSpPr>
+        <p:spPr>
+          <a:xfrm xmlns:a="http://schemas.openxmlformats.org/drawingml/2006/main">
+            <a:off x="742950" y="3467100"/>
+            <a:ext cx="514350" cy="304800"/>
+          </a:xfrm>
+          <a:prstGeom xmlns:a="http://schemas.openxmlformats.org/drawingml/2006/main" prst="rect">
+            <a:avLst/>
+          </a:prstGeom>
+          <a:noFill xmlns:a="http://schemas.openxmlformats.org/drawingml/2006/main"/>
+          <a:ln xmlns:a="http://schemas.openxmlformats.org/drawingml/2006/main" w="0">
+            <a:noFill/>
+            <a:prstDash val="solid"/>
+          </a:ln>
+        </p:spPr>
+        <p:txBody>
+          <a:bodyPr xmlns:a="http://schemas.openxmlformats.org/drawingml/2006/main"/>
+          <a:lstStyle xmlns:a="http://schemas.openxmlformats.org/drawingml/2006/main"/>
+          <a:p xmlns:a="http://schemas.openxmlformats.org/drawingml/2006/main">
+            <a:pPr algn="ctr">
+              <a:defRPr sz="1500" b="1">
+                <a:solidFill>
+                  <a:srgbClr val="57C7A5"/>
+                </a:solidFill>
+              </a:defRPr>
+            </a:pPr>
+            <a:r>
+              <a:rPr sz="1500" b="1">
+                <a:solidFill>
+                  <a:srgbClr val="57C7A5"/>
+                </a:solidFill>
+              </a:rPr>
+              <a:t>3</a:t>
+            </a:r>
+          </a:p>
+        </p:txBody>
+      </p:sp>
+      <p:sp>
+        <p:nvSpPr>
+          <p:cNvPr id="12" name="">
+            <a:extLst xmlns:a="http://schemas.openxmlformats.org/drawingml/2006/main">
+              <a:ext uri="{FF2B5EF4-FFF2-40B4-BE49-F238E27FC236}">
+                <a16:creationId xmlns:a16="http://schemas.microsoft.com/office/drawing/2014/main" id="{BE9B5341-2F79-438D-8675-548499404187}"/>
+              </a:ext>
+            </a:extLst>
+          </p:cNvPr>
+          <p:cNvSpPr>
+            <a:spLocks xmlns:a="http://schemas.openxmlformats.org/drawingml/2006/main" noGrp="1"/>
+          </p:cNvSpPr>
+          <p:nvPr/>
+        </p:nvSpPr>
+        <p:spPr>
+          <a:xfrm xmlns:a="http://schemas.openxmlformats.org/drawingml/2006/main">
+            <a:off x="1485900" y="3409950"/>
+            <a:ext cx="9239250" cy="619125"/>
+          </a:xfrm>
+          <a:prstGeom xmlns:a="http://schemas.openxmlformats.org/drawingml/2006/main" prst="rect">
+            <a:avLst/>
+          </a:prstGeom>
+          <a:noFill xmlns:a="http://schemas.openxmlformats.org/drawingml/2006/main"/>
+          <a:ln xmlns:a="http://schemas.openxmlformats.org/drawingml/2006/main" w="0">
+            <a:noFill/>
+            <a:prstDash val="solid"/>
+          </a:ln>
+        </p:spPr>
+        <p:txBody>
+          <a:bodyPr xmlns:a="http://schemas.openxmlformats.org/drawingml/2006/main"/>
+          <a:lstStyle xmlns:a="http://schemas.openxmlformats.org/drawingml/2006/main"/>
+          <a:p xmlns:a="http://schemas.openxmlformats.org/drawingml/2006/main">
+            <a:pPr>
+              <a:defRPr sz="1800">
+                <a:solidFill>
+                  <a:srgbClr val="182235"/>
+                </a:solidFill>
+              </a:defRPr>
+            </a:pPr>
+            <a:r>
+              <a:rPr sz="1800">
+                <a:solidFill>
+                  <a:srgbClr val="182235"/>
+                </a:solidFill>
+              </a:rPr>
+              <a:t>커밋할 프로젝트</a:t>
+            </a:r>
+          </a:p>
+        </p:txBody>
+      </p:sp>
+      <p:sp>
+        <p:nvSpPr>
+          <p:cNvPr id="13" name="">
+            <a:extLst xmlns:a="http://schemas.openxmlformats.org/drawingml/2006/main">
+              <a:ext uri="{FF2B5EF4-FFF2-40B4-BE49-F238E27FC236}">
+                <a16:creationId xmlns:a16="http://schemas.microsoft.com/office/drawing/2014/main" id="{C7E44CFB-27AF-4A9C-A7DF-67A267C2D4E2}"/>
+              </a:ext>
+            </a:extLst>
+          </p:cNvPr>
+          <p:cNvSpPr>
+            <a:spLocks xmlns:a="http://schemas.openxmlformats.org/drawingml/2006/main" noGrp="1"/>
+          </p:cNvSpPr>
+          <p:nvPr/>
+        </p:nvSpPr>
+        <p:spPr>
+          <a:xfrm xmlns:a="http://schemas.openxmlformats.org/drawingml/2006/main">
+            <a:off x="742950" y="4343400"/>
+            <a:ext cx="514350" cy="514350"/>
+          </a:xfrm>
+          <a:prstGeom xmlns:a="http://schemas.openxmlformats.org/drawingml/2006/main" prst="roundRect">
+            <a:avLst>
+              <a:gd name="adj" fmla="val 22222"/>
+            </a:avLst>
+          </a:prstGeom>
+          <a:solidFill xmlns:a="http://schemas.openxmlformats.org/drawingml/2006/main">
+            <a:srgbClr val="EAF8F3"/>
+          </a:solidFill>
+          <a:ln xmlns:a="http://schemas.openxmlformats.org/drawingml/2006/main" w="0">
+            <a:noFill/>
+            <a:prstDash val="solid"/>
+          </a:ln>
+        </p:spPr>
+      </p:sp>
+      <p:sp>
+        <p:nvSpPr>
+          <p:cNvPr id="14" name="">
+            <a:extLst xmlns:a="http://schemas.openxmlformats.org/drawingml/2006/main">
+              <a:ext uri="{FF2B5EF4-FFF2-40B4-BE49-F238E27FC236}">
+                <a16:creationId xmlns:a16="http://schemas.microsoft.com/office/drawing/2014/main" id="{054BAAD0-F6D6-4D0E-B96A-58BB3A36C10C}"/>
+              </a:ext>
+            </a:extLst>
+          </p:cNvPr>
+          <p:cNvSpPr>
+            <a:spLocks xmlns:a="http://schemas.openxmlformats.org/drawingml/2006/main" noGrp="1"/>
+          </p:cNvSpPr>
+          <p:nvPr/>
+        </p:nvSpPr>
+        <p:spPr>
+          <a:xfrm xmlns:a="http://schemas.openxmlformats.org/drawingml/2006/main">
+            <a:off x="742950" y="4438650"/>
+            <a:ext cx="514350" cy="304800"/>
+          </a:xfrm>
+          <a:prstGeom xmlns:a="http://schemas.openxmlformats.org/drawingml/2006/main" prst="rect">
+            <a:avLst/>
+          </a:prstGeom>
+          <a:noFill xmlns:a="http://schemas.openxmlformats.org/drawingml/2006/main"/>
+          <a:ln xmlns:a="http://schemas.openxmlformats.org/drawingml/2006/main" w="0">
+            <a:noFill/>
+            <a:prstDash val="solid"/>
+          </a:ln>
+        </p:spPr>
+        <p:txBody>
+          <a:bodyPr xmlns:a="http://schemas.openxmlformats.org/drawingml/2006/main"/>
+          <a:lstStyle xmlns:a="http://schemas.openxmlformats.org/drawingml/2006/main"/>
+          <a:p xmlns:a="http://schemas.openxmlformats.org/drawingml/2006/main">
+            <a:pPr algn="ctr">
+              <a:defRPr sz="1500" b="1">
+                <a:solidFill>
+                  <a:srgbClr val="57C7A5"/>
+                </a:solidFill>
+              </a:defRPr>
+            </a:pPr>
+            <a:r>
+              <a:rPr sz="1500" b="1">
+                <a:solidFill>
+                  <a:srgbClr val="57C7A5"/>
+                </a:solidFill>
+              </a:rPr>
+              <a:t>4</a:t>
+            </a:r>
+          </a:p>
+        </p:txBody>
+      </p:sp>
+      <p:sp>
+        <p:nvSpPr>
+          <p:cNvPr id="15" name="">
+            <a:extLst xmlns:a="http://schemas.openxmlformats.org/drawingml/2006/main">
+              <a:ext uri="{FF2B5EF4-FFF2-40B4-BE49-F238E27FC236}">
+                <a16:creationId xmlns:a16="http://schemas.microsoft.com/office/drawing/2014/main" id="{83261C86-5DFB-4BA3-B7D2-57785CF81945}"/>
+              </a:ext>
+            </a:extLst>
+          </p:cNvPr>
+          <p:cNvSpPr>
+            <a:spLocks xmlns:a="http://schemas.openxmlformats.org/drawingml/2006/main" noGrp="1"/>
+          </p:cNvSpPr>
+          <p:nvPr/>
+        </p:nvSpPr>
+        <p:spPr>
+          <a:xfrm xmlns:a="http://schemas.openxmlformats.org/drawingml/2006/main">
+            <a:off x="1485900" y="4381500"/>
+            <a:ext cx="9239250" cy="619125"/>
+          </a:xfrm>
+          <a:prstGeom xmlns:a="http://schemas.openxmlformats.org/drawingml/2006/main" prst="rect">
+            <a:avLst/>
+          </a:prstGeom>
+          <a:noFill xmlns:a="http://schemas.openxmlformats.org/drawingml/2006/main"/>
+          <a:ln xmlns:a="http://schemas.openxmlformats.org/drawingml/2006/main" w="0">
+            <a:noFill/>
+            <a:prstDash val="solid"/>
+          </a:ln>
+        </p:spPr>
+        <p:txBody>
+          <a:bodyPr xmlns:a="http://schemas.openxmlformats.org/drawingml/2006/main"/>
+          <a:lstStyle xmlns:a="http://schemas.openxmlformats.org/drawingml/2006/main"/>
+          <a:p xmlns:a="http://schemas.openxmlformats.org/drawingml/2006/main">
+            <a:pPr>
+              <a:defRPr sz="1800">
+                <a:solidFill>
+                  <a:srgbClr val="182235"/>
+                </a:solidFill>
+              </a:defRPr>
+            </a:pPr>
+            <a:r>
+              <a:rPr sz="1800">
+                <a:solidFill>
+                  <a:srgbClr val="182235"/>
+                </a:solidFill>
+              </a:rPr>
+              <a:t>.gitignore 파일</a:t>
+            </a:r>
+          </a:p>
+        </p:txBody>
+      </p:sp>
+    </p:spTree>
+    <p:extLst>
+      <p:ext uri="{BB962C8B-B14F-4D97-AF65-F5344CB8AC3E}">
+        <p14:creationId xmlns:p14="http://schemas.microsoft.com/office/powerpoint/2010/main" val="1395776792"/>
+      </p:ext>
+    </p:extLst>
+  </p:cSld>
+</p:sld>
+</file>
+
+<file path=ppt/slides/slide11.xml><?xml version="1.0" encoding="utf-8"?>
+<p:sld xmlns:p="http://schemas.openxmlformats.org/presentationml/2006/main">
+  <p:cSld>
+    <p:bg>
+      <p:bgPr>
+        <a:solidFill xmlns:a="http://schemas.openxmlformats.org/drawingml/2006/main">
+          <a:srgbClr val="FFFCF8"/>
+        </a:solidFill>
+      </p:bgPr>
+    </p:bg>
+    <p:spTree>
+      <p:nvGrpSpPr>
+        <p:cNvPr id="1" name=""/>
+        <p:cNvGrpSpPr/>
+        <p:nvPr/>
+      </p:nvGrpSpPr>
+      <p:grpSpPr>
+        <a:xfrm xmlns:a="http://schemas.openxmlformats.org/drawingml/2006/main"/>
+      </p:grpSpPr>
+      <p:sp>
+        <p:nvSpPr>
+          <p:cNvPr id="12" name="">
+            <a:extLst xmlns:a="http://schemas.openxmlformats.org/drawingml/2006/main">
+              <a:ext uri="{FF2B5EF4-FFF2-40B4-BE49-F238E27FC236}">
+                <a16:creationId xmlns:a16="http://schemas.microsoft.com/office/drawing/2014/main" id="{3D123096-0D4E-48A7-8D27-5516EA43CA45}"/>
+              </a:ext>
+            </a:extLst>
+          </p:cNvPr>
+          <p:cNvSpPr>
+            <a:spLocks xmlns:a="http://schemas.openxmlformats.org/drawingml/2006/main" noGrp="1"/>
+          </p:cNvSpPr>
+          <p:nvPr/>
+        </p:nvSpPr>
+        <p:spPr>
+          <a:xfrm xmlns:a="http://schemas.openxmlformats.org/drawingml/2006/main">
+            <a:off x="0" y="0"/>
+            <a:ext cx="171450" cy="6858000"/>
+          </a:xfrm>
+          <a:prstGeom xmlns:a="http://schemas.openxmlformats.org/drawingml/2006/main" prst="rect">
+            <a:avLst/>
+          </a:prstGeom>
+          <a:solidFill xmlns:a="http://schemas.openxmlformats.org/drawingml/2006/main">
+            <a:srgbClr val="6657E8"/>
+          </a:solidFill>
+          <a:ln xmlns:a="http://schemas.openxmlformats.org/drawingml/2006/main" w="0">
+            <a:noFill/>
+            <a:prstDash val="solid"/>
+          </a:ln>
+        </p:spPr>
+      </p:sp>
+      <p:sp>
+        <p:nvSpPr>
+          <p:cNvPr id="2" name="">
+            <a:extLst xmlns:a="http://schemas.openxmlformats.org/drawingml/2006/main">
+              <a:ext uri="{FF2B5EF4-FFF2-40B4-BE49-F238E27FC236}">
+                <a16:creationId xmlns:a16="http://schemas.microsoft.com/office/drawing/2014/main" id="{92D3693F-D0A7-4A1A-AC4A-4AD40B4451D1}"/>
+              </a:ext>
+            </a:extLst>
+          </p:cNvPr>
+          <p:cNvSpPr>
+            <a:spLocks xmlns:a="http://schemas.openxmlformats.org/drawingml/2006/main" noGrp="1"/>
+          </p:cNvSpPr>
+          <p:nvPr/>
+        </p:nvSpPr>
+        <p:spPr>
+          <a:xfrm xmlns:a="http://schemas.openxmlformats.org/drawingml/2006/main">
+            <a:off x="647700" y="457200"/>
+            <a:ext cx="10096500" cy="552450"/>
+          </a:xfrm>
+          <a:prstGeom xmlns:a="http://schemas.openxmlformats.org/drawingml/2006/main" prst="rect">
+            <a:avLst/>
+          </a:prstGeom>
+          <a:noFill xmlns:a="http://schemas.openxmlformats.org/drawingml/2006/main"/>
+          <a:ln xmlns:a="http://schemas.openxmlformats.org/drawingml/2006/main" w="0">
+            <a:noFill/>
+            <a:prstDash val="solid"/>
+          </a:ln>
+        </p:spPr>
+        <p:txBody>
+          <a:bodyPr xmlns:a="http://schemas.openxmlformats.org/drawingml/2006/main"/>
+          <a:lstStyle xmlns:a="http://schemas.openxmlformats.org/drawingml/2006/main"/>
+          <a:p xmlns:a="http://schemas.openxmlformats.org/drawingml/2006/main">
+            <a:pPr>
+              <a:defRPr sz="2700" b="1">
+                <a:solidFill>
+                  <a:srgbClr val="182235"/>
+                </a:solidFill>
+              </a:defRPr>
+            </a:pPr>
+            <a:r>
+              <a:rPr sz="2700" b="1">
+                <a:solidFill>
+                  <a:srgbClr val="182235"/>
+                </a:solidFill>
+              </a:rPr>
+              <a:t>코드의 역할을 하나씩 연결해 보세요</a:t>
+            </a:r>
+          </a:p>
+        </p:txBody>
+      </p:sp>
+      <p:sp>
+        <p:nvSpPr>
+          <p:cNvPr id="3" name="">
+            <a:extLst xmlns:a="http://schemas.openxmlformats.org/drawingml/2006/main">
+              <a:ext uri="{FF2B5EF4-FFF2-40B4-BE49-F238E27FC236}">
+                <a16:creationId xmlns:a16="http://schemas.microsoft.com/office/drawing/2014/main" id="{BFAD5737-4581-4F23-A0C2-8BADF00C6C42}"/>
+              </a:ext>
+            </a:extLst>
+          </p:cNvPr>
+          <p:cNvSpPr>
+            <a:spLocks xmlns:a="http://schemas.openxmlformats.org/drawingml/2006/main" noGrp="1"/>
+          </p:cNvSpPr>
+          <p:nvPr/>
+        </p:nvSpPr>
+        <p:spPr>
+          <a:xfrm xmlns:a="http://schemas.openxmlformats.org/drawingml/2006/main">
+            <a:off x="666750" y="6419850"/>
+            <a:ext cx="10096500" cy="209550"/>
+          </a:xfrm>
+          <a:prstGeom xmlns:a="http://schemas.openxmlformats.org/drawingml/2006/main" prst="rect">
+            <a:avLst/>
+          </a:prstGeom>
+          <a:noFill xmlns:a="http://schemas.openxmlformats.org/drawingml/2006/main"/>
+          <a:ln xmlns:a="http://schemas.openxmlformats.org/drawingml/2006/main" w="0">
+            <a:noFill/>
+            <a:prstDash val="solid"/>
+          </a:ln>
+        </p:spPr>
+        <p:txBody>
+          <a:bodyPr xmlns:a="http://schemas.openxmlformats.org/drawingml/2006/main"/>
+          <a:lstStyle xmlns:a="http://schemas.openxmlformats.org/drawingml/2006/main"/>
+          <a:p xmlns:a="http://schemas.openxmlformats.org/drawingml/2006/main">
+            <a:pPr>
+              <a:defRPr sz="975">
+                <a:solidFill>
+                  <a:srgbClr val="657083"/>
+                </a:solidFill>
+              </a:defRPr>
+            </a:pPr>
+            <a:r>
+              <a:rPr sz="975">
+                <a:solidFill>
+                  <a:srgbClr val="657083"/>
+                </a:solidFill>
+              </a:rPr>
+              <a:t>EDU 웹개발 교육 플랫폼  ·  11</a:t>
+            </a:r>
+          </a:p>
+        </p:txBody>
+      </p:sp>
+      <p:sp>
+        <p:nvSpPr>
+          <p:cNvPr id="4" name="">
+            <a:extLst xmlns:a="http://schemas.openxmlformats.org/drawingml/2006/main">
+              <a:ext uri="{FF2B5EF4-FFF2-40B4-BE49-F238E27FC236}">
+                <a16:creationId xmlns:a16="http://schemas.microsoft.com/office/drawing/2014/main" id="{4745E5E1-0252-4664-AD79-5D24F8119DAF}"/>
+              </a:ext>
+            </a:extLst>
+          </p:cNvPr>
+          <p:cNvSpPr>
+            <a:spLocks xmlns:a="http://schemas.openxmlformats.org/drawingml/2006/main" noGrp="1"/>
+          </p:cNvSpPr>
+          <p:nvPr/>
+        </p:nvSpPr>
+        <p:spPr>
+          <a:xfrm xmlns:a="http://schemas.openxmlformats.org/drawingml/2006/main">
+            <a:off x="857250" y="1428750"/>
+            <a:ext cx="2381250" cy="400050"/>
+          </a:xfrm>
+          <a:prstGeom xmlns:a="http://schemas.openxmlformats.org/drawingml/2006/main" prst="rect">
+            <a:avLst/>
+          </a:prstGeom>
+          <a:noFill xmlns:a="http://schemas.openxmlformats.org/drawingml/2006/main"/>
+          <a:ln xmlns:a="http://schemas.openxmlformats.org/drawingml/2006/main" w="0">
+            <a:noFill/>
+            <a:prstDash val="solid"/>
+          </a:ln>
+        </p:spPr>
+        <p:txBody>
+          <a:bodyPr xmlns:a="http://schemas.openxmlformats.org/drawingml/2006/main"/>
+          <a:lstStyle xmlns:a="http://schemas.openxmlformats.org/drawingml/2006/main"/>
+          <a:p xmlns:a="http://schemas.openxmlformats.org/drawingml/2006/main">
+            <a:pPr>
+              <a:defRPr sz="1725" b="1">
+                <a:solidFill>
+                  <a:srgbClr val="6657E8"/>
+                </a:solidFill>
+              </a:defRPr>
+            </a:pPr>
+            <a:r>
+              <a:rPr sz="1725" b="1">
+                <a:solidFill>
+                  <a:srgbClr val="6657E8"/>
+                </a:solidFill>
+              </a:rPr>
+              <a:t>git status</a:t>
+            </a:r>
+          </a:p>
+        </p:txBody>
+      </p:sp>
+      <p:sp>
+        <p:nvSpPr>
+          <p:cNvPr id="5" name="">
+            <a:extLst xmlns:a="http://schemas.openxmlformats.org/drawingml/2006/main">
+              <a:ext uri="{FF2B5EF4-FFF2-40B4-BE49-F238E27FC236}">
+                <a16:creationId xmlns:a16="http://schemas.microsoft.com/office/drawing/2014/main" id="{A38374E6-35C6-4B82-8601-A383236DF868}"/>
+              </a:ext>
+            </a:extLst>
+          </p:cNvPr>
+          <p:cNvSpPr>
+            <a:spLocks xmlns:a="http://schemas.openxmlformats.org/drawingml/2006/main" noGrp="1"/>
+          </p:cNvSpPr>
+          <p:nvPr/>
+        </p:nvSpPr>
+        <p:spPr>
+          <a:xfrm xmlns:a="http://schemas.openxmlformats.org/drawingml/2006/main">
+            <a:off x="3429000" y="1428750"/>
+            <a:ext cx="7429500" cy="666750"/>
+          </a:xfrm>
+          <a:prstGeom xmlns:a="http://schemas.openxmlformats.org/drawingml/2006/main" prst="rect">
+            <a:avLst/>
+          </a:prstGeom>
+          <a:noFill xmlns:a="http://schemas.openxmlformats.org/drawingml/2006/main"/>
+          <a:ln xmlns:a="http://schemas.openxmlformats.org/drawingml/2006/main" w="0">
+            <a:noFill/>
+            <a:prstDash val="solid"/>
+          </a:ln>
+        </p:spPr>
+        <p:txBody>
+          <a:bodyPr xmlns:a="http://schemas.openxmlformats.org/drawingml/2006/main"/>
+          <a:lstStyle xmlns:a="http://schemas.openxmlformats.org/drawingml/2006/main"/>
+          <a:p xmlns:a="http://schemas.openxmlformats.org/drawingml/2006/main">
+            <a:pPr>
+              <a:defRPr sz="1650">
+                <a:solidFill>
+                  <a:srgbClr val="182235"/>
+                </a:solidFill>
+              </a:defRPr>
+            </a:pPr>
+            <a:r>
+              <a:rPr sz="1650">
+                <a:solidFill>
+                  <a:srgbClr val="182235"/>
+                </a:solidFill>
+              </a:rPr>
+              <a:t>올라갈 파일과 아직 기록되지 않은 파일을 확인합니다.</a:t>
+            </a:r>
+          </a:p>
+        </p:txBody>
+      </p:sp>
+      <p:sp>
+        <p:nvSpPr>
+          <p:cNvPr id="6" name="">
+            <a:extLst xmlns:a="http://schemas.openxmlformats.org/drawingml/2006/main">
+              <a:ext uri="{FF2B5EF4-FFF2-40B4-BE49-F238E27FC236}">
+                <a16:creationId xmlns:a16="http://schemas.microsoft.com/office/drawing/2014/main" id="{2B5DB1F0-6E09-4101-9D0A-A10F59C3777E}"/>
+              </a:ext>
+            </a:extLst>
+          </p:cNvPr>
+          <p:cNvSpPr>
+            <a:spLocks xmlns:a="http://schemas.openxmlformats.org/drawingml/2006/main" noGrp="1"/>
+          </p:cNvSpPr>
+          <p:nvPr/>
+        </p:nvSpPr>
+        <p:spPr>
+          <a:xfrm xmlns:a="http://schemas.openxmlformats.org/drawingml/2006/main">
+            <a:off x="857250" y="2524125"/>
+            <a:ext cx="2381250" cy="400050"/>
+          </a:xfrm>
+          <a:prstGeom xmlns:a="http://schemas.openxmlformats.org/drawingml/2006/main" prst="rect">
+            <a:avLst/>
+          </a:prstGeom>
+          <a:noFill xmlns:a="http://schemas.openxmlformats.org/drawingml/2006/main"/>
+          <a:ln xmlns:a="http://schemas.openxmlformats.org/drawingml/2006/main" w="0">
+            <a:noFill/>
+            <a:prstDash val="solid"/>
+          </a:ln>
+        </p:spPr>
+        <p:txBody>
+          <a:bodyPr xmlns:a="http://schemas.openxmlformats.org/drawingml/2006/main"/>
+          <a:lstStyle xmlns:a="http://schemas.openxmlformats.org/drawingml/2006/main"/>
+          <a:p xmlns:a="http://schemas.openxmlformats.org/drawingml/2006/main">
+            <a:pPr>
+              <a:defRPr sz="1725" b="1">
+                <a:solidFill>
+                  <a:srgbClr val="6657E8"/>
+                </a:solidFill>
+              </a:defRPr>
+            </a:pPr>
+            <a:r>
+              <a:rPr sz="1725" b="1">
+                <a:solidFill>
+                  <a:srgbClr val="6657E8"/>
+                </a:solidFill>
+              </a:rPr>
+              <a:t>git add</a:t>
+            </a:r>
+          </a:p>
+        </p:txBody>
+      </p:sp>
+      <p:sp>
+        <p:nvSpPr>
+          <p:cNvPr id="7" name="">
+            <a:extLst xmlns:a="http://schemas.openxmlformats.org/drawingml/2006/main">
+              <a:ext uri="{FF2B5EF4-FFF2-40B4-BE49-F238E27FC236}">
+                <a16:creationId xmlns:a16="http://schemas.microsoft.com/office/drawing/2014/main" id="{12BC9BF6-94EB-4CAC-8139-4796515D74F3}"/>
+              </a:ext>
+            </a:extLst>
+          </p:cNvPr>
+          <p:cNvSpPr>
+            <a:spLocks xmlns:a="http://schemas.openxmlformats.org/drawingml/2006/main" noGrp="1"/>
+          </p:cNvSpPr>
+          <p:nvPr/>
+        </p:nvSpPr>
+        <p:spPr>
+          <a:xfrm xmlns:a="http://schemas.openxmlformats.org/drawingml/2006/main">
+            <a:off x="3429000" y="2524125"/>
+            <a:ext cx="7429500" cy="666750"/>
+          </a:xfrm>
+          <a:prstGeom xmlns:a="http://schemas.openxmlformats.org/drawingml/2006/main" prst="rect">
+            <a:avLst/>
+          </a:prstGeom>
+          <a:noFill xmlns:a="http://schemas.openxmlformats.org/drawingml/2006/main"/>
+          <a:ln xmlns:a="http://schemas.openxmlformats.org/drawingml/2006/main" w="0">
+            <a:noFill/>
+            <a:prstDash val="solid"/>
+          </a:ln>
+        </p:spPr>
+        <p:txBody>
+          <a:bodyPr xmlns:a="http://schemas.openxmlformats.org/drawingml/2006/main"/>
+          <a:lstStyle xmlns:a="http://schemas.openxmlformats.org/drawingml/2006/main"/>
+          <a:p xmlns:a="http://schemas.openxmlformats.org/drawingml/2006/main">
+            <a:pPr>
+              <a:defRPr sz="1650">
+                <a:solidFill>
+                  <a:srgbClr val="182235"/>
+                </a:solidFill>
+              </a:defRPr>
+            </a:pPr>
+            <a:r>
+              <a:rPr sz="1650">
+                <a:solidFill>
+                  <a:srgbClr val="182235"/>
+                </a:solidFill>
+              </a:rPr>
+              <a:t>이번 기록에 포함할 파일을 선택합니다.</a:t>
+            </a:r>
+          </a:p>
+        </p:txBody>
+      </p:sp>
+      <p:sp>
+        <p:nvSpPr>
+          <p:cNvPr id="8" name="">
+            <a:extLst xmlns:a="http://schemas.openxmlformats.org/drawingml/2006/main">
+              <a:ext uri="{FF2B5EF4-FFF2-40B4-BE49-F238E27FC236}">
+                <a16:creationId xmlns:a16="http://schemas.microsoft.com/office/drawing/2014/main" id="{02AD4D1E-E5CF-4566-9303-270B91F682F6}"/>
+              </a:ext>
+            </a:extLst>
+          </p:cNvPr>
+          <p:cNvSpPr>
+            <a:spLocks xmlns:a="http://schemas.openxmlformats.org/drawingml/2006/main" noGrp="1"/>
+          </p:cNvSpPr>
+          <p:nvPr/>
+        </p:nvSpPr>
+        <p:spPr>
+          <a:xfrm xmlns:a="http://schemas.openxmlformats.org/drawingml/2006/main">
+            <a:off x="857250" y="3619500"/>
+            <a:ext cx="2381250" cy="400050"/>
+          </a:xfrm>
+          <a:prstGeom xmlns:a="http://schemas.openxmlformats.org/drawingml/2006/main" prst="rect">
+            <a:avLst/>
+          </a:prstGeom>
+          <a:noFill xmlns:a="http://schemas.openxmlformats.org/drawingml/2006/main"/>
+          <a:ln xmlns:a="http://schemas.openxmlformats.org/drawingml/2006/main" w="0">
+            <a:noFill/>
+            <a:prstDash val="solid"/>
+          </a:ln>
+        </p:spPr>
+        <p:txBody>
+          <a:bodyPr xmlns:a="http://schemas.openxmlformats.org/drawingml/2006/main"/>
+          <a:lstStyle xmlns:a="http://schemas.openxmlformats.org/drawingml/2006/main"/>
+          <a:p xmlns:a="http://schemas.openxmlformats.org/drawingml/2006/main">
+            <a:pPr>
+              <a:defRPr sz="1725" b="1">
+                <a:solidFill>
+                  <a:srgbClr val="6657E8"/>
+                </a:solidFill>
+              </a:defRPr>
+            </a:pPr>
+            <a:r>
+              <a:rPr sz="1725" b="1">
+                <a:solidFill>
+                  <a:srgbClr val="6657E8"/>
+                </a:solidFill>
+              </a:rPr>
+              <a:t>git commit</a:t>
+            </a:r>
+          </a:p>
+        </p:txBody>
+      </p:sp>
+      <p:sp>
+        <p:nvSpPr>
+          <p:cNvPr id="9" name="">
+            <a:extLst xmlns:a="http://schemas.openxmlformats.org/drawingml/2006/main">
+              <a:ext uri="{FF2B5EF4-FFF2-40B4-BE49-F238E27FC236}">
+                <a16:creationId xmlns:a16="http://schemas.microsoft.com/office/drawing/2014/main" id="{A159A37B-80E9-43E1-9BC9-2CB5F3997831}"/>
+              </a:ext>
+            </a:extLst>
+          </p:cNvPr>
+          <p:cNvSpPr>
+            <a:spLocks xmlns:a="http://schemas.openxmlformats.org/drawingml/2006/main" noGrp="1"/>
+          </p:cNvSpPr>
+          <p:nvPr/>
+        </p:nvSpPr>
+        <p:spPr>
+          <a:xfrm xmlns:a="http://schemas.openxmlformats.org/drawingml/2006/main">
+            <a:off x="3429000" y="3619500"/>
+            <a:ext cx="7429500" cy="666750"/>
+          </a:xfrm>
+          <a:prstGeom xmlns:a="http://schemas.openxmlformats.org/drawingml/2006/main" prst="rect">
+            <a:avLst/>
+          </a:prstGeom>
+          <a:noFill xmlns:a="http://schemas.openxmlformats.org/drawingml/2006/main"/>
+          <a:ln xmlns:a="http://schemas.openxmlformats.org/drawingml/2006/main" w="0">
+            <a:noFill/>
+            <a:prstDash val="solid"/>
+          </a:ln>
+        </p:spPr>
+        <p:txBody>
+          <a:bodyPr xmlns:a="http://schemas.openxmlformats.org/drawingml/2006/main"/>
+          <a:lstStyle xmlns:a="http://schemas.openxmlformats.org/drawingml/2006/main"/>
+          <a:p xmlns:a="http://schemas.openxmlformats.org/drawingml/2006/main">
+            <a:pPr>
+              <a:defRPr sz="1650">
+                <a:solidFill>
+                  <a:srgbClr val="182235"/>
+                </a:solidFill>
+              </a:defRPr>
+            </a:pPr>
+            <a:r>
+              <a:rPr sz="1650">
+                <a:solidFill>
+                  <a:srgbClr val="182235"/>
+                </a:solidFill>
+              </a:rPr>
+              <a:t>변경 이유를 한 문장으로 기록합니다.</a:t>
+            </a:r>
+          </a:p>
+        </p:txBody>
+      </p:sp>
+      <p:sp>
+        <p:nvSpPr>
+          <p:cNvPr id="10" name="">
+            <a:extLst xmlns:a="http://schemas.openxmlformats.org/drawingml/2006/main">
+              <a:ext uri="{FF2B5EF4-FFF2-40B4-BE49-F238E27FC236}">
+                <a16:creationId xmlns:a16="http://schemas.microsoft.com/office/drawing/2014/main" id="{2F5B990F-DB20-425B-A74D-0D247DF4A93B}"/>
+              </a:ext>
+            </a:extLst>
+          </p:cNvPr>
+          <p:cNvSpPr>
+            <a:spLocks xmlns:a="http://schemas.openxmlformats.org/drawingml/2006/main" noGrp="1"/>
+          </p:cNvSpPr>
+          <p:nvPr/>
+        </p:nvSpPr>
+        <p:spPr>
+          <a:xfrm xmlns:a="http://schemas.openxmlformats.org/drawingml/2006/main">
+            <a:off x="857250" y="4714875"/>
+            <a:ext cx="2381250" cy="400050"/>
+          </a:xfrm>
+          <a:prstGeom xmlns:a="http://schemas.openxmlformats.org/drawingml/2006/main" prst="rect">
+            <a:avLst/>
+          </a:prstGeom>
+          <a:noFill xmlns:a="http://schemas.openxmlformats.org/drawingml/2006/main"/>
+          <a:ln xmlns:a="http://schemas.openxmlformats.org/drawingml/2006/main" w="0">
+            <a:noFill/>
+            <a:prstDash val="solid"/>
+          </a:ln>
+        </p:spPr>
+        <p:txBody>
+          <a:bodyPr xmlns:a="http://schemas.openxmlformats.org/drawingml/2006/main"/>
+          <a:lstStyle xmlns:a="http://schemas.openxmlformats.org/drawingml/2006/main"/>
+          <a:p xmlns:a="http://schemas.openxmlformats.org/drawingml/2006/main">
+            <a:pPr>
+              <a:defRPr sz="1725" b="1">
+                <a:solidFill>
+                  <a:srgbClr val="6657E8"/>
+                </a:solidFill>
+              </a:defRPr>
+            </a:pPr>
+            <a:r>
+              <a:rPr sz="1725" b="1">
+                <a:solidFill>
+                  <a:srgbClr val="6657E8"/>
+                </a:solidFill>
+              </a:rPr>
+              <a:t>git push</a:t>
+            </a:r>
+          </a:p>
+        </p:txBody>
+      </p:sp>
+      <p:sp>
+        <p:nvSpPr>
+          <p:cNvPr id="11" name="">
+            <a:extLst xmlns:a="http://schemas.openxmlformats.org/drawingml/2006/main">
+              <a:ext uri="{FF2B5EF4-FFF2-40B4-BE49-F238E27FC236}">
+                <a16:creationId xmlns:a16="http://schemas.microsoft.com/office/drawing/2014/main" id="{049012B2-0888-4A6C-A966-4BE8D08486D3}"/>
+              </a:ext>
+            </a:extLst>
+          </p:cNvPr>
+          <p:cNvSpPr>
+            <a:spLocks xmlns:a="http://schemas.openxmlformats.org/drawingml/2006/main" noGrp="1"/>
+          </p:cNvSpPr>
+          <p:nvPr/>
+        </p:nvSpPr>
+        <p:spPr>
+          <a:xfrm xmlns:a="http://schemas.openxmlformats.org/drawingml/2006/main">
+            <a:off x="3429000" y="4714875"/>
+            <a:ext cx="7429500" cy="666750"/>
+          </a:xfrm>
+          <a:prstGeom xmlns:a="http://schemas.openxmlformats.org/drawingml/2006/main" prst="rect">
+            <a:avLst/>
+          </a:prstGeom>
+          <a:noFill xmlns:a="http://schemas.openxmlformats.org/drawingml/2006/main"/>
+          <a:ln xmlns:a="http://schemas.openxmlformats.org/drawingml/2006/main" w="0">
+            <a:noFill/>
+            <a:prstDash val="solid"/>
+          </a:ln>
+        </p:spPr>
+        <p:txBody>
+          <a:bodyPr xmlns:a="http://schemas.openxmlformats.org/drawingml/2006/main"/>
+          <a:lstStyle xmlns:a="http://schemas.openxmlformats.org/drawingml/2006/main"/>
+          <a:p xmlns:a="http://schemas.openxmlformats.org/drawingml/2006/main">
+            <a:pPr>
+              <a:defRPr sz="1650">
+                <a:solidFill>
+                  <a:srgbClr val="182235"/>
+                </a:solidFill>
+              </a:defRPr>
+            </a:pPr>
+            <a:r>
+              <a:rPr sz="1650">
+                <a:solidFill>
+                  <a:srgbClr val="182235"/>
+                </a:solidFill>
+              </a:rPr>
+              <a:t>로컬 기록을 GitHub에 전송합니다.</a:t>
+            </a:r>
+          </a:p>
+        </p:txBody>
+      </p:sp>
+    </p:spTree>
+    <p:extLst>
+      <p:ext uri="{BB962C8B-B14F-4D97-AF65-F5344CB8AC3E}">
+        <p14:creationId xmlns:p14="http://schemas.microsoft.com/office/powerpoint/2010/main" val="123988794"/>
+      </p:ext>
+    </p:extLst>
+  </p:cSld>
+</p:sld>
+</file>
+
+<file path=ppt/slides/slide12.xml><?xml version="1.0" encoding="utf-8"?>
+<p:sld xmlns:p="http://schemas.openxmlformats.org/presentationml/2006/main">
+  <p:cSld>
+    <p:bg>
+      <p:bgPr>
+        <a:solidFill xmlns:a="http://schemas.openxmlformats.org/drawingml/2006/main">
+          <a:srgbClr val="FFFCF8"/>
+        </a:solidFill>
+      </p:bgPr>
+    </p:bg>
+    <p:spTree>
+      <p:nvGrpSpPr>
+        <p:cNvPr id="1" name=""/>
+        <p:cNvGrpSpPr/>
+        <p:nvPr/>
+      </p:nvGrpSpPr>
+      <p:grpSpPr>
+        <a:xfrm xmlns:a="http://schemas.openxmlformats.org/drawingml/2006/main"/>
+      </p:grpSpPr>
+      <p:sp>
+        <p:nvSpPr>
+          <p:cNvPr id="13" name="">
+            <a:extLst xmlns:a="http://schemas.openxmlformats.org/drawingml/2006/main">
+              <a:ext uri="{FF2B5EF4-FFF2-40B4-BE49-F238E27FC236}">
+                <a16:creationId xmlns:a16="http://schemas.microsoft.com/office/drawing/2014/main" id="{C2706A83-DD2B-41EA-A27E-98EFF8FED851}"/>
+              </a:ext>
+            </a:extLst>
+          </p:cNvPr>
+          <p:cNvSpPr>
+            <a:spLocks xmlns:a="http://schemas.openxmlformats.org/drawingml/2006/main" noGrp="1"/>
+          </p:cNvSpPr>
+          <p:nvPr/>
+        </p:nvSpPr>
+        <p:spPr>
+          <a:xfrm xmlns:a="http://schemas.openxmlformats.org/drawingml/2006/main">
+            <a:off x="0" y="0"/>
+            <a:ext cx="171450" cy="6858000"/>
+          </a:xfrm>
+          <a:prstGeom xmlns:a="http://schemas.openxmlformats.org/drawingml/2006/main" prst="rect">
+            <a:avLst/>
+          </a:prstGeom>
+          <a:solidFill xmlns:a="http://schemas.openxmlformats.org/drawingml/2006/main">
+            <a:srgbClr val="6657E8"/>
+          </a:solidFill>
+          <a:ln xmlns:a="http://schemas.openxmlformats.org/drawingml/2006/main" w="0">
+            <a:noFill/>
+            <a:prstDash val="solid"/>
+          </a:ln>
+        </p:spPr>
+      </p:sp>
+      <p:sp>
+        <p:nvSpPr>
+          <p:cNvPr id="2" name="">
+            <a:extLst xmlns:a="http://schemas.openxmlformats.org/drawingml/2006/main">
+              <a:ext uri="{FF2B5EF4-FFF2-40B4-BE49-F238E27FC236}">
+                <a16:creationId xmlns:a16="http://schemas.microsoft.com/office/drawing/2014/main" id="{AAA07792-5A31-4B41-B3B7-AD1291DF01F3}"/>
+              </a:ext>
+            </a:extLst>
+          </p:cNvPr>
+          <p:cNvSpPr>
+            <a:spLocks xmlns:a="http://schemas.openxmlformats.org/drawingml/2006/main" noGrp="1"/>
+          </p:cNvSpPr>
+          <p:nvPr/>
+        </p:nvSpPr>
+        <p:spPr>
+          <a:xfrm xmlns:a="http://schemas.openxmlformats.org/drawingml/2006/main">
+            <a:off x="647700" y="457200"/>
+            <a:ext cx="10096500" cy="552450"/>
+          </a:xfrm>
+          <a:prstGeom xmlns:a="http://schemas.openxmlformats.org/drawingml/2006/main" prst="rect">
+            <a:avLst/>
+          </a:prstGeom>
+          <a:noFill xmlns:a="http://schemas.openxmlformats.org/drawingml/2006/main"/>
+          <a:ln xmlns:a="http://schemas.openxmlformats.org/drawingml/2006/main" w="0">
+            <a:noFill/>
+            <a:prstDash val="solid"/>
+          </a:ln>
+        </p:spPr>
+        <p:txBody>
+          <a:bodyPr xmlns:a="http://schemas.openxmlformats.org/drawingml/2006/main"/>
+          <a:lstStyle xmlns:a="http://schemas.openxmlformats.org/drawingml/2006/main"/>
+          <a:p xmlns:a="http://schemas.openxmlformats.org/drawingml/2006/main">
+            <a:pPr>
+              <a:defRPr sz="2700" b="1">
+                <a:solidFill>
+                  <a:srgbClr val="182235"/>
+                </a:solidFill>
+              </a:defRPr>
+            </a:pPr>
+            <a:r>
+              <a:rPr sz="2700" b="1">
+                <a:solidFill>
+                  <a:srgbClr val="182235"/>
+                </a:solidFill>
+              </a:rPr>
+              <a:t>오류는 첫 문장부터 차례로 해결합니다</a:t>
+            </a:r>
+          </a:p>
+        </p:txBody>
+      </p:sp>
+      <p:sp>
+        <p:nvSpPr>
+          <p:cNvPr id="3" name="">
+            <a:extLst xmlns:a="http://schemas.openxmlformats.org/drawingml/2006/main">
+              <a:ext uri="{FF2B5EF4-FFF2-40B4-BE49-F238E27FC236}">
+                <a16:creationId xmlns:a16="http://schemas.microsoft.com/office/drawing/2014/main" id="{7BF5DFCD-5F85-4E1F-A87B-EB968A26458B}"/>
+              </a:ext>
+            </a:extLst>
+          </p:cNvPr>
+          <p:cNvSpPr>
+            <a:spLocks xmlns:a="http://schemas.openxmlformats.org/drawingml/2006/main" noGrp="1"/>
+          </p:cNvSpPr>
+          <p:nvPr/>
+        </p:nvSpPr>
+        <p:spPr>
+          <a:xfrm xmlns:a="http://schemas.openxmlformats.org/drawingml/2006/main">
+            <a:off x="666750" y="6419850"/>
+            <a:ext cx="10096500" cy="209550"/>
+          </a:xfrm>
+          <a:prstGeom xmlns:a="http://schemas.openxmlformats.org/drawingml/2006/main" prst="rect">
+            <a:avLst/>
+          </a:prstGeom>
+          <a:noFill xmlns:a="http://schemas.openxmlformats.org/drawingml/2006/main"/>
+          <a:ln xmlns:a="http://schemas.openxmlformats.org/drawingml/2006/main" w="0">
+            <a:noFill/>
+            <a:prstDash val="solid"/>
+          </a:ln>
+        </p:spPr>
+        <p:txBody>
+          <a:bodyPr xmlns:a="http://schemas.openxmlformats.org/drawingml/2006/main"/>
+          <a:lstStyle xmlns:a="http://schemas.openxmlformats.org/drawingml/2006/main"/>
+          <a:p xmlns:a="http://schemas.openxmlformats.org/drawingml/2006/main">
+            <a:pPr>
+              <a:defRPr sz="975">
+                <a:solidFill>
+                  <a:srgbClr val="657083"/>
+                </a:solidFill>
+              </a:defRPr>
+            </a:pPr>
+            <a:r>
+              <a:rPr sz="975">
+                <a:solidFill>
+                  <a:srgbClr val="657083"/>
+                </a:solidFill>
+              </a:rPr>
+              <a:t>EDU 웹개발 교육 플랫폼  ·  12</a:t>
+            </a:r>
+          </a:p>
+        </p:txBody>
+      </p:sp>
+      <p:sp>
+        <p:nvSpPr>
+          <p:cNvPr id="4" name="">
+            <a:extLst xmlns:a="http://schemas.openxmlformats.org/drawingml/2006/main">
+              <a:ext uri="{FF2B5EF4-FFF2-40B4-BE49-F238E27FC236}">
+                <a16:creationId xmlns:a16="http://schemas.microsoft.com/office/drawing/2014/main" id="{CA46C36E-52B4-4015-9287-CF907F2D15B0}"/>
+              </a:ext>
+            </a:extLst>
+          </p:cNvPr>
+          <p:cNvSpPr>
+            <a:spLocks xmlns:a="http://schemas.openxmlformats.org/drawingml/2006/main" noGrp="1"/>
+          </p:cNvSpPr>
+          <p:nvPr/>
+        </p:nvSpPr>
+        <p:spPr>
+          <a:xfrm xmlns:a="http://schemas.openxmlformats.org/drawingml/2006/main">
+            <a:off x="723900" y="1333500"/>
+            <a:ext cx="10744200" cy="1123950"/>
+          </a:xfrm>
+          <a:prstGeom xmlns:a="http://schemas.openxmlformats.org/drawingml/2006/main" prst="roundRect">
+            <a:avLst>
+              <a:gd name="adj" fmla="val 10169"/>
+            </a:avLst>
+          </a:prstGeom>
+          <a:solidFill xmlns:a="http://schemas.openxmlformats.org/drawingml/2006/main">
+            <a:srgbClr val="FFF0ED"/>
+          </a:solidFill>
+          <a:ln xmlns:a="http://schemas.openxmlformats.org/drawingml/2006/main" w="0">
+            <a:noFill/>
+            <a:prstDash val="solid"/>
+          </a:ln>
+        </p:spPr>
+      </p:sp>
+      <p:sp>
+        <p:nvSpPr>
+          <p:cNvPr id="5" name="">
+            <a:extLst xmlns:a="http://schemas.openxmlformats.org/drawingml/2006/main">
+              <a:ext uri="{FF2B5EF4-FFF2-40B4-BE49-F238E27FC236}">
+                <a16:creationId xmlns:a16="http://schemas.microsoft.com/office/drawing/2014/main" id="{91719ACB-ED08-4D2E-9B1C-8967727BFCF2}"/>
+              </a:ext>
+            </a:extLst>
+          </p:cNvPr>
+          <p:cNvSpPr>
+            <a:spLocks xmlns:a="http://schemas.openxmlformats.org/drawingml/2006/main" noGrp="1"/>
+          </p:cNvSpPr>
+          <p:nvPr/>
+        </p:nvSpPr>
+        <p:spPr>
+          <a:xfrm xmlns:a="http://schemas.openxmlformats.org/drawingml/2006/main">
+            <a:off x="1000125" y="1562100"/>
+            <a:ext cx="2857500" cy="361950"/>
+          </a:xfrm>
+          <a:prstGeom xmlns:a="http://schemas.openxmlformats.org/drawingml/2006/main" prst="rect">
+            <a:avLst/>
+          </a:prstGeom>
+          <a:noFill xmlns:a="http://schemas.openxmlformats.org/drawingml/2006/main"/>
+          <a:ln xmlns:a="http://schemas.openxmlformats.org/drawingml/2006/main" w="0">
+            <a:noFill/>
+            <a:prstDash val="solid"/>
+          </a:ln>
+        </p:spPr>
+        <p:txBody>
+          <a:bodyPr xmlns:a="http://schemas.openxmlformats.org/drawingml/2006/main"/>
+          <a:lstStyle xmlns:a="http://schemas.openxmlformats.org/drawingml/2006/main"/>
+          <a:p xmlns:a="http://schemas.openxmlformats.org/drawingml/2006/main">
+            <a:pPr>
+              <a:defRPr sz="1650" b="1">
+                <a:solidFill>
+                  <a:srgbClr val="A8493B"/>
+                </a:solidFill>
+              </a:defRPr>
+            </a:pPr>
+            <a:r>
+              <a:rPr sz="1650" b="1">
+                <a:solidFill>
+                  <a:srgbClr val="A8493B"/>
+                </a:solidFill>
+              </a:rPr>
+              <a:t>fetch first가 나와요</a:t>
+            </a:r>
+          </a:p>
+        </p:txBody>
+      </p:sp>
+      <p:sp>
+        <p:nvSpPr>
+          <p:cNvPr id="6" name="">
+            <a:extLst xmlns:a="http://schemas.openxmlformats.org/drawingml/2006/main">
+              <a:ext uri="{FF2B5EF4-FFF2-40B4-BE49-F238E27FC236}">
+                <a16:creationId xmlns:a16="http://schemas.microsoft.com/office/drawing/2014/main" id="{CBB15C15-32F8-4963-8046-94B0EA4C7A90}"/>
+              </a:ext>
+            </a:extLst>
+          </p:cNvPr>
+          <p:cNvSpPr>
+            <a:spLocks xmlns:a="http://schemas.openxmlformats.org/drawingml/2006/main" noGrp="1"/>
+          </p:cNvSpPr>
+          <p:nvPr/>
+        </p:nvSpPr>
+        <p:spPr>
+          <a:xfrm xmlns:a="http://schemas.openxmlformats.org/drawingml/2006/main">
+            <a:off x="4000500" y="1495425"/>
+            <a:ext cx="6953250" cy="619125"/>
+          </a:xfrm>
+          <a:prstGeom xmlns:a="http://schemas.openxmlformats.org/drawingml/2006/main" prst="rect">
+            <a:avLst/>
+          </a:prstGeom>
+          <a:noFill xmlns:a="http://schemas.openxmlformats.org/drawingml/2006/main"/>
+          <a:ln xmlns:a="http://schemas.openxmlformats.org/drawingml/2006/main" w="0">
+            <a:noFill/>
+            <a:prstDash val="solid"/>
+          </a:ln>
+        </p:spPr>
+        <p:txBody>
+          <a:bodyPr xmlns:a="http://schemas.openxmlformats.org/drawingml/2006/main"/>
+          <a:lstStyle xmlns:a="http://schemas.openxmlformats.org/drawingml/2006/main"/>
+          <a:p xmlns:a="http://schemas.openxmlformats.org/drawingml/2006/main">
+            <a:pPr>
+              <a:defRPr sz="1575">
+                <a:solidFill>
+                  <a:srgbClr val="182235"/>
+                </a:solidFill>
+              </a:defRPr>
+            </a:pPr>
+            <a:r>
+              <a:rPr sz="1575">
+                <a:solidFill>
+                  <a:srgbClr val="182235"/>
+                </a:solidFill>
+              </a:rPr>
+              <a:t>git pull --rebase로 원격 변경을 먼저 통합합니다.</a:t>
+            </a:r>
+          </a:p>
+        </p:txBody>
+      </p:sp>
+      <p:sp>
+        <p:nvSpPr>
+          <p:cNvPr id="7" name="">
+            <a:extLst xmlns:a="http://schemas.openxmlformats.org/drawingml/2006/main">
+              <a:ext uri="{FF2B5EF4-FFF2-40B4-BE49-F238E27FC236}">
+                <a16:creationId xmlns:a16="http://schemas.microsoft.com/office/drawing/2014/main" id="{36CAB6A4-2182-4969-A81C-D57237E81898}"/>
+              </a:ext>
+            </a:extLst>
+          </p:cNvPr>
+          <p:cNvSpPr>
+            <a:spLocks xmlns:a="http://schemas.openxmlformats.org/drawingml/2006/main" noGrp="1"/>
+          </p:cNvSpPr>
+          <p:nvPr/>
+        </p:nvSpPr>
+        <p:spPr>
+          <a:xfrm xmlns:a="http://schemas.openxmlformats.org/drawingml/2006/main">
+            <a:off x="723900" y="2762250"/>
+            <a:ext cx="10744200" cy="1123950"/>
+          </a:xfrm>
+          <a:prstGeom xmlns:a="http://schemas.openxmlformats.org/drawingml/2006/main" prst="roundRect">
+            <a:avLst>
+              <a:gd name="adj" fmla="val 10169"/>
+            </a:avLst>
+          </a:prstGeom>
+          <a:solidFill xmlns:a="http://schemas.openxmlformats.org/drawingml/2006/main">
+            <a:srgbClr val="EAF8F3"/>
+          </a:solidFill>
+          <a:ln xmlns:a="http://schemas.openxmlformats.org/drawingml/2006/main" w="0">
+            <a:noFill/>
+            <a:prstDash val="solid"/>
+          </a:ln>
+        </p:spPr>
+      </p:sp>
+      <p:sp>
+        <p:nvSpPr>
+          <p:cNvPr id="8" name="">
+            <a:extLst xmlns:a="http://schemas.openxmlformats.org/drawingml/2006/main">
+              <a:ext uri="{FF2B5EF4-FFF2-40B4-BE49-F238E27FC236}">
+                <a16:creationId xmlns:a16="http://schemas.microsoft.com/office/drawing/2014/main" id="{5F72588E-FF89-4A13-9A86-10F7357DA46D}"/>
+              </a:ext>
+            </a:extLst>
+          </p:cNvPr>
+          <p:cNvSpPr>
+            <a:spLocks xmlns:a="http://schemas.openxmlformats.org/drawingml/2006/main" noGrp="1"/>
+          </p:cNvSpPr>
+          <p:nvPr/>
+        </p:nvSpPr>
+        <p:spPr>
+          <a:xfrm xmlns:a="http://schemas.openxmlformats.org/drawingml/2006/main">
+            <a:off x="1000125" y="2990850"/>
+            <a:ext cx="2857500" cy="361950"/>
+          </a:xfrm>
+          <a:prstGeom xmlns:a="http://schemas.openxmlformats.org/drawingml/2006/main" prst="rect">
+            <a:avLst/>
+          </a:prstGeom>
+          <a:noFill xmlns:a="http://schemas.openxmlformats.org/drawingml/2006/main"/>
+          <a:ln xmlns:a="http://schemas.openxmlformats.org/drawingml/2006/main" w="0">
+            <a:noFill/>
+            <a:prstDash val="solid"/>
+          </a:ln>
+        </p:spPr>
+        <p:txBody>
+          <a:bodyPr xmlns:a="http://schemas.openxmlformats.org/drawingml/2006/main"/>
+          <a:lstStyle xmlns:a="http://schemas.openxmlformats.org/drawingml/2006/main"/>
+          <a:p xmlns:a="http://schemas.openxmlformats.org/drawingml/2006/main">
+            <a:pPr>
+              <a:defRPr sz="1650" b="1">
+                <a:solidFill>
+                  <a:srgbClr val="26755F"/>
+                </a:solidFill>
+              </a:defRPr>
+            </a:pPr>
+            <a:r>
+              <a:rPr sz="1650" b="1">
+                <a:solidFill>
+                  <a:srgbClr val="26755F"/>
+                </a:solidFill>
+              </a:rPr>
+              <a:t>safe.directory 경고가 나요</a:t>
+            </a:r>
+          </a:p>
+        </p:txBody>
+      </p:sp>
+      <p:sp>
+        <p:nvSpPr>
+          <p:cNvPr id="9" name="">
+            <a:extLst xmlns:a="http://schemas.openxmlformats.org/drawingml/2006/main">
+              <a:ext uri="{FF2B5EF4-FFF2-40B4-BE49-F238E27FC236}">
+                <a16:creationId xmlns:a16="http://schemas.microsoft.com/office/drawing/2014/main" id="{881268D7-4F17-4C5E-A30E-8492C01F4699}"/>
+              </a:ext>
+            </a:extLst>
+          </p:cNvPr>
+          <p:cNvSpPr>
+            <a:spLocks xmlns:a="http://schemas.openxmlformats.org/drawingml/2006/main" noGrp="1"/>
+          </p:cNvSpPr>
+          <p:nvPr/>
+        </p:nvSpPr>
+        <p:spPr>
+          <a:xfrm xmlns:a="http://schemas.openxmlformats.org/drawingml/2006/main">
+            <a:off x="4000500" y="2924175"/>
+            <a:ext cx="6953250" cy="619125"/>
+          </a:xfrm>
+          <a:prstGeom xmlns:a="http://schemas.openxmlformats.org/drawingml/2006/main" prst="rect">
+            <a:avLst/>
+          </a:prstGeom>
+          <a:noFill xmlns:a="http://schemas.openxmlformats.org/drawingml/2006/main"/>
+          <a:ln xmlns:a="http://schemas.openxmlformats.org/drawingml/2006/main" w="0">
+            <a:noFill/>
+            <a:prstDash val="solid"/>
+          </a:ln>
+        </p:spPr>
+        <p:txBody>
+          <a:bodyPr xmlns:a="http://schemas.openxmlformats.org/drawingml/2006/main"/>
+          <a:lstStyle xmlns:a="http://schemas.openxmlformats.org/drawingml/2006/main"/>
+          <a:p xmlns:a="http://schemas.openxmlformats.org/drawingml/2006/main">
+            <a:pPr>
+              <a:defRPr sz="1575">
+                <a:solidFill>
+                  <a:srgbClr val="182235"/>
+                </a:solidFill>
+              </a:defRPr>
+            </a:pPr>
+            <a:r>
+              <a:rPr sz="1575">
+                <a:solidFill>
+                  <a:srgbClr val="182235"/>
+                </a:solidFill>
+              </a:rPr>
+              <a:t>정확한 프로젝트 경로만 안전 폴더로 등록합니다.</a:t>
+            </a:r>
+          </a:p>
+        </p:txBody>
+      </p:sp>
+      <p:sp>
+        <p:nvSpPr>
+          <p:cNvPr id="10" name="">
+            <a:extLst xmlns:a="http://schemas.openxmlformats.org/drawingml/2006/main">
+              <a:ext uri="{FF2B5EF4-FFF2-40B4-BE49-F238E27FC236}">
+                <a16:creationId xmlns:a16="http://schemas.microsoft.com/office/drawing/2014/main" id="{EBCA7640-ABF6-46DC-840D-EF9F62FCFC38}"/>
+              </a:ext>
+            </a:extLst>
+          </p:cNvPr>
+          <p:cNvSpPr>
+            <a:spLocks xmlns:a="http://schemas.openxmlformats.org/drawingml/2006/main" noGrp="1"/>
+          </p:cNvSpPr>
+          <p:nvPr/>
+        </p:nvSpPr>
+        <p:spPr>
+          <a:xfrm xmlns:a="http://schemas.openxmlformats.org/drawingml/2006/main">
+            <a:off x="723900" y="4191000"/>
+            <a:ext cx="10744200" cy="1123950"/>
+          </a:xfrm>
+          <a:prstGeom xmlns:a="http://schemas.openxmlformats.org/drawingml/2006/main" prst="roundRect">
+            <a:avLst>
+              <a:gd name="adj" fmla="val 10169"/>
+            </a:avLst>
+          </a:prstGeom>
+          <a:solidFill xmlns:a="http://schemas.openxmlformats.org/drawingml/2006/main">
+            <a:srgbClr val="FFF0ED"/>
+          </a:solidFill>
+          <a:ln xmlns:a="http://schemas.openxmlformats.org/drawingml/2006/main" w="0">
+            <a:noFill/>
+            <a:prstDash val="solid"/>
+          </a:ln>
+        </p:spPr>
+      </p:sp>
+      <p:sp>
+        <p:nvSpPr>
+          <p:cNvPr id="11" name="">
+            <a:extLst xmlns:a="http://schemas.openxmlformats.org/drawingml/2006/main">
+              <a:ext uri="{FF2B5EF4-FFF2-40B4-BE49-F238E27FC236}">
+                <a16:creationId xmlns:a16="http://schemas.microsoft.com/office/drawing/2014/main" id="{6DFE0FDF-1CFD-4392-B40F-A9BC8297DC02}"/>
+              </a:ext>
+            </a:extLst>
+          </p:cNvPr>
+          <p:cNvSpPr>
+            <a:spLocks xmlns:a="http://schemas.openxmlformats.org/drawingml/2006/main" noGrp="1"/>
+          </p:cNvSpPr>
+          <p:nvPr/>
+        </p:nvSpPr>
+        <p:spPr>
+          <a:xfrm xmlns:a="http://schemas.openxmlformats.org/drawingml/2006/main">
+            <a:off x="1000125" y="4419600"/>
+            <a:ext cx="2857500" cy="361950"/>
+          </a:xfrm>
+          <a:prstGeom xmlns:a="http://schemas.openxmlformats.org/drawingml/2006/main" prst="rect">
+            <a:avLst/>
+          </a:prstGeom>
+          <a:noFill xmlns:a="http://schemas.openxmlformats.org/drawingml/2006/main"/>
+          <a:ln xmlns:a="http://schemas.openxmlformats.org/drawingml/2006/main" w="0">
+            <a:noFill/>
+            <a:prstDash val="solid"/>
+          </a:ln>
+        </p:spPr>
+        <p:txBody>
+          <a:bodyPr xmlns:a="http://schemas.openxmlformats.org/drawingml/2006/main"/>
+          <a:lstStyle xmlns:a="http://schemas.openxmlformats.org/drawingml/2006/main"/>
+          <a:p xmlns:a="http://schemas.openxmlformats.org/drawingml/2006/main">
+            <a:pPr>
+              <a:defRPr sz="1650" b="1">
+                <a:solidFill>
+                  <a:srgbClr val="A8493B"/>
+                </a:solidFill>
+              </a:defRPr>
+            </a:pPr>
+            <a:r>
+              <a:rPr sz="1650" b="1">
+                <a:solidFill>
+                  <a:srgbClr val="A8493B"/>
+                </a:solidFill>
+              </a:rPr>
+              <a:t>인증 오류가 나요</a:t>
+            </a:r>
+          </a:p>
+        </p:txBody>
+      </p:sp>
+      <p:sp>
+        <p:nvSpPr>
+          <p:cNvPr id="12" name="">
+            <a:extLst xmlns:a="http://schemas.openxmlformats.org/drawingml/2006/main">
+              <a:ext uri="{FF2B5EF4-FFF2-40B4-BE49-F238E27FC236}">
+                <a16:creationId xmlns:a16="http://schemas.microsoft.com/office/drawing/2014/main" id="{843DA2DC-CFAB-49C8-9740-CD1078AD9411}"/>
+              </a:ext>
+            </a:extLst>
+          </p:cNvPr>
+          <p:cNvSpPr>
+            <a:spLocks xmlns:a="http://schemas.openxmlformats.org/drawingml/2006/main" noGrp="1"/>
+          </p:cNvSpPr>
+          <p:nvPr/>
+        </p:nvSpPr>
+        <p:spPr>
+          <a:xfrm xmlns:a="http://schemas.openxmlformats.org/drawingml/2006/main">
+            <a:off x="4000500" y="4352925"/>
+            <a:ext cx="6953250" cy="619125"/>
+          </a:xfrm>
+          <a:prstGeom xmlns:a="http://schemas.openxmlformats.org/drawingml/2006/main" prst="rect">
+            <a:avLst/>
+          </a:prstGeom>
+          <a:noFill xmlns:a="http://schemas.openxmlformats.org/drawingml/2006/main"/>
+          <a:ln xmlns:a="http://schemas.openxmlformats.org/drawingml/2006/main" w="0">
+            <a:noFill/>
+            <a:prstDash val="solid"/>
+          </a:ln>
+        </p:spPr>
+        <p:txBody>
+          <a:bodyPr xmlns:a="http://schemas.openxmlformats.org/drawingml/2006/main"/>
+          <a:lstStyle xmlns:a="http://schemas.openxmlformats.org/drawingml/2006/main"/>
+          <a:p xmlns:a="http://schemas.openxmlformats.org/drawingml/2006/main">
+            <a:pPr>
+              <a:defRPr sz="1575">
+                <a:solidFill>
+                  <a:srgbClr val="182235"/>
+                </a:solidFill>
+              </a:defRPr>
+            </a:pPr>
+            <a:r>
+              <a:rPr sz="1575">
+                <a:solidFill>
+                  <a:srgbClr val="182235"/>
+                </a:solidFill>
+              </a:rPr>
+              <a:t>Git Credential Manager로 GitHub 로그인을 확인합니다.</a:t>
+            </a:r>
+          </a:p>
+        </p:txBody>
+      </p:sp>
+    </p:spTree>
+    <p:extLst>
+      <p:ext uri="{BB962C8B-B14F-4D97-AF65-F5344CB8AC3E}">
+        <p14:creationId xmlns:p14="http://schemas.microsoft.com/office/powerpoint/2010/main" val="909300420"/>
+      </p:ext>
+    </p:extLst>
+  </p:cSld>
+</p:sld>
+</file>
+
+<file path=ppt/slides/slide13.xml><?xml version="1.0" encoding="utf-8"?>
+<p:sld xmlns:p="http://schemas.openxmlformats.org/presentationml/2006/main">
+  <p:cSld>
+    <p:bg>
+      <p:bgPr>
+        <a:solidFill xmlns:a="http://schemas.openxmlformats.org/drawingml/2006/main">
+          <a:srgbClr val="FFFCF8"/>
+        </a:solidFill>
+      </p:bgPr>
+    </p:bg>
+    <p:spTree>
+      <p:nvGrpSpPr>
+        <p:cNvPr id="1" name=""/>
+        <p:cNvGrpSpPr/>
+        <p:nvPr/>
+      </p:nvGrpSpPr>
+      <p:grpSpPr>
+        <a:xfrm xmlns:a="http://schemas.openxmlformats.org/drawingml/2006/main"/>
+      </p:grpSpPr>
+      <p:sp>
+        <p:nvSpPr>
+          <p:cNvPr id="13" name="">
+            <a:extLst xmlns:a="http://schemas.openxmlformats.org/drawingml/2006/main">
+              <a:ext uri="{FF2B5EF4-FFF2-40B4-BE49-F238E27FC236}">
+                <a16:creationId xmlns:a16="http://schemas.microsoft.com/office/drawing/2014/main" id="{62A34098-EF6B-4EDF-A84F-746CF65D97C9}"/>
+              </a:ext>
+            </a:extLst>
+          </p:cNvPr>
+          <p:cNvSpPr>
+            <a:spLocks xmlns:a="http://schemas.openxmlformats.org/drawingml/2006/main" noGrp="1"/>
+          </p:cNvSpPr>
+          <p:nvPr/>
+        </p:nvSpPr>
+        <p:spPr>
+          <a:xfrm xmlns:a="http://schemas.openxmlformats.org/drawingml/2006/main">
+            <a:off x="0" y="0"/>
+            <a:ext cx="171450" cy="6858000"/>
+          </a:xfrm>
+          <a:prstGeom xmlns:a="http://schemas.openxmlformats.org/drawingml/2006/main" prst="rect">
+            <a:avLst/>
+          </a:prstGeom>
+          <a:solidFill xmlns:a="http://schemas.openxmlformats.org/drawingml/2006/main">
+            <a:srgbClr val="6657E8"/>
+          </a:solidFill>
+          <a:ln xmlns:a="http://schemas.openxmlformats.org/drawingml/2006/main" w="0">
+            <a:noFill/>
+            <a:prstDash val="solid"/>
+          </a:ln>
+        </p:spPr>
+      </p:sp>
+      <p:sp>
+        <p:nvSpPr>
+          <p:cNvPr id="2" name="">
+            <a:extLst xmlns:a="http://schemas.openxmlformats.org/drawingml/2006/main">
+              <a:ext uri="{FF2B5EF4-FFF2-40B4-BE49-F238E27FC236}">
+                <a16:creationId xmlns:a16="http://schemas.microsoft.com/office/drawing/2014/main" id="{EC6BC435-3E18-473F-83AC-65EA6DA92BDB}"/>
+              </a:ext>
+            </a:extLst>
+          </p:cNvPr>
+          <p:cNvSpPr>
+            <a:spLocks xmlns:a="http://schemas.openxmlformats.org/drawingml/2006/main" noGrp="1"/>
+          </p:cNvSpPr>
+          <p:nvPr/>
+        </p:nvSpPr>
+        <p:spPr>
+          <a:xfrm xmlns:a="http://schemas.openxmlformats.org/drawingml/2006/main">
+            <a:off x="647700" y="457200"/>
+            <a:ext cx="10096500" cy="552450"/>
+          </a:xfrm>
+          <a:prstGeom xmlns:a="http://schemas.openxmlformats.org/drawingml/2006/main" prst="rect">
+            <a:avLst/>
+          </a:prstGeom>
+          <a:noFill xmlns:a="http://schemas.openxmlformats.org/drawingml/2006/main"/>
+          <a:ln xmlns:a="http://schemas.openxmlformats.org/drawingml/2006/main" w="0">
+            <a:noFill/>
+            <a:prstDash val="solid"/>
+          </a:ln>
+        </p:spPr>
+        <p:txBody>
+          <a:bodyPr xmlns:a="http://schemas.openxmlformats.org/drawingml/2006/main"/>
+          <a:lstStyle xmlns:a="http://schemas.openxmlformats.org/drawingml/2006/main"/>
+          <a:p xmlns:a="http://schemas.openxmlformats.org/drawingml/2006/main">
+            <a:pPr>
+              <a:defRPr sz="2700" b="1">
+                <a:solidFill>
+                  <a:srgbClr val="182235"/>
+                </a:solidFill>
+              </a:defRPr>
+            </a:pPr>
+            <a:r>
+              <a:rPr sz="2700" b="1">
+                <a:solidFill>
+                  <a:srgbClr val="182235"/>
+                </a:solidFill>
+              </a:rPr>
+              <a:t>상황에 맞는 Codex 요청문을 골라 쓰세요</a:t>
+            </a:r>
+          </a:p>
+        </p:txBody>
+      </p:sp>
+      <p:sp>
+        <p:nvSpPr>
+          <p:cNvPr id="3" name="">
+            <a:extLst xmlns:a="http://schemas.openxmlformats.org/drawingml/2006/main">
+              <a:ext uri="{FF2B5EF4-FFF2-40B4-BE49-F238E27FC236}">
+                <a16:creationId xmlns:a16="http://schemas.microsoft.com/office/drawing/2014/main" id="{B461748E-E414-41D5-9445-BCF919FB4551}"/>
+              </a:ext>
+            </a:extLst>
+          </p:cNvPr>
+          <p:cNvSpPr>
+            <a:spLocks xmlns:a="http://schemas.openxmlformats.org/drawingml/2006/main" noGrp="1"/>
+          </p:cNvSpPr>
+          <p:nvPr/>
+        </p:nvSpPr>
+        <p:spPr>
+          <a:xfrm xmlns:a="http://schemas.openxmlformats.org/drawingml/2006/main">
+            <a:off x="666750" y="6419850"/>
+            <a:ext cx="10096500" cy="209550"/>
+          </a:xfrm>
+          <a:prstGeom xmlns:a="http://schemas.openxmlformats.org/drawingml/2006/main" prst="rect">
+            <a:avLst/>
+          </a:prstGeom>
+          <a:noFill xmlns:a="http://schemas.openxmlformats.org/drawingml/2006/main"/>
+          <a:ln xmlns:a="http://schemas.openxmlformats.org/drawingml/2006/main" w="0">
+            <a:noFill/>
+            <a:prstDash val="solid"/>
+          </a:ln>
+        </p:spPr>
+        <p:txBody>
+          <a:bodyPr xmlns:a="http://schemas.openxmlformats.org/drawingml/2006/main"/>
+          <a:lstStyle xmlns:a="http://schemas.openxmlformats.org/drawingml/2006/main"/>
+          <a:p xmlns:a="http://schemas.openxmlformats.org/drawingml/2006/main">
+            <a:pPr>
+              <a:defRPr sz="975">
+                <a:solidFill>
+                  <a:srgbClr val="657083"/>
+                </a:solidFill>
+              </a:defRPr>
+            </a:pPr>
+            <a:r>
+              <a:rPr sz="975">
+                <a:solidFill>
+                  <a:srgbClr val="657083"/>
+                </a:solidFill>
+              </a:rPr>
+              <a:t>EDU 웹개발 교육 플랫폼  ·  13</a:t>
+            </a:r>
+          </a:p>
+        </p:txBody>
+      </p:sp>
+      <p:sp>
+        <p:nvSpPr>
+          <p:cNvPr id="4" name="">
+            <a:extLst xmlns:a="http://schemas.openxmlformats.org/drawingml/2006/main">
+              <a:ext uri="{FF2B5EF4-FFF2-40B4-BE49-F238E27FC236}">
+                <a16:creationId xmlns:a16="http://schemas.microsoft.com/office/drawing/2014/main" id="{6A129EB4-D371-4F04-9795-0303FD0E7A25}"/>
+              </a:ext>
+            </a:extLst>
+          </p:cNvPr>
+          <p:cNvSpPr>
+            <a:spLocks xmlns:a="http://schemas.openxmlformats.org/drawingml/2006/main" noGrp="1"/>
+          </p:cNvSpPr>
+          <p:nvPr/>
+        </p:nvSpPr>
+        <p:spPr>
+          <a:xfrm xmlns:a="http://schemas.openxmlformats.org/drawingml/2006/main">
+            <a:off x="742950" y="1381125"/>
+            <a:ext cx="514350" cy="514350"/>
+          </a:xfrm>
+          <a:prstGeom xmlns:a="http://schemas.openxmlformats.org/drawingml/2006/main" prst="roundRect">
+            <a:avLst>
+              <a:gd name="adj" fmla="val 22222"/>
+            </a:avLst>
+          </a:prstGeom>
+          <a:solidFill xmlns:a="http://schemas.openxmlformats.org/drawingml/2006/main">
+            <a:srgbClr val="EEEAFE"/>
+          </a:solidFill>
+          <a:ln xmlns:a="http://schemas.openxmlformats.org/drawingml/2006/main" w="0">
+            <a:noFill/>
+            <a:prstDash val="solid"/>
+          </a:ln>
+        </p:spPr>
+      </p:sp>
+      <p:sp>
+        <p:nvSpPr>
+          <p:cNvPr id="5" name="">
+            <a:extLst xmlns:a="http://schemas.openxmlformats.org/drawingml/2006/main">
+              <a:ext uri="{FF2B5EF4-FFF2-40B4-BE49-F238E27FC236}">
+                <a16:creationId xmlns:a16="http://schemas.microsoft.com/office/drawing/2014/main" id="{488C3969-6139-425E-9F32-3C4F498915CD}"/>
+              </a:ext>
+            </a:extLst>
+          </p:cNvPr>
+          <p:cNvSpPr>
+            <a:spLocks xmlns:a="http://schemas.openxmlformats.org/drawingml/2006/main" noGrp="1"/>
+          </p:cNvSpPr>
+          <p:nvPr/>
+        </p:nvSpPr>
+        <p:spPr>
+          <a:xfrm xmlns:a="http://schemas.openxmlformats.org/drawingml/2006/main">
+            <a:off x="742950" y="1476375"/>
+            <a:ext cx="514350" cy="304800"/>
+          </a:xfrm>
+          <a:prstGeom xmlns:a="http://schemas.openxmlformats.org/drawingml/2006/main" prst="rect">
+            <a:avLst/>
+          </a:prstGeom>
+          <a:noFill xmlns:a="http://schemas.openxmlformats.org/drawingml/2006/main"/>
+          <a:ln xmlns:a="http://schemas.openxmlformats.org/drawingml/2006/main" w="0">
+            <a:noFill/>
+            <a:prstDash val="solid"/>
+          </a:ln>
+        </p:spPr>
+        <p:txBody>
+          <a:bodyPr xmlns:a="http://schemas.openxmlformats.org/drawingml/2006/main"/>
+          <a:lstStyle xmlns:a="http://schemas.openxmlformats.org/drawingml/2006/main"/>
+          <a:p xmlns:a="http://schemas.openxmlformats.org/drawingml/2006/main">
+            <a:pPr algn="ctr">
+              <a:defRPr sz="1500" b="1">
+                <a:solidFill>
+                  <a:srgbClr val="6657E8"/>
+                </a:solidFill>
+              </a:defRPr>
+            </a:pPr>
+            <a:r>
+              <a:rPr sz="1500" b="1">
+                <a:solidFill>
+                  <a:srgbClr val="6657E8"/>
+                </a:solidFill>
+              </a:rPr>
+              <a:t>1</a:t>
+            </a:r>
+          </a:p>
+        </p:txBody>
+      </p:sp>
+      <p:sp>
+        <p:nvSpPr>
+          <p:cNvPr id="6" name="">
+            <a:extLst xmlns:a="http://schemas.openxmlformats.org/drawingml/2006/main">
+              <a:ext uri="{FF2B5EF4-FFF2-40B4-BE49-F238E27FC236}">
+                <a16:creationId xmlns:a16="http://schemas.microsoft.com/office/drawing/2014/main" id="{91F75673-C40F-4103-BE3D-51B32F374C6B}"/>
+              </a:ext>
+            </a:extLst>
+          </p:cNvPr>
+          <p:cNvSpPr>
+            <a:spLocks xmlns:a="http://schemas.openxmlformats.org/drawingml/2006/main" noGrp="1"/>
+          </p:cNvSpPr>
+          <p:nvPr/>
+        </p:nvSpPr>
+        <p:spPr>
+          <a:xfrm xmlns:a="http://schemas.openxmlformats.org/drawingml/2006/main">
+            <a:off x="1485900" y="1419225"/>
+            <a:ext cx="9239250" cy="619125"/>
+          </a:xfrm>
+          <a:prstGeom xmlns:a="http://schemas.openxmlformats.org/drawingml/2006/main" prst="rect">
+            <a:avLst/>
+          </a:prstGeom>
+          <a:noFill xmlns:a="http://schemas.openxmlformats.org/drawingml/2006/main"/>
+          <a:ln xmlns:a="http://schemas.openxmlformats.org/drawingml/2006/main" w="0">
+            <a:noFill/>
+            <a:prstDash val="solid"/>
+          </a:ln>
+        </p:spPr>
+        <p:txBody>
+          <a:bodyPr xmlns:a="http://schemas.openxmlformats.org/drawingml/2006/main"/>
+          <a:lstStyle xmlns:a="http://schemas.openxmlformats.org/drawingml/2006/main"/>
+          <a:p xmlns:a="http://schemas.openxmlformats.org/drawingml/2006/main">
+            <a:pPr>
+              <a:defRPr sz="1800">
+                <a:solidFill>
+                  <a:srgbClr val="182235"/>
+                </a:solidFill>
+              </a:defRPr>
+            </a:pPr>
+            <a:r>
+              <a:rPr sz="1800">
+                <a:solidFill>
+                  <a:srgbClr val="182235"/>
+                </a:solidFill>
+              </a:rPr>
+              <a:t>git status를 보고 비밀 파일이나 불필요한 파일이 있는지 점검해줘.</a:t>
+            </a:r>
+          </a:p>
+        </p:txBody>
+      </p:sp>
+      <p:sp>
+        <p:nvSpPr>
+          <p:cNvPr id="7" name="">
+            <a:extLst xmlns:a="http://schemas.openxmlformats.org/drawingml/2006/main">
+              <a:ext uri="{FF2B5EF4-FFF2-40B4-BE49-F238E27FC236}">
+                <a16:creationId xmlns:a16="http://schemas.microsoft.com/office/drawing/2014/main" id="{26F90CFA-AA8B-4486-97B5-B02A4E5A9B39}"/>
+              </a:ext>
+            </a:extLst>
+          </p:cNvPr>
+          <p:cNvSpPr>
+            <a:spLocks xmlns:a="http://schemas.openxmlformats.org/drawingml/2006/main" noGrp="1"/>
+          </p:cNvSpPr>
+          <p:nvPr/>
+        </p:nvSpPr>
+        <p:spPr>
+          <a:xfrm xmlns:a="http://schemas.openxmlformats.org/drawingml/2006/main">
+            <a:off x="742950" y="2352675"/>
+            <a:ext cx="514350" cy="514350"/>
+          </a:xfrm>
+          <a:prstGeom xmlns:a="http://schemas.openxmlformats.org/drawingml/2006/main" prst="roundRect">
+            <a:avLst>
+              <a:gd name="adj" fmla="val 22222"/>
+            </a:avLst>
+          </a:prstGeom>
+          <a:solidFill xmlns:a="http://schemas.openxmlformats.org/drawingml/2006/main">
+            <a:srgbClr val="EAF8F3"/>
+          </a:solidFill>
+          <a:ln xmlns:a="http://schemas.openxmlformats.org/drawingml/2006/main" w="0">
+            <a:noFill/>
+            <a:prstDash val="solid"/>
+          </a:ln>
+        </p:spPr>
+      </p:sp>
+      <p:sp>
+        <p:nvSpPr>
+          <p:cNvPr id="8" name="">
+            <a:extLst xmlns:a="http://schemas.openxmlformats.org/drawingml/2006/main">
+              <a:ext uri="{FF2B5EF4-FFF2-40B4-BE49-F238E27FC236}">
+                <a16:creationId xmlns:a16="http://schemas.microsoft.com/office/drawing/2014/main" id="{8A092D8C-59A6-455A-B8CF-2692B4839ADE}"/>
+              </a:ext>
+            </a:extLst>
+          </p:cNvPr>
+          <p:cNvSpPr>
+            <a:spLocks xmlns:a="http://schemas.openxmlformats.org/drawingml/2006/main" noGrp="1"/>
+          </p:cNvSpPr>
+          <p:nvPr/>
+        </p:nvSpPr>
+        <p:spPr>
+          <a:xfrm xmlns:a="http://schemas.openxmlformats.org/drawingml/2006/main">
+            <a:off x="742950" y="2447925"/>
+            <a:ext cx="514350" cy="304800"/>
+          </a:xfrm>
+          <a:prstGeom xmlns:a="http://schemas.openxmlformats.org/drawingml/2006/main" prst="rect">
+            <a:avLst/>
+          </a:prstGeom>
+          <a:noFill xmlns:a="http://schemas.openxmlformats.org/drawingml/2006/main"/>
+          <a:ln xmlns:a="http://schemas.openxmlformats.org/drawingml/2006/main" w="0">
+            <a:noFill/>
+            <a:prstDash val="solid"/>
+          </a:ln>
+        </p:spPr>
+        <p:txBody>
+          <a:bodyPr xmlns:a="http://schemas.openxmlformats.org/drawingml/2006/main"/>
+          <a:lstStyle xmlns:a="http://schemas.openxmlformats.org/drawingml/2006/main"/>
+          <a:p xmlns:a="http://schemas.openxmlformats.org/drawingml/2006/main">
+            <a:pPr algn="ctr">
+              <a:defRPr sz="1500" b="1">
+                <a:solidFill>
+                  <a:srgbClr val="6657E8"/>
+                </a:solidFill>
+              </a:defRPr>
+            </a:pPr>
+            <a:r>
+              <a:rPr sz="1500" b="1">
+                <a:solidFill>
+                  <a:srgbClr val="6657E8"/>
+                </a:solidFill>
+              </a:rPr>
+              <a:t>2</a:t>
+            </a:r>
+          </a:p>
+        </p:txBody>
+      </p:sp>
+      <p:sp>
+        <p:nvSpPr>
+          <p:cNvPr id="9" name="">
+            <a:extLst xmlns:a="http://schemas.openxmlformats.org/drawingml/2006/main">
+              <a:ext uri="{FF2B5EF4-FFF2-40B4-BE49-F238E27FC236}">
+                <a16:creationId xmlns:a16="http://schemas.microsoft.com/office/drawing/2014/main" id="{9DFF172F-34E3-48CA-B568-2B0A87D5466D}"/>
+              </a:ext>
+            </a:extLst>
+          </p:cNvPr>
+          <p:cNvSpPr>
+            <a:spLocks xmlns:a="http://schemas.openxmlformats.org/drawingml/2006/main" noGrp="1"/>
+          </p:cNvSpPr>
+          <p:nvPr/>
+        </p:nvSpPr>
+        <p:spPr>
+          <a:xfrm xmlns:a="http://schemas.openxmlformats.org/drawingml/2006/main">
+            <a:off x="1485900" y="2390775"/>
+            <a:ext cx="9239250" cy="619125"/>
+          </a:xfrm>
+          <a:prstGeom xmlns:a="http://schemas.openxmlformats.org/drawingml/2006/main" prst="rect">
+            <a:avLst/>
+          </a:prstGeom>
+          <a:noFill xmlns:a="http://schemas.openxmlformats.org/drawingml/2006/main"/>
+          <a:ln xmlns:a="http://schemas.openxmlformats.org/drawingml/2006/main" w="0">
+            <a:noFill/>
+            <a:prstDash val="solid"/>
+          </a:ln>
+        </p:spPr>
+        <p:txBody>
+          <a:bodyPr xmlns:a="http://schemas.openxmlformats.org/drawingml/2006/main"/>
+          <a:lstStyle xmlns:a="http://schemas.openxmlformats.org/drawingml/2006/main"/>
+          <a:p xmlns:a="http://schemas.openxmlformats.org/drawingml/2006/main">
+            <a:pPr>
+              <a:defRPr sz="1800">
+                <a:solidFill>
+                  <a:srgbClr val="182235"/>
+                </a:solidFill>
+              </a:defRPr>
+            </a:pPr>
+            <a:r>
+              <a:rPr sz="1800">
+                <a:solidFill>
+                  <a:srgbClr val="182235"/>
+                </a:solidFill>
+              </a:rPr>
+              <a:t>현재 변경만 이해하기 쉬운 커밋 제목으로 기록해줘.</a:t>
+            </a:r>
+          </a:p>
+        </p:txBody>
+      </p:sp>
+      <p:sp>
+        <p:nvSpPr>
+          <p:cNvPr id="10" name="">
+            <a:extLst xmlns:a="http://schemas.openxmlformats.org/drawingml/2006/main">
+              <a:ext uri="{FF2B5EF4-FFF2-40B4-BE49-F238E27FC236}">
+                <a16:creationId xmlns:a16="http://schemas.microsoft.com/office/drawing/2014/main" id="{72BB09EC-73DD-4029-A64B-7324A96E7E20}"/>
+              </a:ext>
+            </a:extLst>
+          </p:cNvPr>
+          <p:cNvSpPr>
+            <a:spLocks xmlns:a="http://schemas.openxmlformats.org/drawingml/2006/main" noGrp="1"/>
+          </p:cNvSpPr>
+          <p:nvPr/>
+        </p:nvSpPr>
+        <p:spPr>
+          <a:xfrm xmlns:a="http://schemas.openxmlformats.org/drawingml/2006/main">
+            <a:off x="742950" y="3324225"/>
+            <a:ext cx="514350" cy="514350"/>
+          </a:xfrm>
+          <a:prstGeom xmlns:a="http://schemas.openxmlformats.org/drawingml/2006/main" prst="roundRect">
+            <a:avLst>
+              <a:gd name="adj" fmla="val 22222"/>
+            </a:avLst>
+          </a:prstGeom>
+          <a:solidFill xmlns:a="http://schemas.openxmlformats.org/drawingml/2006/main">
+            <a:srgbClr val="EEEAFE"/>
+          </a:solidFill>
+          <a:ln xmlns:a="http://schemas.openxmlformats.org/drawingml/2006/main" w="0">
+            <a:noFill/>
+            <a:prstDash val="solid"/>
+          </a:ln>
+        </p:spPr>
+      </p:sp>
+      <p:sp>
+        <p:nvSpPr>
+          <p:cNvPr id="11" name="">
+            <a:extLst xmlns:a="http://schemas.openxmlformats.org/drawingml/2006/main">
+              <a:ext uri="{FF2B5EF4-FFF2-40B4-BE49-F238E27FC236}">
+                <a16:creationId xmlns:a16="http://schemas.microsoft.com/office/drawing/2014/main" id="{DB566504-8FEB-4644-8CD2-91EE0A496B6B}"/>
+              </a:ext>
+            </a:extLst>
+          </p:cNvPr>
+          <p:cNvSpPr>
+            <a:spLocks xmlns:a="http://schemas.openxmlformats.org/drawingml/2006/main" noGrp="1"/>
+          </p:cNvSpPr>
+          <p:nvPr/>
+        </p:nvSpPr>
+        <p:spPr>
+          <a:xfrm xmlns:a="http://schemas.openxmlformats.org/drawingml/2006/main">
+            <a:off x="742950" y="3419475"/>
+            <a:ext cx="514350" cy="304800"/>
+          </a:xfrm>
+          <a:prstGeom xmlns:a="http://schemas.openxmlformats.org/drawingml/2006/main" prst="rect">
+            <a:avLst/>
+          </a:prstGeom>
+          <a:noFill xmlns:a="http://schemas.openxmlformats.org/drawingml/2006/main"/>
+          <a:ln xmlns:a="http://schemas.openxmlformats.org/drawingml/2006/main" w="0">
+            <a:noFill/>
+            <a:prstDash val="solid"/>
+          </a:ln>
+        </p:spPr>
+        <p:txBody>
+          <a:bodyPr xmlns:a="http://schemas.openxmlformats.org/drawingml/2006/main"/>
+          <a:lstStyle xmlns:a="http://schemas.openxmlformats.org/drawingml/2006/main"/>
+          <a:p xmlns:a="http://schemas.openxmlformats.org/drawingml/2006/main">
+            <a:pPr algn="ctr">
+              <a:defRPr sz="1500" b="1">
+                <a:solidFill>
+                  <a:srgbClr val="6657E8"/>
+                </a:solidFill>
+              </a:defRPr>
+            </a:pPr>
+            <a:r>
+              <a:rPr sz="1500" b="1">
+                <a:solidFill>
+                  <a:srgbClr val="6657E8"/>
+                </a:solidFill>
+              </a:rPr>
+              <a:t>3</a:t>
+            </a:r>
+          </a:p>
+        </p:txBody>
+      </p:sp>
+      <p:sp>
+        <p:nvSpPr>
+          <p:cNvPr id="12" name="">
+            <a:extLst xmlns:a="http://schemas.openxmlformats.org/drawingml/2006/main">
+              <a:ext uri="{FF2B5EF4-FFF2-40B4-BE49-F238E27FC236}">
+                <a16:creationId xmlns:a16="http://schemas.microsoft.com/office/drawing/2014/main" id="{0DFC5337-B01A-4E5D-9DBD-3D9F6052ECDF}"/>
+              </a:ext>
+            </a:extLst>
+          </p:cNvPr>
+          <p:cNvSpPr>
+            <a:spLocks xmlns:a="http://schemas.openxmlformats.org/drawingml/2006/main" noGrp="1"/>
+          </p:cNvSpPr>
+          <p:nvPr/>
+        </p:nvSpPr>
+        <p:spPr>
+          <a:xfrm xmlns:a="http://schemas.openxmlformats.org/drawingml/2006/main">
+            <a:off x="1485900" y="3362325"/>
+            <a:ext cx="9239250" cy="619125"/>
+          </a:xfrm>
+          <a:prstGeom xmlns:a="http://schemas.openxmlformats.org/drawingml/2006/main" prst="rect">
+            <a:avLst/>
+          </a:prstGeom>
+          <a:noFill xmlns:a="http://schemas.openxmlformats.org/drawingml/2006/main"/>
+          <a:ln xmlns:a="http://schemas.openxmlformats.org/drawingml/2006/main" w="0">
+            <a:noFill/>
+            <a:prstDash val="solid"/>
+          </a:ln>
+        </p:spPr>
+        <p:txBody>
+          <a:bodyPr xmlns:a="http://schemas.openxmlformats.org/drawingml/2006/main"/>
+          <a:lstStyle xmlns:a="http://schemas.openxmlformats.org/drawingml/2006/main"/>
+          <a:p xmlns:a="http://schemas.openxmlformats.org/drawingml/2006/main">
+            <a:pPr>
+              <a:defRPr sz="1800">
+                <a:solidFill>
+                  <a:srgbClr val="182235"/>
+                </a:solidFill>
+              </a:defRPr>
+            </a:pPr>
+            <a:r>
+              <a:rPr sz="1800">
+                <a:solidFill>
+                  <a:srgbClr val="182235"/>
+                </a:solidFill>
+              </a:rPr>
+              <a:t>강제 푸시 없이 원격 변경을 안전하게 통합하는 순서를 알려줘.</a:t>
+            </a:r>
+          </a:p>
+        </p:txBody>
+      </p:sp>
+    </p:spTree>
+    <p:extLst>
+      <p:ext uri="{BB962C8B-B14F-4D97-AF65-F5344CB8AC3E}">
+        <p14:creationId xmlns:p14="http://schemas.microsoft.com/office/powerpoint/2010/main" val="1792545462"/>
+      </p:ext>
+    </p:extLst>
+  </p:cSld>
+</p:sld>
+</file>
+
+<file path=ppt/slides/slide14.xml><?xml version="1.0" encoding="utf-8"?>
+<p:sld xmlns:p="http://schemas.openxmlformats.org/presentationml/2006/main">
+  <p:cSld>
+    <p:bg>
+      <p:bgPr>
+        <a:solidFill xmlns:a="http://schemas.openxmlformats.org/drawingml/2006/main">
+          <a:srgbClr val="FFFCF8"/>
+        </a:solidFill>
+      </p:bgPr>
+    </p:bg>
+    <p:spTree>
+      <p:nvGrpSpPr>
+        <p:cNvPr id="1" name=""/>
+        <p:cNvGrpSpPr/>
+        <p:nvPr/>
+      </p:nvGrpSpPr>
+      <p:grpSpPr>
+        <a:xfrm xmlns:a="http://schemas.openxmlformats.org/drawingml/2006/main"/>
+      </p:grpSpPr>
+      <p:sp>
+        <p:nvSpPr>
+          <p:cNvPr id="7" name="">
+            <a:extLst xmlns:a="http://schemas.openxmlformats.org/drawingml/2006/main">
+              <a:ext uri="{FF2B5EF4-FFF2-40B4-BE49-F238E27FC236}">
+                <a16:creationId xmlns:a16="http://schemas.microsoft.com/office/drawing/2014/main" id="{A6EE61F0-D803-448A-B6CA-9626E6D51ACD}"/>
+              </a:ext>
+            </a:extLst>
+          </p:cNvPr>
+          <p:cNvSpPr>
+            <a:spLocks xmlns:a="http://schemas.openxmlformats.org/drawingml/2006/main" noGrp="1"/>
+          </p:cNvSpPr>
+          <p:nvPr/>
+        </p:nvSpPr>
+        <p:spPr>
+          <a:xfrm xmlns:a="http://schemas.openxmlformats.org/drawingml/2006/main">
+            <a:off x="0" y="0"/>
+            <a:ext cx="171450" cy="6858000"/>
+          </a:xfrm>
+          <a:prstGeom xmlns:a="http://schemas.openxmlformats.org/drawingml/2006/main" prst="rect">
+            <a:avLst/>
+          </a:prstGeom>
+          <a:solidFill xmlns:a="http://schemas.openxmlformats.org/drawingml/2006/main">
+            <a:srgbClr val="6657E8"/>
+          </a:solidFill>
+          <a:ln xmlns:a="http://schemas.openxmlformats.org/drawingml/2006/main" w="0">
+            <a:noFill/>
+            <a:prstDash val="solid"/>
+          </a:ln>
+        </p:spPr>
+      </p:sp>
+      <p:sp>
+        <p:nvSpPr>
+          <p:cNvPr id="2" name="">
+            <a:extLst xmlns:a="http://schemas.openxmlformats.org/drawingml/2006/main">
+              <a:ext uri="{FF2B5EF4-FFF2-40B4-BE49-F238E27FC236}">
+                <a16:creationId xmlns:a16="http://schemas.microsoft.com/office/drawing/2014/main" id="{E2B8D963-B688-46FD-88C9-F79E6C1B00D8}"/>
+              </a:ext>
+            </a:extLst>
+          </p:cNvPr>
+          <p:cNvSpPr>
+            <a:spLocks xmlns:a="http://schemas.openxmlformats.org/drawingml/2006/main" noGrp="1"/>
+          </p:cNvSpPr>
+          <p:nvPr/>
+        </p:nvSpPr>
+        <p:spPr>
+          <a:xfrm xmlns:a="http://schemas.openxmlformats.org/drawingml/2006/main">
+            <a:off x="647700" y="457200"/>
+            <a:ext cx="10096500" cy="552450"/>
+          </a:xfrm>
+          <a:prstGeom xmlns:a="http://schemas.openxmlformats.org/drawingml/2006/main" prst="rect">
+            <a:avLst/>
+          </a:prstGeom>
+          <a:noFill xmlns:a="http://schemas.openxmlformats.org/drawingml/2006/main"/>
+          <a:ln xmlns:a="http://schemas.openxmlformats.org/drawingml/2006/main" w="0">
+            <a:noFill/>
+            <a:prstDash val="solid"/>
+          </a:ln>
+        </p:spPr>
+        <p:txBody>
+          <a:bodyPr xmlns:a="http://schemas.openxmlformats.org/drawingml/2006/main"/>
+          <a:lstStyle xmlns:a="http://schemas.openxmlformats.org/drawingml/2006/main"/>
+          <a:p xmlns:a="http://schemas.openxmlformats.org/drawingml/2006/main">
+            <a:pPr>
+              <a:defRPr sz="2700" b="1">
+                <a:solidFill>
+                  <a:srgbClr val="182235"/>
+                </a:solidFill>
+              </a:defRPr>
+            </a:pPr>
+            <a:r>
+              <a:rPr sz="2700" b="1">
+                <a:solidFill>
+                  <a:srgbClr val="182235"/>
+                </a:solidFill>
+              </a:rPr>
+              <a:t>작은 응용이 내 실력으로 바뀌는 순간입니다</a:t>
+            </a:r>
+          </a:p>
+        </p:txBody>
+      </p:sp>
+      <p:sp>
+        <p:nvSpPr>
+          <p:cNvPr id="3" name="">
+            <a:extLst xmlns:a="http://schemas.openxmlformats.org/drawingml/2006/main">
+              <a:ext uri="{FF2B5EF4-FFF2-40B4-BE49-F238E27FC236}">
+                <a16:creationId xmlns:a16="http://schemas.microsoft.com/office/drawing/2014/main" id="{DBBB65AD-96C6-48C4-A45A-53EDEDE1412F}"/>
+              </a:ext>
+            </a:extLst>
+          </p:cNvPr>
+          <p:cNvSpPr>
+            <a:spLocks xmlns:a="http://schemas.openxmlformats.org/drawingml/2006/main" noGrp="1"/>
+          </p:cNvSpPr>
+          <p:nvPr/>
+        </p:nvSpPr>
+        <p:spPr>
+          <a:xfrm xmlns:a="http://schemas.openxmlformats.org/drawingml/2006/main">
+            <a:off x="666750" y="6419850"/>
+            <a:ext cx="10096500" cy="209550"/>
+          </a:xfrm>
+          <a:prstGeom xmlns:a="http://schemas.openxmlformats.org/drawingml/2006/main" prst="rect">
+            <a:avLst/>
+          </a:prstGeom>
+          <a:noFill xmlns:a="http://schemas.openxmlformats.org/drawingml/2006/main"/>
+          <a:ln xmlns:a="http://schemas.openxmlformats.org/drawingml/2006/main" w="0">
+            <a:noFill/>
+            <a:prstDash val="solid"/>
+          </a:ln>
+        </p:spPr>
+        <p:txBody>
+          <a:bodyPr xmlns:a="http://schemas.openxmlformats.org/drawingml/2006/main"/>
+          <a:lstStyle xmlns:a="http://schemas.openxmlformats.org/drawingml/2006/main"/>
+          <a:p xmlns:a="http://schemas.openxmlformats.org/drawingml/2006/main">
+            <a:pPr>
+              <a:defRPr sz="975">
+                <a:solidFill>
+                  <a:srgbClr val="657083"/>
+                </a:solidFill>
+              </a:defRPr>
+            </a:pPr>
+            <a:r>
+              <a:rPr sz="975">
+                <a:solidFill>
+                  <a:srgbClr val="657083"/>
+                </a:solidFill>
+              </a:rPr>
+              <a:t>EDU 웹개발 교육 플랫폼  ·  14</a:t>
+            </a:r>
+          </a:p>
+        </p:txBody>
+      </p:sp>
+      <p:sp>
+        <p:nvSpPr>
+          <p:cNvPr id="4" name="">
+            <a:extLst xmlns:a="http://schemas.openxmlformats.org/drawingml/2006/main">
+              <a:ext uri="{FF2B5EF4-FFF2-40B4-BE49-F238E27FC236}">
+                <a16:creationId xmlns:a16="http://schemas.microsoft.com/office/drawing/2014/main" id="{99CE5B46-50BA-4108-893C-0C21E11D3547}"/>
+              </a:ext>
+            </a:extLst>
+          </p:cNvPr>
+          <p:cNvSpPr>
+            <a:spLocks xmlns:a="http://schemas.openxmlformats.org/drawingml/2006/main" noGrp="1"/>
+          </p:cNvSpPr>
+          <p:nvPr/>
+        </p:nvSpPr>
+        <p:spPr>
+          <a:xfrm xmlns:a="http://schemas.openxmlformats.org/drawingml/2006/main">
+            <a:off x="685800" y="1524000"/>
+            <a:ext cx="10820400" cy="2381250"/>
+          </a:xfrm>
+          <a:prstGeom xmlns:a="http://schemas.openxmlformats.org/drawingml/2006/main" prst="roundRect">
+            <a:avLst>
+              <a:gd name="adj" fmla="val 4800"/>
+            </a:avLst>
+          </a:prstGeom>
+          <a:solidFill xmlns:a="http://schemas.openxmlformats.org/drawingml/2006/main">
+            <a:srgbClr val="EAF8F3"/>
+          </a:solidFill>
+          <a:ln xmlns:a="http://schemas.openxmlformats.org/drawingml/2006/main" w="0">
+            <a:noFill/>
+            <a:prstDash val="solid"/>
+          </a:ln>
+        </p:spPr>
+      </p:sp>
+      <p:sp>
+        <p:nvSpPr>
+          <p:cNvPr id="5" name="">
+            <a:extLst xmlns:a="http://schemas.openxmlformats.org/drawingml/2006/main">
+              <a:ext uri="{FF2B5EF4-FFF2-40B4-BE49-F238E27FC236}">
+                <a16:creationId xmlns:a16="http://schemas.microsoft.com/office/drawing/2014/main" id="{827599C8-E87F-4417-A36A-A05692339543}"/>
+              </a:ext>
+            </a:extLst>
+          </p:cNvPr>
+          <p:cNvSpPr>
+            <a:spLocks xmlns:a="http://schemas.openxmlformats.org/drawingml/2006/main" noGrp="1"/>
+          </p:cNvSpPr>
+          <p:nvPr/>
+        </p:nvSpPr>
+        <p:spPr>
+          <a:xfrm xmlns:a="http://schemas.openxmlformats.org/drawingml/2006/main">
+            <a:off x="1123950" y="2076450"/>
+            <a:ext cx="9944100" cy="1238250"/>
+          </a:xfrm>
+          <a:prstGeom xmlns:a="http://schemas.openxmlformats.org/drawingml/2006/main" prst="rect">
+            <a:avLst/>
+          </a:prstGeom>
+          <a:noFill xmlns:a="http://schemas.openxmlformats.org/drawingml/2006/main"/>
+          <a:ln xmlns:a="http://schemas.openxmlformats.org/drawingml/2006/main" w="0">
+            <a:noFill/>
+            <a:prstDash val="solid"/>
+          </a:ln>
+        </p:spPr>
+        <p:txBody>
+          <a:bodyPr xmlns:a="http://schemas.openxmlformats.org/drawingml/2006/main"/>
+          <a:lstStyle xmlns:a="http://schemas.openxmlformats.org/drawingml/2006/main"/>
+          <a:p xmlns:a="http://schemas.openxmlformats.org/drawingml/2006/main">
+            <a:pPr>
+              <a:defRPr sz="2175" b="1">
+                <a:solidFill>
+                  <a:srgbClr val="182235"/>
+                </a:solidFill>
+              </a:defRPr>
+            </a:pPr>
+            <a:r>
+              <a:rPr sz="2175" b="1">
+                <a:solidFill>
+                  <a:srgbClr val="182235"/>
+                </a:solidFill>
+              </a:rPr>
+              <a:t>README 문장 하나를 고친 뒤 status, diff, commit, push 순서로 기록하세요.</a:t>
+            </a:r>
+          </a:p>
+        </p:txBody>
+      </p:sp>
+      <p:sp>
+        <p:nvSpPr>
+          <p:cNvPr id="6" name="">
+            <a:extLst xmlns:a="http://schemas.openxmlformats.org/drawingml/2006/main">
+              <a:ext uri="{FF2B5EF4-FFF2-40B4-BE49-F238E27FC236}">
+                <a16:creationId xmlns:a16="http://schemas.microsoft.com/office/drawing/2014/main" id="{BD34E611-D433-4B80-B30E-EC829446D49A}"/>
+              </a:ext>
+            </a:extLst>
+          </p:cNvPr>
+          <p:cNvSpPr>
+            <a:spLocks xmlns:a="http://schemas.openxmlformats.org/drawingml/2006/main" noGrp="1"/>
+          </p:cNvSpPr>
+          <p:nvPr/>
+        </p:nvSpPr>
+        <p:spPr>
+          <a:xfrm xmlns:a="http://schemas.openxmlformats.org/drawingml/2006/main">
+            <a:off x="1143000" y="4524375"/>
+            <a:ext cx="9525000" cy="571500"/>
+          </a:xfrm>
+          <a:prstGeom xmlns:a="http://schemas.openxmlformats.org/drawingml/2006/main" prst="rect">
+            <a:avLst/>
+          </a:prstGeom>
+          <a:noFill xmlns:a="http://schemas.openxmlformats.org/drawingml/2006/main"/>
+          <a:ln xmlns:a="http://schemas.openxmlformats.org/drawingml/2006/main" w="0">
+            <a:noFill/>
+            <a:prstDash val="solid"/>
+          </a:ln>
+        </p:spPr>
+        <p:txBody>
+          <a:bodyPr xmlns:a="http://schemas.openxmlformats.org/drawingml/2006/main"/>
+          <a:lstStyle xmlns:a="http://schemas.openxmlformats.org/drawingml/2006/main"/>
+          <a:p xmlns:a="http://schemas.openxmlformats.org/drawingml/2006/main">
+            <a:pPr>
+              <a:defRPr sz="1650">
+                <a:solidFill>
+                  <a:srgbClr val="657083"/>
+                </a:solidFill>
+              </a:defRPr>
+            </a:pPr>
+            <a:r>
+              <a:rPr sz="1650">
+                <a:solidFill>
+                  <a:srgbClr val="657083"/>
+                </a:solidFill>
+              </a:rPr>
+              <a:t>완성한 뒤 원래 결과와 무엇이 달라졌는지 한 문장으로 설명해 보세요.</a:t>
+            </a:r>
+          </a:p>
+        </p:txBody>
+      </p:sp>
+    </p:spTree>
+    <p:extLst>
+      <p:ext uri="{BB962C8B-B14F-4D97-AF65-F5344CB8AC3E}">
+        <p14:creationId xmlns:p14="http://schemas.microsoft.com/office/powerpoint/2010/main" val="1785853548"/>
+      </p:ext>
+    </p:extLst>
+  </p:cSld>
+</p:sld>
+</file>
+
+<file path=ppt/slides/slide15.xml><?xml version="1.0" encoding="utf-8"?>
+<p:sld xmlns:p="http://schemas.openxmlformats.org/presentationml/2006/main">
+  <p:cSld>
+    <p:bg>
+      <p:bgPr>
+        <a:solidFill xmlns:a="http://schemas.openxmlformats.org/drawingml/2006/main">
+          <a:srgbClr val="FFFCF8"/>
+        </a:solidFill>
+      </p:bgPr>
+    </p:bg>
+    <p:spTree>
+      <p:nvGrpSpPr>
+        <p:cNvPr id="1" name=""/>
+        <p:cNvGrpSpPr/>
+        <p:nvPr/>
+      </p:nvGrpSpPr>
+      <p:grpSpPr>
+        <a:xfrm xmlns:a="http://schemas.openxmlformats.org/drawingml/2006/main"/>
+      </p:grpSpPr>
+      <p:sp>
+        <p:nvSpPr>
+          <p:cNvPr id="10" name="">
+            <a:extLst xmlns:a="http://schemas.openxmlformats.org/drawingml/2006/main">
+              <a:ext uri="{FF2B5EF4-FFF2-40B4-BE49-F238E27FC236}">
+                <a16:creationId xmlns:a16="http://schemas.microsoft.com/office/drawing/2014/main" id="{AA0A388B-FCCF-4303-80E4-5CA6C1B616E7}"/>
+              </a:ext>
+            </a:extLst>
+          </p:cNvPr>
+          <p:cNvSpPr>
+            <a:spLocks xmlns:a="http://schemas.openxmlformats.org/drawingml/2006/main" noGrp="1"/>
+          </p:cNvSpPr>
+          <p:nvPr/>
+        </p:nvSpPr>
+        <p:spPr>
+          <a:xfrm xmlns:a="http://schemas.openxmlformats.org/drawingml/2006/main">
+            <a:off x="0" y="0"/>
+            <a:ext cx="171450" cy="6858000"/>
+          </a:xfrm>
+          <a:prstGeom xmlns:a="http://schemas.openxmlformats.org/drawingml/2006/main" prst="rect">
+            <a:avLst/>
+          </a:prstGeom>
+          <a:solidFill xmlns:a="http://schemas.openxmlformats.org/drawingml/2006/main">
+            <a:srgbClr val="6657E8"/>
+          </a:solidFill>
+          <a:ln xmlns:a="http://schemas.openxmlformats.org/drawingml/2006/main" w="0">
+            <a:noFill/>
+            <a:prstDash val="solid"/>
+          </a:ln>
+        </p:spPr>
+      </p:sp>
+      <p:sp>
+        <p:nvSpPr>
+          <p:cNvPr id="2" name="">
+            <a:extLst xmlns:a="http://schemas.openxmlformats.org/drawingml/2006/main">
+              <a:ext uri="{FF2B5EF4-FFF2-40B4-BE49-F238E27FC236}">
+                <a16:creationId xmlns:a16="http://schemas.microsoft.com/office/drawing/2014/main" id="{129CB54E-5258-4470-8430-A832681FB317}"/>
+              </a:ext>
+            </a:extLst>
+          </p:cNvPr>
+          <p:cNvSpPr>
+            <a:spLocks xmlns:a="http://schemas.openxmlformats.org/drawingml/2006/main" noGrp="1"/>
+          </p:cNvSpPr>
+          <p:nvPr/>
+        </p:nvSpPr>
+        <p:spPr>
+          <a:xfrm xmlns:a="http://schemas.openxmlformats.org/drawingml/2006/main">
+            <a:off x="647700" y="457200"/>
+            <a:ext cx="10096500" cy="552450"/>
+          </a:xfrm>
+          <a:prstGeom xmlns:a="http://schemas.openxmlformats.org/drawingml/2006/main" prst="rect">
+            <a:avLst/>
+          </a:prstGeom>
+          <a:noFill xmlns:a="http://schemas.openxmlformats.org/drawingml/2006/main"/>
+          <a:ln xmlns:a="http://schemas.openxmlformats.org/drawingml/2006/main" w="0">
+            <a:noFill/>
+            <a:prstDash val="solid"/>
+          </a:ln>
+        </p:spPr>
+        <p:txBody>
+          <a:bodyPr xmlns:a="http://schemas.openxmlformats.org/drawingml/2006/main"/>
+          <a:lstStyle xmlns:a="http://schemas.openxmlformats.org/drawingml/2006/main"/>
+          <a:p xmlns:a="http://schemas.openxmlformats.org/drawingml/2006/main">
+            <a:pPr>
+              <a:defRPr sz="2700" b="1">
+                <a:solidFill>
+                  <a:srgbClr val="182235"/>
+                </a:solidFill>
+              </a:defRPr>
+            </a:pPr>
+            <a:r>
+              <a:rPr sz="2700" b="1">
+                <a:solidFill>
+                  <a:srgbClr val="182235"/>
+                </a:solidFill>
+              </a:rPr>
+              <a:t>다섯 문제로 오늘 배운 내용을 확인하세요</a:t>
+            </a:r>
+          </a:p>
+        </p:txBody>
+      </p:sp>
+      <p:sp>
+        <p:nvSpPr>
+          <p:cNvPr id="3" name="">
+            <a:extLst xmlns:a="http://schemas.openxmlformats.org/drawingml/2006/main">
+              <a:ext uri="{FF2B5EF4-FFF2-40B4-BE49-F238E27FC236}">
+                <a16:creationId xmlns:a16="http://schemas.microsoft.com/office/drawing/2014/main" id="{2F0968E9-47AB-49EB-9AB4-DF68BE2EF8C5}"/>
+              </a:ext>
+            </a:extLst>
+          </p:cNvPr>
+          <p:cNvSpPr>
+            <a:spLocks xmlns:a="http://schemas.openxmlformats.org/drawingml/2006/main" noGrp="1"/>
+          </p:cNvSpPr>
+          <p:nvPr/>
+        </p:nvSpPr>
+        <p:spPr>
+          <a:xfrm xmlns:a="http://schemas.openxmlformats.org/drawingml/2006/main">
+            <a:off x="666750" y="6419850"/>
+            <a:ext cx="10096500" cy="209550"/>
+          </a:xfrm>
+          <a:prstGeom xmlns:a="http://schemas.openxmlformats.org/drawingml/2006/main" prst="rect">
+            <a:avLst/>
+          </a:prstGeom>
+          <a:noFill xmlns:a="http://schemas.openxmlformats.org/drawingml/2006/main"/>
+          <a:ln xmlns:a="http://schemas.openxmlformats.org/drawingml/2006/main" w="0">
+            <a:noFill/>
+            <a:prstDash val="solid"/>
+          </a:ln>
+        </p:spPr>
+        <p:txBody>
+          <a:bodyPr xmlns:a="http://schemas.openxmlformats.org/drawingml/2006/main"/>
+          <a:lstStyle xmlns:a="http://schemas.openxmlformats.org/drawingml/2006/main"/>
+          <a:p xmlns:a="http://schemas.openxmlformats.org/drawingml/2006/main">
+            <a:pPr>
+              <a:defRPr sz="975">
+                <a:solidFill>
+                  <a:srgbClr val="657083"/>
+                </a:solidFill>
+              </a:defRPr>
+            </a:pPr>
+            <a:r>
+              <a:rPr sz="975">
+                <a:solidFill>
+                  <a:srgbClr val="657083"/>
+                </a:solidFill>
+              </a:rPr>
+              <a:t>EDU 웹개발 교육 플랫폼  ·  15</a:t>
+            </a:r>
+          </a:p>
+        </p:txBody>
+      </p:sp>
+      <p:sp>
+        <p:nvSpPr>
+          <p:cNvPr id="4" name="">
+            <a:extLst xmlns:a="http://schemas.openxmlformats.org/drawingml/2006/main">
+              <a:ext uri="{FF2B5EF4-FFF2-40B4-BE49-F238E27FC236}">
+                <a16:creationId xmlns:a16="http://schemas.microsoft.com/office/drawing/2014/main" id="{D228A7B9-1239-4F4B-83DD-E602083C0582}"/>
+              </a:ext>
+            </a:extLst>
+          </p:cNvPr>
+          <p:cNvSpPr>
+            <a:spLocks xmlns:a="http://schemas.openxmlformats.org/drawingml/2006/main" noGrp="1"/>
+          </p:cNvSpPr>
+          <p:nvPr/>
+        </p:nvSpPr>
+        <p:spPr>
+          <a:xfrm xmlns:a="http://schemas.openxmlformats.org/drawingml/2006/main">
+            <a:off x="857250" y="1285875"/>
+            <a:ext cx="10287000" cy="552450"/>
+          </a:xfrm>
+          <a:prstGeom xmlns:a="http://schemas.openxmlformats.org/drawingml/2006/main" prst="rect">
+            <a:avLst/>
+          </a:prstGeom>
+          <a:noFill xmlns:a="http://schemas.openxmlformats.org/drawingml/2006/main"/>
+          <a:ln xmlns:a="http://schemas.openxmlformats.org/drawingml/2006/main" w="0">
+            <a:noFill/>
+            <a:prstDash val="solid"/>
+          </a:ln>
+        </p:spPr>
+        <p:txBody>
+          <a:bodyPr xmlns:a="http://schemas.openxmlformats.org/drawingml/2006/main"/>
+          <a:lstStyle xmlns:a="http://schemas.openxmlformats.org/drawingml/2006/main"/>
+          <a:p xmlns:a="http://schemas.openxmlformats.org/drawingml/2006/main">
+            <a:pPr>
+              <a:defRPr sz="1650" b="0">
+                <a:solidFill>
+                  <a:srgbClr val="182235"/>
+                </a:solidFill>
+              </a:defRPr>
+            </a:pPr>
+            <a:r>
+              <a:rPr sz="1650" b="0">
+                <a:solidFill>
+                  <a:srgbClr val="182235"/>
+                </a:solidFill>
+              </a:rPr>
+              <a:t>1. Git과 GitHub의 차이는?</a:t>
+            </a:r>
+          </a:p>
+        </p:txBody>
+      </p:sp>
+      <p:sp>
+        <p:nvSpPr>
+          <p:cNvPr id="5" name="">
+            <a:extLst xmlns:a="http://schemas.openxmlformats.org/drawingml/2006/main">
+              <a:ext uri="{FF2B5EF4-FFF2-40B4-BE49-F238E27FC236}">
+                <a16:creationId xmlns:a16="http://schemas.microsoft.com/office/drawing/2014/main" id="{B9CBF3CC-2787-4D3C-B60E-320747AFD959}"/>
+              </a:ext>
+            </a:extLst>
+          </p:cNvPr>
+          <p:cNvSpPr>
+            <a:spLocks xmlns:a="http://schemas.openxmlformats.org/drawingml/2006/main" noGrp="1"/>
+          </p:cNvSpPr>
+          <p:nvPr/>
+        </p:nvSpPr>
+        <p:spPr>
+          <a:xfrm xmlns:a="http://schemas.openxmlformats.org/drawingml/2006/main">
+            <a:off x="857250" y="2162175"/>
+            <a:ext cx="10287000" cy="552450"/>
+          </a:xfrm>
+          <a:prstGeom xmlns:a="http://schemas.openxmlformats.org/drawingml/2006/main" prst="rect">
+            <a:avLst/>
+          </a:prstGeom>
+          <a:noFill xmlns:a="http://schemas.openxmlformats.org/drawingml/2006/main"/>
+          <a:ln xmlns:a="http://schemas.openxmlformats.org/drawingml/2006/main" w="0">
+            <a:noFill/>
+            <a:prstDash val="solid"/>
+          </a:ln>
+        </p:spPr>
+        <p:txBody>
+          <a:bodyPr xmlns:a="http://schemas.openxmlformats.org/drawingml/2006/main"/>
+          <a:lstStyle xmlns:a="http://schemas.openxmlformats.org/drawingml/2006/main"/>
+          <a:p xmlns:a="http://schemas.openxmlformats.org/drawingml/2006/main">
+            <a:pPr>
+              <a:defRPr sz="1650" b="0">
+                <a:solidFill>
+                  <a:srgbClr val="182235"/>
+                </a:solidFill>
+              </a:defRPr>
+            </a:pPr>
+            <a:r>
+              <a:rPr sz="1650" b="0">
+                <a:solidFill>
+                  <a:srgbClr val="182235"/>
+                </a:solidFill>
+              </a:rPr>
+              <a:t>2. .env.local을 올리면 안 되는 이유는?</a:t>
+            </a:r>
+          </a:p>
+        </p:txBody>
+      </p:sp>
+      <p:sp>
+        <p:nvSpPr>
+          <p:cNvPr id="6" name="">
+            <a:extLst xmlns:a="http://schemas.openxmlformats.org/drawingml/2006/main">
+              <a:ext uri="{FF2B5EF4-FFF2-40B4-BE49-F238E27FC236}">
+                <a16:creationId xmlns:a16="http://schemas.microsoft.com/office/drawing/2014/main" id="{D515CA57-264F-4D54-AFFC-9BEF69E51E0C}"/>
+              </a:ext>
+            </a:extLst>
+          </p:cNvPr>
+          <p:cNvSpPr>
+            <a:spLocks xmlns:a="http://schemas.openxmlformats.org/drawingml/2006/main" noGrp="1"/>
+          </p:cNvSpPr>
+          <p:nvPr/>
+        </p:nvSpPr>
+        <p:spPr>
+          <a:xfrm xmlns:a="http://schemas.openxmlformats.org/drawingml/2006/main">
+            <a:off x="857250" y="3038475"/>
+            <a:ext cx="10287000" cy="552450"/>
+          </a:xfrm>
+          <a:prstGeom xmlns:a="http://schemas.openxmlformats.org/drawingml/2006/main" prst="rect">
+            <a:avLst/>
+          </a:prstGeom>
+          <a:noFill xmlns:a="http://schemas.openxmlformats.org/drawingml/2006/main"/>
+          <a:ln xmlns:a="http://schemas.openxmlformats.org/drawingml/2006/main" w="0">
+            <a:noFill/>
+            <a:prstDash val="solid"/>
+          </a:ln>
+        </p:spPr>
+        <p:txBody>
+          <a:bodyPr xmlns:a="http://schemas.openxmlformats.org/drawingml/2006/main"/>
+          <a:lstStyle xmlns:a="http://schemas.openxmlformats.org/drawingml/2006/main"/>
+          <a:p xmlns:a="http://schemas.openxmlformats.org/drawingml/2006/main">
+            <a:pPr>
+              <a:defRPr sz="1650" b="0">
+                <a:solidFill>
+                  <a:srgbClr val="182235"/>
+                </a:solidFill>
+              </a:defRPr>
+            </a:pPr>
+            <a:r>
+              <a:rPr sz="1650" b="0">
+                <a:solidFill>
+                  <a:srgbClr val="182235"/>
+                </a:solidFill>
+              </a:rPr>
+              <a:t>3. 커밋 전 확인 명령은?</a:t>
+            </a:r>
+          </a:p>
+        </p:txBody>
+      </p:sp>
+      <p:sp>
+        <p:nvSpPr>
+          <p:cNvPr id="7" name="">
+            <a:extLst xmlns:a="http://schemas.openxmlformats.org/drawingml/2006/main">
+              <a:ext uri="{FF2B5EF4-FFF2-40B4-BE49-F238E27FC236}">
+                <a16:creationId xmlns:a16="http://schemas.microsoft.com/office/drawing/2014/main" id="{D0495077-F142-4F2F-A0D1-89C6626C1308}"/>
+              </a:ext>
+            </a:extLst>
+          </p:cNvPr>
+          <p:cNvSpPr>
+            <a:spLocks xmlns:a="http://schemas.openxmlformats.org/drawingml/2006/main" noGrp="1"/>
+          </p:cNvSpPr>
+          <p:nvPr/>
+        </p:nvSpPr>
+        <p:spPr>
+          <a:xfrm xmlns:a="http://schemas.openxmlformats.org/drawingml/2006/main">
+            <a:off x="857250" y="3914775"/>
+            <a:ext cx="10287000" cy="552450"/>
+          </a:xfrm>
+          <a:prstGeom xmlns:a="http://schemas.openxmlformats.org/drawingml/2006/main" prst="rect">
+            <a:avLst/>
+          </a:prstGeom>
+          <a:noFill xmlns:a="http://schemas.openxmlformats.org/drawingml/2006/main"/>
+          <a:ln xmlns:a="http://schemas.openxmlformats.org/drawingml/2006/main" w="0">
+            <a:noFill/>
+            <a:prstDash val="solid"/>
+          </a:ln>
+        </p:spPr>
+        <p:txBody>
+          <a:bodyPr xmlns:a="http://schemas.openxmlformats.org/drawingml/2006/main"/>
+          <a:lstStyle xmlns:a="http://schemas.openxmlformats.org/drawingml/2006/main"/>
+          <a:p xmlns:a="http://schemas.openxmlformats.org/drawingml/2006/main">
+            <a:pPr>
+              <a:defRPr sz="1650" b="0">
+                <a:solidFill>
+                  <a:srgbClr val="182235"/>
+                </a:solidFill>
+              </a:defRPr>
+            </a:pPr>
+            <a:r>
+              <a:rPr sz="1650" b="0">
+                <a:solidFill>
+                  <a:srgbClr val="182235"/>
+                </a:solidFill>
+              </a:rPr>
+              <a:t>4. fetch first에서 강제 푸시가 위험한 이유는?</a:t>
+            </a:r>
+          </a:p>
+        </p:txBody>
+      </p:sp>
+      <p:sp>
+        <p:nvSpPr>
+          <p:cNvPr id="8" name="">
+            <a:extLst xmlns:a="http://schemas.openxmlformats.org/drawingml/2006/main">
+              <a:ext uri="{FF2B5EF4-FFF2-40B4-BE49-F238E27FC236}">
+                <a16:creationId xmlns:a16="http://schemas.microsoft.com/office/drawing/2014/main" id="{9BDA86DC-4299-4AEC-80B0-BC888A1DA0F6}"/>
+              </a:ext>
+            </a:extLst>
+          </p:cNvPr>
+          <p:cNvSpPr>
+            <a:spLocks xmlns:a="http://schemas.openxmlformats.org/drawingml/2006/main" noGrp="1"/>
+          </p:cNvSpPr>
+          <p:nvPr/>
+        </p:nvSpPr>
+        <p:spPr>
+          <a:xfrm xmlns:a="http://schemas.openxmlformats.org/drawingml/2006/main">
+            <a:off x="857250" y="4791075"/>
+            <a:ext cx="10287000" cy="552450"/>
+          </a:xfrm>
+          <a:prstGeom xmlns:a="http://schemas.openxmlformats.org/drawingml/2006/main" prst="rect">
+            <a:avLst/>
+          </a:prstGeom>
+          <a:noFill xmlns:a="http://schemas.openxmlformats.org/drawingml/2006/main"/>
+          <a:ln xmlns:a="http://schemas.openxmlformats.org/drawingml/2006/main" w="0">
+            <a:noFill/>
+            <a:prstDash val="solid"/>
+          </a:ln>
+        </p:spPr>
+        <p:txBody>
+          <a:bodyPr xmlns:a="http://schemas.openxmlformats.org/drawingml/2006/main"/>
+          <a:lstStyle xmlns:a="http://schemas.openxmlformats.org/drawingml/2006/main"/>
+          <a:p xmlns:a="http://schemas.openxmlformats.org/drawingml/2006/main">
+            <a:pPr>
+              <a:defRPr sz="1650" b="1">
+                <a:solidFill>
+                  <a:srgbClr val="182235"/>
+                </a:solidFill>
+              </a:defRPr>
+            </a:pPr>
+            <a:r>
+              <a:rPr sz="1650" b="1">
+                <a:solidFill>
+                  <a:srgbClr val="182235"/>
+                </a:solidFill>
+              </a:rPr>
+              <a:t>5. 완료 기준은?</a:t>
+            </a:r>
+          </a:p>
+        </p:txBody>
+      </p:sp>
+      <p:sp>
+        <p:nvSpPr>
+          <p:cNvPr id="9" name="">
+            <a:extLst xmlns:a="http://schemas.openxmlformats.org/drawingml/2006/main">
+              <a:ext uri="{FF2B5EF4-FFF2-40B4-BE49-F238E27FC236}">
+                <a16:creationId xmlns:a16="http://schemas.microsoft.com/office/drawing/2014/main" id="{2AFAC1A3-0D94-4BDA-BA7F-6422753FEBA6}"/>
+              </a:ext>
+            </a:extLst>
+          </p:cNvPr>
+          <p:cNvSpPr>
+            <a:spLocks xmlns:a="http://schemas.openxmlformats.org/drawingml/2006/main" noGrp="1"/>
+          </p:cNvSpPr>
+          <p:nvPr/>
+        </p:nvSpPr>
+        <p:spPr>
+          <a:xfrm xmlns:a="http://schemas.openxmlformats.org/drawingml/2006/main">
+            <a:off x="857250" y="5857875"/>
+            <a:ext cx="10001250" cy="304800"/>
+          </a:xfrm>
+          <a:prstGeom xmlns:a="http://schemas.openxmlformats.org/drawingml/2006/main" prst="rect">
+            <a:avLst/>
+          </a:prstGeom>
+          <a:noFill xmlns:a="http://schemas.openxmlformats.org/drawingml/2006/main"/>
+          <a:ln xmlns:a="http://schemas.openxmlformats.org/drawingml/2006/main" w="0">
+            <a:noFill/>
+            <a:prstDash val="solid"/>
+          </a:ln>
+        </p:spPr>
+        <p:txBody>
+          <a:bodyPr xmlns:a="http://schemas.openxmlformats.org/drawingml/2006/main"/>
+          <a:lstStyle xmlns:a="http://schemas.openxmlformats.org/drawingml/2006/main"/>
+          <a:p xmlns:a="http://schemas.openxmlformats.org/drawingml/2006/main">
+            <a:pPr>
+              <a:defRPr sz="1350" b="1">
+                <a:solidFill>
+                  <a:srgbClr val="6657E8"/>
+                </a:solidFill>
+              </a:defRPr>
+            </a:pPr>
+            <a:r>
+              <a:rPr sz="1350" b="1">
+                <a:solidFill>
+                  <a:srgbClr val="6657E8"/>
+                </a:solidFill>
+              </a:rPr>
+              <a:t>정답과 해설은 EDU 홈페이지 상세 자료에서 확인할 수 있습니다.</a:t>
+            </a:r>
+          </a:p>
+        </p:txBody>
+      </p:sp>
+    </p:spTree>
+    <p:extLst>
+      <p:ext uri="{BB962C8B-B14F-4D97-AF65-F5344CB8AC3E}">
+        <p14:creationId xmlns:p14="http://schemas.microsoft.com/office/powerpoint/2010/main" val="1805399253"/>
       </p:ext>
     </p:extLst>
   </p:cSld>
@@ -1896,7 +5488,7 @@
           <p:cNvPr id="12" name="">
             <a:extLst xmlns:a="http://schemas.openxmlformats.org/drawingml/2006/main">
               <a:ext uri="{FF2B5EF4-FFF2-40B4-BE49-F238E27FC236}">
-                <a16:creationId xmlns:a16="http://schemas.microsoft.com/office/drawing/2014/main" id="{9337CF13-DDCE-4921-9907-6E137688F57E}"/>
+                <a16:creationId xmlns:a16="http://schemas.microsoft.com/office/drawing/2014/main" id="{39A5916F-CA82-4604-9D43-7D288EC2F271}"/>
               </a:ext>
             </a:extLst>
           </p:cNvPr>
@@ -1927,7 +5519,7 @@
           <p:cNvPr id="2" name="">
             <a:extLst xmlns:a="http://schemas.openxmlformats.org/drawingml/2006/main">
               <a:ext uri="{FF2B5EF4-FFF2-40B4-BE49-F238E27FC236}">
-                <a16:creationId xmlns:a16="http://schemas.microsoft.com/office/drawing/2014/main" id="{E2E72CA0-9E0B-44AE-A586-39A0BBB03C2A}"/>
+                <a16:creationId xmlns:a16="http://schemas.microsoft.com/office/drawing/2014/main" id="{3E5D16EF-9ECB-4EFD-8C24-07032D93B17B}"/>
               </a:ext>
             </a:extLst>
           </p:cNvPr>
@@ -1977,7 +5569,7 @@
           <p:cNvPr id="3" name="">
             <a:extLst xmlns:a="http://schemas.openxmlformats.org/drawingml/2006/main">
               <a:ext uri="{FF2B5EF4-FFF2-40B4-BE49-F238E27FC236}">
-                <a16:creationId xmlns:a16="http://schemas.microsoft.com/office/drawing/2014/main" id="{D0E9AC17-932C-483B-96EC-8A77FE437B32}"/>
+                <a16:creationId xmlns:a16="http://schemas.microsoft.com/office/drawing/2014/main" id="{FB1A31EC-25F2-4D3B-8132-35B55601F954}"/>
               </a:ext>
             </a:extLst>
           </p:cNvPr>
@@ -2027,7 +5619,7 @@
           <p:cNvPr id="4" name="">
             <a:extLst xmlns:a="http://schemas.openxmlformats.org/drawingml/2006/main">
               <a:ext uri="{FF2B5EF4-FFF2-40B4-BE49-F238E27FC236}">
-                <a16:creationId xmlns:a16="http://schemas.microsoft.com/office/drawing/2014/main" id="{18595BD8-8DD2-4BBE-9925-F40E307AF5D2}"/>
+                <a16:creationId xmlns:a16="http://schemas.microsoft.com/office/drawing/2014/main" id="{70478AC8-4886-4754-BE7D-DBB622F9C553}"/>
               </a:ext>
             </a:extLst>
           </p:cNvPr>
@@ -2060,7 +5652,7 @@
           <p:cNvPr id="5" name="">
             <a:extLst xmlns:a="http://schemas.openxmlformats.org/drawingml/2006/main">
               <a:ext uri="{FF2B5EF4-FFF2-40B4-BE49-F238E27FC236}">
-                <a16:creationId xmlns:a16="http://schemas.microsoft.com/office/drawing/2014/main" id="{852E95AD-7F5B-42CF-BEFC-F9C7A50A2A7C}"/>
+                <a16:creationId xmlns:a16="http://schemas.microsoft.com/office/drawing/2014/main" id="{B0A26380-413D-4B3B-BCA7-87B6169BB614}"/>
               </a:ext>
             </a:extLst>
           </p:cNvPr>
@@ -2110,7 +5702,7 @@
           <p:cNvPr id="6" name="">
             <a:extLst xmlns:a="http://schemas.openxmlformats.org/drawingml/2006/main">
               <a:ext uri="{FF2B5EF4-FFF2-40B4-BE49-F238E27FC236}">
-                <a16:creationId xmlns:a16="http://schemas.microsoft.com/office/drawing/2014/main" id="{C9746B64-80AE-4C6A-B1B6-14B95B693815}"/>
+                <a16:creationId xmlns:a16="http://schemas.microsoft.com/office/drawing/2014/main" id="{9D3D2D91-75C0-42CA-AAEA-4C7BBDF48412}"/>
               </a:ext>
             </a:extLst>
           </p:cNvPr>
@@ -2160,7 +5752,7 @@
           <p:cNvPr id="7" name="">
             <a:extLst xmlns:a="http://schemas.openxmlformats.org/drawingml/2006/main">
               <a:ext uri="{FF2B5EF4-FFF2-40B4-BE49-F238E27FC236}">
-                <a16:creationId xmlns:a16="http://schemas.microsoft.com/office/drawing/2014/main" id="{517244C0-CF4D-4DBF-A238-AD99940A8F5D}"/>
+                <a16:creationId xmlns:a16="http://schemas.microsoft.com/office/drawing/2014/main" id="{19C75597-33E8-4257-A207-A19AEEEF595D}"/>
               </a:ext>
             </a:extLst>
           </p:cNvPr>
@@ -2193,7 +5785,7 @@
           <p:cNvPr id="8" name="">
             <a:extLst xmlns:a="http://schemas.openxmlformats.org/drawingml/2006/main">
               <a:ext uri="{FF2B5EF4-FFF2-40B4-BE49-F238E27FC236}">
-                <a16:creationId xmlns:a16="http://schemas.microsoft.com/office/drawing/2014/main" id="{A32DD084-8A15-46FE-B504-CB04C1E69F36}"/>
+                <a16:creationId xmlns:a16="http://schemas.microsoft.com/office/drawing/2014/main" id="{8F9D4911-05BD-4C82-9D75-AB2FCB8A9CEE}"/>
               </a:ext>
             </a:extLst>
           </p:cNvPr>
@@ -2243,7 +5835,7 @@
           <p:cNvPr id="9" name="">
             <a:extLst xmlns:a="http://schemas.openxmlformats.org/drawingml/2006/main">
               <a:ext uri="{FF2B5EF4-FFF2-40B4-BE49-F238E27FC236}">
-                <a16:creationId xmlns:a16="http://schemas.microsoft.com/office/drawing/2014/main" id="{2A19982F-C1EA-4A2B-A54F-16EA09429906}"/>
+                <a16:creationId xmlns:a16="http://schemas.microsoft.com/office/drawing/2014/main" id="{1BE0EFB0-D631-4E08-A841-CB897CC1267C}"/>
               </a:ext>
             </a:extLst>
           </p:cNvPr>
@@ -2293,7 +5885,7 @@
           <p:cNvPr id="10" name="">
             <a:extLst xmlns:a="http://schemas.openxmlformats.org/drawingml/2006/main">
               <a:ext uri="{FF2B5EF4-FFF2-40B4-BE49-F238E27FC236}">
-                <a16:creationId xmlns:a16="http://schemas.microsoft.com/office/drawing/2014/main" id="{99F2222D-9073-49CF-9F73-5F81713F92FD}"/>
+                <a16:creationId xmlns:a16="http://schemas.microsoft.com/office/drawing/2014/main" id="{9973C52F-262D-46F3-A2A0-29963825F6A1}"/>
               </a:ext>
             </a:extLst>
           </p:cNvPr>
@@ -2326,7 +5918,7 @@
           <p:cNvPr id="11" name="">
             <a:extLst xmlns:a="http://schemas.openxmlformats.org/drawingml/2006/main">
               <a:ext uri="{FF2B5EF4-FFF2-40B4-BE49-F238E27FC236}">
-                <a16:creationId xmlns:a16="http://schemas.microsoft.com/office/drawing/2014/main" id="{B465050F-8BF4-448C-8280-CAF0886D5D4A}"/>
+                <a16:creationId xmlns:a16="http://schemas.microsoft.com/office/drawing/2014/main" id="{FE68947E-A431-4D46-B35C-A0B78B94E43F}"/>
               </a:ext>
             </a:extLst>
           </p:cNvPr>
@@ -2391,7 +5983,7 @@
     </p:spTree>
     <p:extLst>
       <p:ext uri="{BB962C8B-B14F-4D97-AF65-F5344CB8AC3E}">
-        <p14:creationId xmlns:p14="http://schemas.microsoft.com/office/powerpoint/2010/main" val="1814061908"/>
+        <p14:creationId xmlns:p14="http://schemas.microsoft.com/office/powerpoint/2010/main" val="1263037083"/>
       </p:ext>
     </p:extLst>
   </p:cSld>
@@ -2422,7 +6014,7 @@
           <p:cNvPr id="8" name="">
             <a:extLst xmlns:a="http://schemas.openxmlformats.org/drawingml/2006/main">
               <a:ext uri="{FF2B5EF4-FFF2-40B4-BE49-F238E27FC236}">
-                <a16:creationId xmlns:a16="http://schemas.microsoft.com/office/drawing/2014/main" id="{324DBDA0-C0F4-4D32-B31C-6F89626EE6EF}"/>
+                <a16:creationId xmlns:a16="http://schemas.microsoft.com/office/drawing/2014/main" id="{ECD6EE0E-295D-4F10-88F4-18508FF3E09A}"/>
               </a:ext>
             </a:extLst>
           </p:cNvPr>
@@ -2453,7 +6045,7 @@
           <p:cNvPr id="2" name="">
             <a:extLst xmlns:a="http://schemas.openxmlformats.org/drawingml/2006/main">
               <a:ext uri="{FF2B5EF4-FFF2-40B4-BE49-F238E27FC236}">
-                <a16:creationId xmlns:a16="http://schemas.microsoft.com/office/drawing/2014/main" id="{2D1BDF7E-867E-4664-BC21-5D6BC204AAA4}"/>
+                <a16:creationId xmlns:a16="http://schemas.microsoft.com/office/drawing/2014/main" id="{C24E03B0-B852-457B-9246-9A90E303C9AE}"/>
               </a:ext>
             </a:extLst>
           </p:cNvPr>
@@ -2503,7 +6095,7 @@
           <p:cNvPr id="3" name="">
             <a:extLst xmlns:a="http://schemas.openxmlformats.org/drawingml/2006/main">
               <a:ext uri="{FF2B5EF4-FFF2-40B4-BE49-F238E27FC236}">
-                <a16:creationId xmlns:a16="http://schemas.microsoft.com/office/drawing/2014/main" id="{C7BDBC0A-CA22-4836-B582-BA3B63A33C36}"/>
+                <a16:creationId xmlns:a16="http://schemas.microsoft.com/office/drawing/2014/main" id="{F6C5AD01-783E-4BEB-8535-C4711E2F5537}"/>
               </a:ext>
             </a:extLst>
           </p:cNvPr>
@@ -2553,7 +6145,7 @@
           <p:cNvPr id="4" name="">
             <a:extLst xmlns:a="http://schemas.openxmlformats.org/drawingml/2006/main">
               <a:ext uri="{FF2B5EF4-FFF2-40B4-BE49-F238E27FC236}">
-                <a16:creationId xmlns:a16="http://schemas.microsoft.com/office/drawing/2014/main" id="{93A67C16-9D22-460A-8058-4BEA39163F57}"/>
+                <a16:creationId xmlns:a16="http://schemas.microsoft.com/office/drawing/2014/main" id="{D7241DCB-C69E-411E-8184-D073D69F9AA6}"/>
               </a:ext>
             </a:extLst>
           </p:cNvPr>
@@ -2586,7 +6178,7 @@
           <p:cNvPr id="5" name="">
             <a:extLst xmlns:a="http://schemas.openxmlformats.org/drawingml/2006/main">
               <a:ext uri="{FF2B5EF4-FFF2-40B4-BE49-F238E27FC236}">
-                <a16:creationId xmlns:a16="http://schemas.microsoft.com/office/drawing/2014/main" id="{4E7F9EB1-CC16-491C-8E37-A6D3A223F6F6}"/>
+                <a16:creationId xmlns:a16="http://schemas.microsoft.com/office/drawing/2014/main" id="{7B006DDA-5B83-467C-86FC-8E9BF2E3F993}"/>
               </a:ext>
             </a:extLst>
           </p:cNvPr>
@@ -2636,7 +6228,7 @@
           <p:cNvPr id="6" name="">
             <a:extLst xmlns:a="http://schemas.openxmlformats.org/drawingml/2006/main">
               <a:ext uri="{FF2B5EF4-FFF2-40B4-BE49-F238E27FC236}">
-                <a16:creationId xmlns:a16="http://schemas.microsoft.com/office/drawing/2014/main" id="{7B85FBB3-ACF7-448F-B9BB-864C8274566D}"/>
+                <a16:creationId xmlns:a16="http://schemas.microsoft.com/office/drawing/2014/main" id="{8AA88FE3-0099-4B36-964E-6012143F6D44}"/>
               </a:ext>
             </a:extLst>
           </p:cNvPr>
@@ -2686,7 +6278,7 @@
           <p:cNvPr id="7" name="">
             <a:extLst xmlns:a="http://schemas.openxmlformats.org/drawingml/2006/main">
               <a:ext uri="{FF2B5EF4-FFF2-40B4-BE49-F238E27FC236}">
-                <a16:creationId xmlns:a16="http://schemas.microsoft.com/office/drawing/2014/main" id="{BBC1F6F2-07E8-465B-B131-6E2D45FEC42C}"/>
+                <a16:creationId xmlns:a16="http://schemas.microsoft.com/office/drawing/2014/main" id="{C6A07AEF-32CB-4343-85B5-3416E0C9F024}"/>
               </a:ext>
             </a:extLst>
           </p:cNvPr>
@@ -2734,7 +6326,7 @@
     </p:spTree>
     <p:extLst>
       <p:ext uri="{BB962C8B-B14F-4D97-AF65-F5344CB8AC3E}">
-        <p14:creationId xmlns:p14="http://schemas.microsoft.com/office/powerpoint/2010/main" val="1976801808"/>
+        <p14:creationId xmlns:p14="http://schemas.microsoft.com/office/powerpoint/2010/main" val="352970230"/>
       </p:ext>
     </p:extLst>
   </p:cSld>
@@ -2765,7 +6357,7 @@
           <p:cNvPr id="16" name="">
             <a:extLst xmlns:a="http://schemas.openxmlformats.org/drawingml/2006/main">
               <a:ext uri="{FF2B5EF4-FFF2-40B4-BE49-F238E27FC236}">
-                <a16:creationId xmlns:a16="http://schemas.microsoft.com/office/drawing/2014/main" id="{90A1F9FD-2708-4AA2-A71E-8933BABBACC0}"/>
+                <a16:creationId xmlns:a16="http://schemas.microsoft.com/office/drawing/2014/main" id="{4736A21E-371D-4A55-879A-8AC1B1566AF9}"/>
               </a:ext>
             </a:extLst>
           </p:cNvPr>
@@ -2796,7 +6388,7 @@
           <p:cNvPr id="2" name="">
             <a:extLst xmlns:a="http://schemas.openxmlformats.org/drawingml/2006/main">
               <a:ext uri="{FF2B5EF4-FFF2-40B4-BE49-F238E27FC236}">
-                <a16:creationId xmlns:a16="http://schemas.microsoft.com/office/drawing/2014/main" id="{A00A8E1D-5678-4496-B08C-04EF7F64C9BE}"/>
+                <a16:creationId xmlns:a16="http://schemas.microsoft.com/office/drawing/2014/main" id="{AB79B6E0-6244-429B-AF53-AADC09AAA4DD}"/>
               </a:ext>
             </a:extLst>
           </p:cNvPr>
@@ -2846,7 +6438,7 @@
           <p:cNvPr id="3" name="">
             <a:extLst xmlns:a="http://schemas.openxmlformats.org/drawingml/2006/main">
               <a:ext uri="{FF2B5EF4-FFF2-40B4-BE49-F238E27FC236}">
-                <a16:creationId xmlns:a16="http://schemas.microsoft.com/office/drawing/2014/main" id="{BA7A10F6-9299-4582-9385-9FAF3E07C111}"/>
+                <a16:creationId xmlns:a16="http://schemas.microsoft.com/office/drawing/2014/main" id="{89FFED3B-6FE5-48F9-9386-B590CB46D988}"/>
               </a:ext>
             </a:extLst>
           </p:cNvPr>
@@ -2896,7 +6488,7 @@
           <p:cNvPr id="4" name="">
             <a:extLst xmlns:a="http://schemas.openxmlformats.org/drawingml/2006/main">
               <a:ext uri="{FF2B5EF4-FFF2-40B4-BE49-F238E27FC236}">
-                <a16:creationId xmlns:a16="http://schemas.microsoft.com/office/drawing/2014/main" id="{4CE9FFCF-51EA-405D-96FA-4B8BDA575487}"/>
+                <a16:creationId xmlns:a16="http://schemas.microsoft.com/office/drawing/2014/main" id="{24129513-B6CB-416E-B101-771B898F012A}"/>
               </a:ext>
             </a:extLst>
           </p:cNvPr>
@@ -2929,7 +6521,7 @@
           <p:cNvPr id="5" name="">
             <a:extLst xmlns:a="http://schemas.openxmlformats.org/drawingml/2006/main">
               <a:ext uri="{FF2B5EF4-FFF2-40B4-BE49-F238E27FC236}">
-                <a16:creationId xmlns:a16="http://schemas.microsoft.com/office/drawing/2014/main" id="{D564BCA5-EB7B-4145-889D-2BD159ACA82E}"/>
+                <a16:creationId xmlns:a16="http://schemas.microsoft.com/office/drawing/2014/main" id="{FDCD99E3-C549-4FE5-BABE-1F2F986C36F1}"/>
               </a:ext>
             </a:extLst>
           </p:cNvPr>
@@ -2979,7 +6571,7 @@
           <p:cNvPr id="6" name="">
             <a:extLst xmlns:a="http://schemas.openxmlformats.org/drawingml/2006/main">
               <a:ext uri="{FF2B5EF4-FFF2-40B4-BE49-F238E27FC236}">
-                <a16:creationId xmlns:a16="http://schemas.microsoft.com/office/drawing/2014/main" id="{CFDC5CC6-089A-4F8B-BD6A-2CB4FB0D6487}"/>
+                <a16:creationId xmlns:a16="http://schemas.microsoft.com/office/drawing/2014/main" id="{4E278FBC-16DD-49F8-8F49-0A229157483D}"/>
               </a:ext>
             </a:extLst>
           </p:cNvPr>
@@ -3029,7 +6621,7 @@
           <p:cNvPr id="7" name="">
             <a:extLst xmlns:a="http://schemas.openxmlformats.org/drawingml/2006/main">
               <a:ext uri="{FF2B5EF4-FFF2-40B4-BE49-F238E27FC236}">
-                <a16:creationId xmlns:a16="http://schemas.microsoft.com/office/drawing/2014/main" id="{872E3579-F252-4906-901A-4FA1E8B9FD9E}"/>
+                <a16:creationId xmlns:a16="http://schemas.microsoft.com/office/drawing/2014/main" id="{5AB00071-9571-4540-9D0C-075209B6CD91}"/>
               </a:ext>
             </a:extLst>
           </p:cNvPr>
@@ -3062,7 +6654,7 @@
           <p:cNvPr id="8" name="">
             <a:extLst xmlns:a="http://schemas.openxmlformats.org/drawingml/2006/main">
               <a:ext uri="{FF2B5EF4-FFF2-40B4-BE49-F238E27FC236}">
-                <a16:creationId xmlns:a16="http://schemas.microsoft.com/office/drawing/2014/main" id="{AD2CFF35-DC56-4D8E-8187-592BA1664641}"/>
+                <a16:creationId xmlns:a16="http://schemas.microsoft.com/office/drawing/2014/main" id="{E0627C37-DAE3-44F0-A4B3-0E426BE9B445}"/>
               </a:ext>
             </a:extLst>
           </p:cNvPr>
@@ -3112,7 +6704,7 @@
           <p:cNvPr id="9" name="">
             <a:extLst xmlns:a="http://schemas.openxmlformats.org/drawingml/2006/main">
               <a:ext uri="{FF2B5EF4-FFF2-40B4-BE49-F238E27FC236}">
-                <a16:creationId xmlns:a16="http://schemas.microsoft.com/office/drawing/2014/main" id="{9E0CF898-41D3-47D8-B5CC-B853FB0C0FFD}"/>
+                <a16:creationId xmlns:a16="http://schemas.microsoft.com/office/drawing/2014/main" id="{62BA8A22-7FFD-4625-9491-E29617796F15}"/>
               </a:ext>
             </a:extLst>
           </p:cNvPr>
@@ -3162,7 +6754,7 @@
           <p:cNvPr id="10" name="">
             <a:extLst xmlns:a="http://schemas.openxmlformats.org/drawingml/2006/main">
               <a:ext uri="{FF2B5EF4-FFF2-40B4-BE49-F238E27FC236}">
-                <a16:creationId xmlns:a16="http://schemas.microsoft.com/office/drawing/2014/main" id="{3A706605-72BC-4783-BF5E-3374559CAE0C}"/>
+                <a16:creationId xmlns:a16="http://schemas.microsoft.com/office/drawing/2014/main" id="{218642BE-3227-497E-814F-C231A959DED8}"/>
               </a:ext>
             </a:extLst>
           </p:cNvPr>
@@ -3195,7 +6787,7 @@
           <p:cNvPr id="11" name="">
             <a:extLst xmlns:a="http://schemas.openxmlformats.org/drawingml/2006/main">
               <a:ext uri="{FF2B5EF4-FFF2-40B4-BE49-F238E27FC236}">
-                <a16:creationId xmlns:a16="http://schemas.microsoft.com/office/drawing/2014/main" id="{1066EA10-132F-4748-B040-F2E7DFDC4164}"/>
+                <a16:creationId xmlns:a16="http://schemas.microsoft.com/office/drawing/2014/main" id="{410033B4-F0FF-4311-9F00-8D1C88B2FF39}"/>
               </a:ext>
             </a:extLst>
           </p:cNvPr>
@@ -3245,7 +6837,7 @@
           <p:cNvPr id="12" name="">
             <a:extLst xmlns:a="http://schemas.openxmlformats.org/drawingml/2006/main">
               <a:ext uri="{FF2B5EF4-FFF2-40B4-BE49-F238E27FC236}">
-                <a16:creationId xmlns:a16="http://schemas.microsoft.com/office/drawing/2014/main" id="{1D2073E8-FF80-4D91-84B4-8CA4CADAF8D4}"/>
+                <a16:creationId xmlns:a16="http://schemas.microsoft.com/office/drawing/2014/main" id="{B9A5778C-94F1-48EF-B1AD-9A925227095A}"/>
               </a:ext>
             </a:extLst>
           </p:cNvPr>
@@ -3295,7 +6887,7 @@
           <p:cNvPr id="13" name="">
             <a:extLst xmlns:a="http://schemas.openxmlformats.org/drawingml/2006/main">
               <a:ext uri="{FF2B5EF4-FFF2-40B4-BE49-F238E27FC236}">
-                <a16:creationId xmlns:a16="http://schemas.microsoft.com/office/drawing/2014/main" id="{A588895E-E5FA-4B39-9E37-494DC1ABE8C3}"/>
+                <a16:creationId xmlns:a16="http://schemas.microsoft.com/office/drawing/2014/main" id="{947FC339-E2E1-43F0-B7B5-6423E7688F85}"/>
               </a:ext>
             </a:extLst>
           </p:cNvPr>
@@ -3328,7 +6920,7 @@
           <p:cNvPr id="14" name="">
             <a:extLst xmlns:a="http://schemas.openxmlformats.org/drawingml/2006/main">
               <a:ext uri="{FF2B5EF4-FFF2-40B4-BE49-F238E27FC236}">
-                <a16:creationId xmlns:a16="http://schemas.microsoft.com/office/drawing/2014/main" id="{924FF58D-D8B2-417F-8AA8-24BA9707BE3E}"/>
+                <a16:creationId xmlns:a16="http://schemas.microsoft.com/office/drawing/2014/main" id="{27B6B9B7-9232-49A5-A56E-8AD36F4421C8}"/>
               </a:ext>
             </a:extLst>
           </p:cNvPr>
@@ -3378,7 +6970,7 @@
           <p:cNvPr id="15" name="">
             <a:extLst xmlns:a="http://schemas.openxmlformats.org/drawingml/2006/main">
               <a:ext uri="{FF2B5EF4-FFF2-40B4-BE49-F238E27FC236}">
-                <a16:creationId xmlns:a16="http://schemas.microsoft.com/office/drawing/2014/main" id="{405D632E-DBE5-4B18-882F-115A343ADB80}"/>
+                <a16:creationId xmlns:a16="http://schemas.microsoft.com/office/drawing/2014/main" id="{94A30D6C-2F91-42F8-988B-98FBB9B64D12}"/>
               </a:ext>
             </a:extLst>
           </p:cNvPr>
@@ -3426,7 +7018,7 @@
     </p:spTree>
     <p:extLst>
       <p:ext uri="{BB962C8B-B14F-4D97-AF65-F5344CB8AC3E}">
-        <p14:creationId xmlns:p14="http://schemas.microsoft.com/office/powerpoint/2010/main" val="2142195915"/>
+        <p14:creationId xmlns:p14="http://schemas.microsoft.com/office/powerpoint/2010/main" val="1008491460"/>
       </p:ext>
     </p:extLst>
   </p:cSld>
@@ -3457,7 +7049,7 @@
           <p:cNvPr id="8" name="">
             <a:extLst xmlns:a="http://schemas.openxmlformats.org/drawingml/2006/main">
               <a:ext uri="{FF2B5EF4-FFF2-40B4-BE49-F238E27FC236}">
-                <a16:creationId xmlns:a16="http://schemas.microsoft.com/office/drawing/2014/main" id="{7EE47DAC-C729-451E-8E44-1CA90FB82DD0}"/>
+                <a16:creationId xmlns:a16="http://schemas.microsoft.com/office/drawing/2014/main" id="{424CB53B-087F-4243-B2D2-9A8B859E4801}"/>
               </a:ext>
             </a:extLst>
           </p:cNvPr>
@@ -3488,7 +7080,7 @@
           <p:cNvPr id="2" name="">
             <a:extLst xmlns:a="http://schemas.openxmlformats.org/drawingml/2006/main">
               <a:ext uri="{FF2B5EF4-FFF2-40B4-BE49-F238E27FC236}">
-                <a16:creationId xmlns:a16="http://schemas.microsoft.com/office/drawing/2014/main" id="{846E275E-4DBB-4630-934A-8AEFFD12348E}"/>
+                <a16:creationId xmlns:a16="http://schemas.microsoft.com/office/drawing/2014/main" id="{8A39E052-CC9B-4C6D-97D5-76C7754EB063}"/>
               </a:ext>
             </a:extLst>
           </p:cNvPr>
@@ -3538,7 +7130,7 @@
           <p:cNvPr id="3" name="">
             <a:extLst xmlns:a="http://schemas.openxmlformats.org/drawingml/2006/main">
               <a:ext uri="{FF2B5EF4-FFF2-40B4-BE49-F238E27FC236}">
-                <a16:creationId xmlns:a16="http://schemas.microsoft.com/office/drawing/2014/main" id="{322DC8C6-EAB0-4D29-B0D7-5D906FD7FF02}"/>
+                <a16:creationId xmlns:a16="http://schemas.microsoft.com/office/drawing/2014/main" id="{DD4D5DD5-00A1-470C-9E73-3C3E01E8CAF2}"/>
               </a:ext>
             </a:extLst>
           </p:cNvPr>
@@ -3588,7 +7180,7 @@
           <p:cNvPr id="4" name="">
             <a:extLst xmlns:a="http://schemas.openxmlformats.org/drawingml/2006/main">
               <a:ext uri="{FF2B5EF4-FFF2-40B4-BE49-F238E27FC236}">
-                <a16:creationId xmlns:a16="http://schemas.microsoft.com/office/drawing/2014/main" id="{6297BE63-1C09-4C2A-9076-E22C7352395D}"/>
+                <a16:creationId xmlns:a16="http://schemas.microsoft.com/office/drawing/2014/main" id="{4FC4565B-2E55-4256-897C-CB215C5974E6}"/>
               </a:ext>
             </a:extLst>
           </p:cNvPr>
@@ -3623,7 +7215,7 @@
           <p:cNvPr id="5" name="">
             <a:extLst xmlns:a="http://schemas.openxmlformats.org/drawingml/2006/main">
               <a:ext uri="{FF2B5EF4-FFF2-40B4-BE49-F238E27FC236}">
-                <a16:creationId xmlns:a16="http://schemas.microsoft.com/office/drawing/2014/main" id="{D6214AF2-1398-42A7-8415-86E84FC65586}"/>
+                <a16:creationId xmlns:a16="http://schemas.microsoft.com/office/drawing/2014/main" id="{2EC70976-A04A-43DA-AC8D-B301ABE5DE50}"/>
               </a:ext>
             </a:extLst>
           </p:cNvPr>
@@ -3673,7 +7265,7 @@
           <p:cNvPr id="6" name="">
             <a:extLst xmlns:a="http://schemas.openxmlformats.org/drawingml/2006/main">
               <a:ext uri="{FF2B5EF4-FFF2-40B4-BE49-F238E27FC236}">
-                <a16:creationId xmlns:a16="http://schemas.microsoft.com/office/drawing/2014/main" id="{35834362-3283-4B62-89DF-4632C259719A}"/>
+                <a16:creationId xmlns:a16="http://schemas.microsoft.com/office/drawing/2014/main" id="{E5AB2ADC-82B0-4986-B321-0F0489351430}"/>
               </a:ext>
             </a:extLst>
           </p:cNvPr>
@@ -3774,7 +7366,7 @@
           <p:cNvPr id="7" name="">
             <a:extLst xmlns:a="http://schemas.openxmlformats.org/drawingml/2006/main">
               <a:ext uri="{FF2B5EF4-FFF2-40B4-BE49-F238E27FC236}">
-                <a16:creationId xmlns:a16="http://schemas.microsoft.com/office/drawing/2014/main" id="{66EF06CF-410D-432B-BF10-B0C46A897854}"/>
+                <a16:creationId xmlns:a16="http://schemas.microsoft.com/office/drawing/2014/main" id="{2BB19A94-3955-4E36-8558-43614F615B7E}"/>
               </a:ext>
             </a:extLst>
           </p:cNvPr>
@@ -3822,7 +7414,7 @@
     </p:spTree>
     <p:extLst>
       <p:ext uri="{BB962C8B-B14F-4D97-AF65-F5344CB8AC3E}">
-        <p14:creationId xmlns:p14="http://schemas.microsoft.com/office/powerpoint/2010/main" val="789393226"/>
+        <p14:creationId xmlns:p14="http://schemas.microsoft.com/office/powerpoint/2010/main" val="1552246585"/>
       </p:ext>
     </p:extLst>
   </p:cSld>
@@ -3853,7 +7445,7 @@
           <p:cNvPr id="18" name="">
             <a:extLst xmlns:a="http://schemas.openxmlformats.org/drawingml/2006/main">
               <a:ext uri="{FF2B5EF4-FFF2-40B4-BE49-F238E27FC236}">
-                <a16:creationId xmlns:a16="http://schemas.microsoft.com/office/drawing/2014/main" id="{24875E5B-C4AB-4AB1-B7C6-4A85512F7CE0}"/>
+                <a16:creationId xmlns:a16="http://schemas.microsoft.com/office/drawing/2014/main" id="{391C6938-3FC3-4617-AA90-6AC35418F9E7}"/>
               </a:ext>
             </a:extLst>
           </p:cNvPr>
@@ -3884,7 +7476,7 @@
           <p:cNvPr id="2" name="">
             <a:extLst xmlns:a="http://schemas.openxmlformats.org/drawingml/2006/main">
               <a:ext uri="{FF2B5EF4-FFF2-40B4-BE49-F238E27FC236}">
-                <a16:creationId xmlns:a16="http://schemas.microsoft.com/office/drawing/2014/main" id="{940D97D4-93A2-4C39-B5AE-01CA310D64E9}"/>
+                <a16:creationId xmlns:a16="http://schemas.microsoft.com/office/drawing/2014/main" id="{54E056AA-02EF-49F2-8C74-0819BBDB3F2C}"/>
               </a:ext>
             </a:extLst>
           </p:cNvPr>
@@ -3934,7 +7526,7 @@
           <p:cNvPr id="3" name="">
             <a:extLst xmlns:a="http://schemas.openxmlformats.org/drawingml/2006/main">
               <a:ext uri="{FF2B5EF4-FFF2-40B4-BE49-F238E27FC236}">
-                <a16:creationId xmlns:a16="http://schemas.microsoft.com/office/drawing/2014/main" id="{3FB652B1-2EEF-4E11-A089-E07299BA3FD2}"/>
+                <a16:creationId xmlns:a16="http://schemas.microsoft.com/office/drawing/2014/main" id="{6E42168D-459D-4F30-A644-5A23B924B319}"/>
               </a:ext>
             </a:extLst>
           </p:cNvPr>
@@ -3984,7 +7576,7 @@
           <p:cNvPr id="4" name="">
             <a:extLst xmlns:a="http://schemas.openxmlformats.org/drawingml/2006/main">
               <a:ext uri="{FF2B5EF4-FFF2-40B4-BE49-F238E27FC236}">
-                <a16:creationId xmlns:a16="http://schemas.microsoft.com/office/drawing/2014/main" id="{E2C65F07-A65A-4B64-8571-B5E3948C3F11}"/>
+                <a16:creationId xmlns:a16="http://schemas.microsoft.com/office/drawing/2014/main" id="{11CA3F13-8944-4339-8EDA-BE4233902C6A}"/>
               </a:ext>
             </a:extLst>
           </p:cNvPr>
@@ -4017,7 +7609,7 @@
           <p:cNvPr id="5" name="">
             <a:extLst xmlns:a="http://schemas.openxmlformats.org/drawingml/2006/main">
               <a:ext uri="{FF2B5EF4-FFF2-40B4-BE49-F238E27FC236}">
-                <a16:creationId xmlns:a16="http://schemas.microsoft.com/office/drawing/2014/main" id="{A7684B87-9D03-4C36-8C3B-96C0E60D5579}"/>
+                <a16:creationId xmlns:a16="http://schemas.microsoft.com/office/drawing/2014/main" id="{9518B7BA-07DE-4350-A346-35CBF6707D5A}"/>
               </a:ext>
             </a:extLst>
           </p:cNvPr>
@@ -4067,7 +7659,7 @@
           <p:cNvPr id="6" name="">
             <a:extLst xmlns:a="http://schemas.openxmlformats.org/drawingml/2006/main">
               <a:ext uri="{FF2B5EF4-FFF2-40B4-BE49-F238E27FC236}">
-                <a16:creationId xmlns:a16="http://schemas.microsoft.com/office/drawing/2014/main" id="{8D0CB592-7DD7-42EF-9B1B-92B9C7D8AF58}"/>
+                <a16:creationId xmlns:a16="http://schemas.microsoft.com/office/drawing/2014/main" id="{277992E3-A1F2-42DE-AD6F-1849B33E3F4C}"/>
               </a:ext>
             </a:extLst>
           </p:cNvPr>
@@ -4117,7 +7709,7 @@
           <p:cNvPr id="7" name="">
             <a:extLst xmlns:a="http://schemas.openxmlformats.org/drawingml/2006/main">
               <a:ext uri="{FF2B5EF4-FFF2-40B4-BE49-F238E27FC236}">
-                <a16:creationId xmlns:a16="http://schemas.microsoft.com/office/drawing/2014/main" id="{7F44F86D-73ED-4C9A-A31A-2D0CBB5C336F}"/>
+                <a16:creationId xmlns:a16="http://schemas.microsoft.com/office/drawing/2014/main" id="{3B6F5FAA-C688-485B-8877-1BDD1C756D86}"/>
               </a:ext>
             </a:extLst>
           </p:cNvPr>
@@ -4150,7 +7742,7 @@
           <p:cNvPr id="8" name="">
             <a:extLst xmlns:a="http://schemas.openxmlformats.org/drawingml/2006/main">
               <a:ext uri="{FF2B5EF4-FFF2-40B4-BE49-F238E27FC236}">
-                <a16:creationId xmlns:a16="http://schemas.microsoft.com/office/drawing/2014/main" id="{2300D026-4D70-4E85-9FD3-F3E7732FEAD0}"/>
+                <a16:creationId xmlns:a16="http://schemas.microsoft.com/office/drawing/2014/main" id="{26416728-70C2-46D4-A349-CBF57BB9DC8B}"/>
               </a:ext>
             </a:extLst>
           </p:cNvPr>
@@ -4200,7 +7792,7 @@
           <p:cNvPr id="9" name="">
             <a:extLst xmlns:a="http://schemas.openxmlformats.org/drawingml/2006/main">
               <a:ext uri="{FF2B5EF4-FFF2-40B4-BE49-F238E27FC236}">
-                <a16:creationId xmlns:a16="http://schemas.microsoft.com/office/drawing/2014/main" id="{BB75938D-469C-4637-ADA4-98D3B3C67148}"/>
+                <a16:creationId xmlns:a16="http://schemas.microsoft.com/office/drawing/2014/main" id="{F4C00D70-EBE0-4B0E-9996-82433B5A6A97}"/>
               </a:ext>
             </a:extLst>
           </p:cNvPr>
@@ -4250,7 +7842,7 @@
           <p:cNvPr id="10" name="">
             <a:extLst xmlns:a="http://schemas.openxmlformats.org/drawingml/2006/main">
               <a:ext uri="{FF2B5EF4-FFF2-40B4-BE49-F238E27FC236}">
-                <a16:creationId xmlns:a16="http://schemas.microsoft.com/office/drawing/2014/main" id="{6E5AE9C4-1892-448D-A505-147373C1D814}"/>
+                <a16:creationId xmlns:a16="http://schemas.microsoft.com/office/drawing/2014/main" id="{B6B330D1-ECBD-4990-8EFC-D3CB3B867983}"/>
               </a:ext>
             </a:extLst>
           </p:cNvPr>
@@ -4283,7 +7875,7 @@
           <p:cNvPr id="11" name="">
             <a:extLst xmlns:a="http://schemas.openxmlformats.org/drawingml/2006/main">
               <a:ext uri="{FF2B5EF4-FFF2-40B4-BE49-F238E27FC236}">
-                <a16:creationId xmlns:a16="http://schemas.microsoft.com/office/drawing/2014/main" id="{F485EB3A-B3A4-47E5-86FF-D559D8D7E309}"/>
+                <a16:creationId xmlns:a16="http://schemas.microsoft.com/office/drawing/2014/main" id="{4590D31D-A38E-4259-832A-1FEDD9A35FA3}"/>
               </a:ext>
             </a:extLst>
           </p:cNvPr>
@@ -4333,7 +7925,7 @@
           <p:cNvPr id="12" name="">
             <a:extLst xmlns:a="http://schemas.openxmlformats.org/drawingml/2006/main">
               <a:ext uri="{FF2B5EF4-FFF2-40B4-BE49-F238E27FC236}">
-                <a16:creationId xmlns:a16="http://schemas.microsoft.com/office/drawing/2014/main" id="{113F3C87-B3DD-4359-BD71-279C1A482C44}"/>
+                <a16:creationId xmlns:a16="http://schemas.microsoft.com/office/drawing/2014/main" id="{D8D0BA6D-3713-468E-B717-8C8DE3225624}"/>
               </a:ext>
             </a:extLst>
           </p:cNvPr>
@@ -4383,7 +7975,7 @@
           <p:cNvPr id="13" name="">
             <a:extLst xmlns:a="http://schemas.openxmlformats.org/drawingml/2006/main">
               <a:ext uri="{FF2B5EF4-FFF2-40B4-BE49-F238E27FC236}">
-                <a16:creationId xmlns:a16="http://schemas.microsoft.com/office/drawing/2014/main" id="{28C39696-F479-4395-9C98-0ABADA1F51F6}"/>
+                <a16:creationId xmlns:a16="http://schemas.microsoft.com/office/drawing/2014/main" id="{DC2DF7BD-E7DE-458A-98A5-69F18D1E518B}"/>
               </a:ext>
             </a:extLst>
           </p:cNvPr>
@@ -4416,7 +8008,7 @@
           <p:cNvPr id="14" name="">
             <a:extLst xmlns:a="http://schemas.openxmlformats.org/drawingml/2006/main">
               <a:ext uri="{FF2B5EF4-FFF2-40B4-BE49-F238E27FC236}">
-                <a16:creationId xmlns:a16="http://schemas.microsoft.com/office/drawing/2014/main" id="{B8FC1E5A-6A96-4C5B-B293-048AEB3AB2DD}"/>
+                <a16:creationId xmlns:a16="http://schemas.microsoft.com/office/drawing/2014/main" id="{E6A8B4DC-C173-4901-9750-C5C3F8DFCEFF}"/>
               </a:ext>
             </a:extLst>
           </p:cNvPr>
@@ -4466,7 +8058,7 @@
           <p:cNvPr id="15" name="">
             <a:extLst xmlns:a="http://schemas.openxmlformats.org/drawingml/2006/main">
               <a:ext uri="{FF2B5EF4-FFF2-40B4-BE49-F238E27FC236}">
-                <a16:creationId xmlns:a16="http://schemas.microsoft.com/office/drawing/2014/main" id="{150744CA-C9A6-4C75-8496-1EED4B8BBE03}"/>
+                <a16:creationId xmlns:a16="http://schemas.microsoft.com/office/drawing/2014/main" id="{1B364B63-C9D3-4F55-B7FB-7774906D7A59}"/>
               </a:ext>
             </a:extLst>
           </p:cNvPr>
@@ -4516,7 +8108,7 @@
           <p:cNvPr id="16" name="">
             <a:extLst xmlns:a="http://schemas.openxmlformats.org/drawingml/2006/main">
               <a:ext uri="{FF2B5EF4-FFF2-40B4-BE49-F238E27FC236}">
-                <a16:creationId xmlns:a16="http://schemas.microsoft.com/office/drawing/2014/main" id="{9EA2F410-0FF9-4D3B-8B87-A26EDD8CA529}"/>
+                <a16:creationId xmlns:a16="http://schemas.microsoft.com/office/drawing/2014/main" id="{5CB95F44-6991-4719-8E65-2C31B4B7EA87}"/>
               </a:ext>
             </a:extLst>
           </p:cNvPr>
@@ -4549,7 +8141,7 @@
           <p:cNvPr id="17" name="">
             <a:extLst xmlns:a="http://schemas.openxmlformats.org/drawingml/2006/main">
               <a:ext uri="{FF2B5EF4-FFF2-40B4-BE49-F238E27FC236}">
-                <a16:creationId xmlns:a16="http://schemas.microsoft.com/office/drawing/2014/main" id="{C1F13D12-84BA-483C-93BC-A3B9DBD90EE3}"/>
+                <a16:creationId xmlns:a16="http://schemas.microsoft.com/office/drawing/2014/main" id="{9DF7B34F-14B8-481D-9D20-4F501F6F656C}"/>
               </a:ext>
             </a:extLst>
           </p:cNvPr>
@@ -4597,7 +8189,7 @@
     </p:spTree>
     <p:extLst>
       <p:ext uri="{BB962C8B-B14F-4D97-AF65-F5344CB8AC3E}">
-        <p14:creationId xmlns:p14="http://schemas.microsoft.com/office/powerpoint/2010/main" val="830316739"/>
+        <p14:creationId xmlns:p14="http://schemas.microsoft.com/office/powerpoint/2010/main" val="1211799639"/>
       </p:ext>
     </p:extLst>
   </p:cSld>
@@ -4628,7 +8220,7 @@
           <p:cNvPr id="8" name="">
             <a:extLst xmlns:a="http://schemas.openxmlformats.org/drawingml/2006/main">
               <a:ext uri="{FF2B5EF4-FFF2-40B4-BE49-F238E27FC236}">
-                <a16:creationId xmlns:a16="http://schemas.microsoft.com/office/drawing/2014/main" id="{08974F08-239E-4DC4-BE6E-50E84CFDF3D5}"/>
+                <a16:creationId xmlns:a16="http://schemas.microsoft.com/office/drawing/2014/main" id="{25E0AB8E-3431-4742-9BBC-D9494947F34D}"/>
               </a:ext>
             </a:extLst>
           </p:cNvPr>
@@ -4659,7 +8251,7 @@
           <p:cNvPr id="2" name="">
             <a:extLst xmlns:a="http://schemas.openxmlformats.org/drawingml/2006/main">
               <a:ext uri="{FF2B5EF4-FFF2-40B4-BE49-F238E27FC236}">
-                <a16:creationId xmlns:a16="http://schemas.microsoft.com/office/drawing/2014/main" id="{AAF18CB9-D912-44C9-B583-D38A81B84ADA}"/>
+                <a16:creationId xmlns:a16="http://schemas.microsoft.com/office/drawing/2014/main" id="{6A38515F-A35B-4719-8DFD-32D8DFD85AC2}"/>
               </a:ext>
             </a:extLst>
           </p:cNvPr>
@@ -4709,7 +8301,7 @@
           <p:cNvPr id="3" name="">
             <a:extLst xmlns:a="http://schemas.openxmlformats.org/drawingml/2006/main">
               <a:ext uri="{FF2B5EF4-FFF2-40B4-BE49-F238E27FC236}">
-                <a16:creationId xmlns:a16="http://schemas.microsoft.com/office/drawing/2014/main" id="{804BC126-2650-42E8-99C6-3109D1CB5F95}"/>
+                <a16:creationId xmlns:a16="http://schemas.microsoft.com/office/drawing/2014/main" id="{1A73E362-6F37-4DB2-9955-A759B0ADD3E1}"/>
               </a:ext>
             </a:extLst>
           </p:cNvPr>
@@ -4759,7 +8351,7 @@
           <p:cNvPr id="4" name="">
             <a:extLst xmlns:a="http://schemas.openxmlformats.org/drawingml/2006/main">
               <a:ext uri="{FF2B5EF4-FFF2-40B4-BE49-F238E27FC236}">
-                <a16:creationId xmlns:a16="http://schemas.microsoft.com/office/drawing/2014/main" id="{D36461A9-50CE-43EB-ABC0-5C72C72E503F}"/>
+                <a16:creationId xmlns:a16="http://schemas.microsoft.com/office/drawing/2014/main" id="{8F25A678-D674-4B71-A394-2BF8AD168AE2}"/>
               </a:ext>
             </a:extLst>
           </p:cNvPr>
@@ -4792,7 +8384,7 @@
           <p:cNvPr id="5" name="">
             <a:extLst xmlns:a="http://schemas.openxmlformats.org/drawingml/2006/main">
               <a:ext uri="{FF2B5EF4-FFF2-40B4-BE49-F238E27FC236}">
-                <a16:creationId xmlns:a16="http://schemas.microsoft.com/office/drawing/2014/main" id="{4D961A0D-4C83-4B14-8023-6F3211E9C36D}"/>
+                <a16:creationId xmlns:a16="http://schemas.microsoft.com/office/drawing/2014/main" id="{C7E69BB1-7248-40D6-9C10-3E48BD698E66}"/>
               </a:ext>
             </a:extLst>
           </p:cNvPr>
@@ -4842,7 +8434,7 @@
           <p:cNvPr id="6" name="">
             <a:extLst xmlns:a="http://schemas.openxmlformats.org/drawingml/2006/main">
               <a:ext uri="{FF2B5EF4-FFF2-40B4-BE49-F238E27FC236}">
-                <a16:creationId xmlns:a16="http://schemas.microsoft.com/office/drawing/2014/main" id="{E90DA5E8-91A7-4479-B34D-D31960F95527}"/>
+                <a16:creationId xmlns:a16="http://schemas.microsoft.com/office/drawing/2014/main" id="{DA350451-A885-4E76-979E-A1EE55F9B206}"/>
               </a:ext>
             </a:extLst>
           </p:cNvPr>
@@ -4892,7 +8484,7 @@
           <p:cNvPr id="7" name="">
             <a:extLst xmlns:a="http://schemas.openxmlformats.org/drawingml/2006/main">
               <a:ext uri="{FF2B5EF4-FFF2-40B4-BE49-F238E27FC236}">
-                <a16:creationId xmlns:a16="http://schemas.microsoft.com/office/drawing/2014/main" id="{AB5D556D-9439-4526-BA5A-C4D36C695C26}"/>
+                <a16:creationId xmlns:a16="http://schemas.microsoft.com/office/drawing/2014/main" id="{82295910-6FD8-4D8D-AF73-F0BAC622727D}"/>
               </a:ext>
             </a:extLst>
           </p:cNvPr>
@@ -4940,7 +8532,7 @@
     </p:spTree>
     <p:extLst>
       <p:ext uri="{BB962C8B-B14F-4D97-AF65-F5344CB8AC3E}">
-        <p14:creationId xmlns:p14="http://schemas.microsoft.com/office/powerpoint/2010/main" val="808774748"/>
+        <p14:creationId xmlns:p14="http://schemas.microsoft.com/office/powerpoint/2010/main" val="446094364"/>
       </p:ext>
     </p:extLst>
   </p:cSld>
@@ -4971,7 +8563,7 @@
           <p:cNvPr id="14" name="">
             <a:extLst xmlns:a="http://schemas.openxmlformats.org/drawingml/2006/main">
               <a:ext uri="{FF2B5EF4-FFF2-40B4-BE49-F238E27FC236}">
-                <a16:creationId xmlns:a16="http://schemas.microsoft.com/office/drawing/2014/main" id="{99CDD7D4-A0B4-4A21-ACF7-57CD70F71210}"/>
+                <a16:creationId xmlns:a16="http://schemas.microsoft.com/office/drawing/2014/main" id="{9B06D623-8891-403A-9AEF-FB6FCA1C43E1}"/>
               </a:ext>
             </a:extLst>
           </p:cNvPr>
@@ -5002,7 +8594,7 @@
           <p:cNvPr id="2" name="">
             <a:extLst xmlns:a="http://schemas.openxmlformats.org/drawingml/2006/main">
               <a:ext uri="{FF2B5EF4-FFF2-40B4-BE49-F238E27FC236}">
-                <a16:creationId xmlns:a16="http://schemas.microsoft.com/office/drawing/2014/main" id="{14E9F786-3679-4BA1-9F2E-3572329C99F1}"/>
+                <a16:creationId xmlns:a16="http://schemas.microsoft.com/office/drawing/2014/main" id="{C69FA2CA-612D-4A48-B721-9B9F21055B21}"/>
               </a:ext>
             </a:extLst>
           </p:cNvPr>
@@ -5052,7 +8644,7 @@
           <p:cNvPr id="3" name="">
             <a:extLst xmlns:a="http://schemas.openxmlformats.org/drawingml/2006/main">
               <a:ext uri="{FF2B5EF4-FFF2-40B4-BE49-F238E27FC236}">
-                <a16:creationId xmlns:a16="http://schemas.microsoft.com/office/drawing/2014/main" id="{DEB0A15F-6DC3-440F-967A-00B95A1F34C5}"/>
+                <a16:creationId xmlns:a16="http://schemas.microsoft.com/office/drawing/2014/main" id="{B1355C6B-493B-414E-A4E0-84A9A48B3CC5}"/>
               </a:ext>
             </a:extLst>
           </p:cNvPr>
@@ -5102,7 +8694,7 @@
           <p:cNvPr id="4" name="">
             <a:extLst xmlns:a="http://schemas.openxmlformats.org/drawingml/2006/main">
               <a:ext uri="{FF2B5EF4-FFF2-40B4-BE49-F238E27FC236}">
-                <a16:creationId xmlns:a16="http://schemas.microsoft.com/office/drawing/2014/main" id="{83A4D7E0-0FE6-4BEB-8BB6-B18E13D8FC6E}"/>
+                <a16:creationId xmlns:a16="http://schemas.microsoft.com/office/drawing/2014/main" id="{543256F9-A489-4F1C-84D4-E8254532C319}"/>
               </a:ext>
             </a:extLst>
           </p:cNvPr>
@@ -5135,7 +8727,7 @@
           <p:cNvPr id="5" name="">
             <a:extLst xmlns:a="http://schemas.openxmlformats.org/drawingml/2006/main">
               <a:ext uri="{FF2B5EF4-FFF2-40B4-BE49-F238E27FC236}">
-                <a16:creationId xmlns:a16="http://schemas.microsoft.com/office/drawing/2014/main" id="{3B38C400-2457-4242-9BF6-7B11ADB1D96C}"/>
+                <a16:creationId xmlns:a16="http://schemas.microsoft.com/office/drawing/2014/main" id="{A9801827-FA24-4FBB-A04F-D305596D05ED}"/>
               </a:ext>
             </a:extLst>
           </p:cNvPr>
@@ -5185,7 +8777,7 @@
           <p:cNvPr id="6" name="">
             <a:extLst xmlns:a="http://schemas.openxmlformats.org/drawingml/2006/main">
               <a:ext uri="{FF2B5EF4-FFF2-40B4-BE49-F238E27FC236}">
-                <a16:creationId xmlns:a16="http://schemas.microsoft.com/office/drawing/2014/main" id="{1C1FF938-1DD2-48F1-A409-2DD6AC0ADD21}"/>
+                <a16:creationId xmlns:a16="http://schemas.microsoft.com/office/drawing/2014/main" id="{09C05EB6-D357-4E0E-8EAF-C3FF5312CB7A}"/>
               </a:ext>
             </a:extLst>
           </p:cNvPr>
@@ -5235,7 +8827,7 @@
           <p:cNvPr id="7" name="">
             <a:extLst xmlns:a="http://schemas.openxmlformats.org/drawingml/2006/main">
               <a:ext uri="{FF2B5EF4-FFF2-40B4-BE49-F238E27FC236}">
-                <a16:creationId xmlns:a16="http://schemas.microsoft.com/office/drawing/2014/main" id="{3C8C472B-5456-4B83-BA8F-C2D68509ED38}"/>
+                <a16:creationId xmlns:a16="http://schemas.microsoft.com/office/drawing/2014/main" id="{DED5CD7D-F85B-41DF-8557-7845BB62A3DA}"/>
               </a:ext>
             </a:extLst>
           </p:cNvPr>
@@ -5268,7 +8860,7 @@
           <p:cNvPr id="8" name="">
             <a:extLst xmlns:a="http://schemas.openxmlformats.org/drawingml/2006/main">
               <a:ext uri="{FF2B5EF4-FFF2-40B4-BE49-F238E27FC236}">
-                <a16:creationId xmlns:a16="http://schemas.microsoft.com/office/drawing/2014/main" id="{62D47012-A623-4480-95F0-6E39593C4069}"/>
+                <a16:creationId xmlns:a16="http://schemas.microsoft.com/office/drawing/2014/main" id="{7C23C5A0-E90F-416D-9C7F-7DBE6D6FC279}"/>
               </a:ext>
             </a:extLst>
           </p:cNvPr>
@@ -5318,7 +8910,7 @@
           <p:cNvPr id="9" name="">
             <a:extLst xmlns:a="http://schemas.openxmlformats.org/drawingml/2006/main">
               <a:ext uri="{FF2B5EF4-FFF2-40B4-BE49-F238E27FC236}">
-                <a16:creationId xmlns:a16="http://schemas.microsoft.com/office/drawing/2014/main" id="{CDFEC80B-F36C-49D9-8B56-CFDF98C195C0}"/>
+                <a16:creationId xmlns:a16="http://schemas.microsoft.com/office/drawing/2014/main" id="{602FE966-1F7C-4692-837A-6A8F718DE89E}"/>
               </a:ext>
             </a:extLst>
           </p:cNvPr>
@@ -5368,7 +8960,7 @@
           <p:cNvPr id="10" name="">
             <a:extLst xmlns:a="http://schemas.openxmlformats.org/drawingml/2006/main">
               <a:ext uri="{FF2B5EF4-FFF2-40B4-BE49-F238E27FC236}">
-                <a16:creationId xmlns:a16="http://schemas.microsoft.com/office/drawing/2014/main" id="{3BF6B137-42FC-494F-8DE9-181ED402B105}"/>
+                <a16:creationId xmlns:a16="http://schemas.microsoft.com/office/drawing/2014/main" id="{B9ABA2C5-A283-49A8-9103-146C8E9DF59F}"/>
               </a:ext>
             </a:extLst>
           </p:cNvPr>
@@ -5401,7 +8993,7 @@
           <p:cNvPr id="11" name="">
             <a:extLst xmlns:a="http://schemas.openxmlformats.org/drawingml/2006/main">
               <a:ext uri="{FF2B5EF4-FFF2-40B4-BE49-F238E27FC236}">
-                <a16:creationId xmlns:a16="http://schemas.microsoft.com/office/drawing/2014/main" id="{31E61805-94E8-4E10-BFDD-81EF2569BB4A}"/>
+                <a16:creationId xmlns:a16="http://schemas.microsoft.com/office/drawing/2014/main" id="{D3D65938-C58A-483C-8E7A-7A262E28A5AB}"/>
               </a:ext>
             </a:extLst>
           </p:cNvPr>
@@ -5451,7 +9043,7 @@
           <p:cNvPr id="12" name="">
             <a:extLst xmlns:a="http://schemas.openxmlformats.org/drawingml/2006/main">
               <a:ext uri="{FF2B5EF4-FFF2-40B4-BE49-F238E27FC236}">
-                <a16:creationId xmlns:a16="http://schemas.microsoft.com/office/drawing/2014/main" id="{89CE8412-0D8C-42DF-9290-C170ACBECDAE}"/>
+                <a16:creationId xmlns:a16="http://schemas.microsoft.com/office/drawing/2014/main" id="{ED26B1BB-FC63-4FA6-902D-78443AD3B023}"/>
               </a:ext>
             </a:extLst>
           </p:cNvPr>
@@ -5501,7 +9093,7 @@
           <p:cNvPr id="13" name="">
             <a:extLst xmlns:a="http://schemas.openxmlformats.org/drawingml/2006/main">
               <a:ext uri="{FF2B5EF4-FFF2-40B4-BE49-F238E27FC236}">
-                <a16:creationId xmlns:a16="http://schemas.microsoft.com/office/drawing/2014/main" id="{90FBD118-A4C7-469E-B83C-E01A37B50E3C}"/>
+                <a16:creationId xmlns:a16="http://schemas.microsoft.com/office/drawing/2014/main" id="{2047326E-8441-4EB0-B030-F7247D211AC8}"/>
               </a:ext>
             </a:extLst>
           </p:cNvPr>
@@ -5549,7 +9141,350 @@
     </p:spTree>
     <p:extLst>
       <p:ext uri="{BB962C8B-B14F-4D97-AF65-F5344CB8AC3E}">
-        <p14:creationId xmlns:p14="http://schemas.microsoft.com/office/powerpoint/2010/main" val="1403922341"/>
+        <p14:creationId xmlns:p14="http://schemas.microsoft.com/office/powerpoint/2010/main" val="382261384"/>
+      </p:ext>
+    </p:extLst>
+  </p:cSld>
+</p:sld>
+</file>
+
+<file path=ppt/slides/slide9.xml><?xml version="1.0" encoding="utf-8"?>
+<p:sld xmlns:p="http://schemas.openxmlformats.org/presentationml/2006/main">
+  <p:cSld>
+    <p:bg>
+      <p:bgPr>
+        <a:solidFill xmlns:a="http://schemas.openxmlformats.org/drawingml/2006/main">
+          <a:srgbClr val="FFFCF8"/>
+        </a:solidFill>
+      </p:bgPr>
+    </p:bg>
+    <p:spTree>
+      <p:nvGrpSpPr>
+        <p:cNvPr id="1" name=""/>
+        <p:cNvGrpSpPr/>
+        <p:nvPr/>
+      </p:nvGrpSpPr>
+      <p:grpSpPr>
+        <a:xfrm xmlns:a="http://schemas.openxmlformats.org/drawingml/2006/main"/>
+      </p:grpSpPr>
+      <p:sp>
+        <p:nvSpPr>
+          <p:cNvPr id="8" name="">
+            <a:extLst xmlns:a="http://schemas.openxmlformats.org/drawingml/2006/main">
+              <a:ext uri="{FF2B5EF4-FFF2-40B4-BE49-F238E27FC236}">
+                <a16:creationId xmlns:a16="http://schemas.microsoft.com/office/drawing/2014/main" id="{292AD03C-AE3D-46A2-99AF-0C18EA3F3BA6}"/>
+              </a:ext>
+            </a:extLst>
+          </p:cNvPr>
+          <p:cNvSpPr>
+            <a:spLocks xmlns:a="http://schemas.openxmlformats.org/drawingml/2006/main" noGrp="1"/>
+          </p:cNvSpPr>
+          <p:nvPr/>
+        </p:nvSpPr>
+        <p:spPr>
+          <a:xfrm xmlns:a="http://schemas.openxmlformats.org/drawingml/2006/main">
+            <a:off x="0" y="0"/>
+            <a:ext cx="171450" cy="6858000"/>
+          </a:xfrm>
+          <a:prstGeom xmlns:a="http://schemas.openxmlformats.org/drawingml/2006/main" prst="rect">
+            <a:avLst/>
+          </a:prstGeom>
+          <a:solidFill xmlns:a="http://schemas.openxmlformats.org/drawingml/2006/main">
+            <a:srgbClr val="6657E8"/>
+          </a:solidFill>
+          <a:ln xmlns:a="http://schemas.openxmlformats.org/drawingml/2006/main" w="0">
+            <a:noFill/>
+            <a:prstDash val="solid"/>
+          </a:ln>
+        </p:spPr>
+      </p:sp>
+      <p:sp>
+        <p:nvSpPr>
+          <p:cNvPr id="2" name="">
+            <a:extLst xmlns:a="http://schemas.openxmlformats.org/drawingml/2006/main">
+              <a:ext uri="{FF2B5EF4-FFF2-40B4-BE49-F238E27FC236}">
+                <a16:creationId xmlns:a16="http://schemas.microsoft.com/office/drawing/2014/main" id="{34757071-E913-42F1-872B-A8B632A555BE}"/>
+              </a:ext>
+            </a:extLst>
+          </p:cNvPr>
+          <p:cNvSpPr>
+            <a:spLocks xmlns:a="http://schemas.openxmlformats.org/drawingml/2006/main" noGrp="1"/>
+          </p:cNvSpPr>
+          <p:nvPr/>
+        </p:nvSpPr>
+        <p:spPr>
+          <a:xfrm xmlns:a="http://schemas.openxmlformats.org/drawingml/2006/main">
+            <a:off x="647700" y="457200"/>
+            <a:ext cx="10096500" cy="552450"/>
+          </a:xfrm>
+          <a:prstGeom xmlns:a="http://schemas.openxmlformats.org/drawingml/2006/main" prst="rect">
+            <a:avLst/>
+          </a:prstGeom>
+          <a:noFill xmlns:a="http://schemas.openxmlformats.org/drawingml/2006/main"/>
+          <a:ln xmlns:a="http://schemas.openxmlformats.org/drawingml/2006/main" w="0">
+            <a:noFill/>
+            <a:prstDash val="solid"/>
+          </a:ln>
+        </p:spPr>
+        <p:txBody>
+          <a:bodyPr xmlns:a="http://schemas.openxmlformats.org/drawingml/2006/main"/>
+          <a:lstStyle xmlns:a="http://schemas.openxmlformats.org/drawingml/2006/main"/>
+          <a:p xmlns:a="http://schemas.openxmlformats.org/drawingml/2006/main">
+            <a:pPr>
+              <a:defRPr sz="2700" b="1">
+                <a:solidFill>
+                  <a:srgbClr val="182235"/>
+                </a:solidFill>
+              </a:defRPr>
+            </a:pPr>
+            <a:r>
+              <a:rPr sz="2700" b="1">
+                <a:solidFill>
+                  <a:srgbClr val="182235"/>
+                </a:solidFill>
+              </a:rPr>
+              <a:t>왜 배우는지 알면 실습 방향이 보입니다</a:t>
+            </a:r>
+          </a:p>
+        </p:txBody>
+      </p:sp>
+      <p:sp>
+        <p:nvSpPr>
+          <p:cNvPr id="3" name="">
+            <a:extLst xmlns:a="http://schemas.openxmlformats.org/drawingml/2006/main">
+              <a:ext uri="{FF2B5EF4-FFF2-40B4-BE49-F238E27FC236}">
+                <a16:creationId xmlns:a16="http://schemas.microsoft.com/office/drawing/2014/main" id="{DE67F158-1D33-4673-8557-3ACC625CBF21}"/>
+              </a:ext>
+            </a:extLst>
+          </p:cNvPr>
+          <p:cNvSpPr>
+            <a:spLocks xmlns:a="http://schemas.openxmlformats.org/drawingml/2006/main" noGrp="1"/>
+          </p:cNvSpPr>
+          <p:nvPr/>
+        </p:nvSpPr>
+        <p:spPr>
+          <a:xfrm xmlns:a="http://schemas.openxmlformats.org/drawingml/2006/main">
+            <a:off x="666750" y="6419850"/>
+            <a:ext cx="10096500" cy="209550"/>
+          </a:xfrm>
+          <a:prstGeom xmlns:a="http://schemas.openxmlformats.org/drawingml/2006/main" prst="rect">
+            <a:avLst/>
+          </a:prstGeom>
+          <a:noFill xmlns:a="http://schemas.openxmlformats.org/drawingml/2006/main"/>
+          <a:ln xmlns:a="http://schemas.openxmlformats.org/drawingml/2006/main" w="0">
+            <a:noFill/>
+            <a:prstDash val="solid"/>
+          </a:ln>
+        </p:spPr>
+        <p:txBody>
+          <a:bodyPr xmlns:a="http://schemas.openxmlformats.org/drawingml/2006/main"/>
+          <a:lstStyle xmlns:a="http://schemas.openxmlformats.org/drawingml/2006/main"/>
+          <a:p xmlns:a="http://schemas.openxmlformats.org/drawingml/2006/main">
+            <a:pPr>
+              <a:defRPr sz="975">
+                <a:solidFill>
+                  <a:srgbClr val="657083"/>
+                </a:solidFill>
+              </a:defRPr>
+            </a:pPr>
+            <a:r>
+              <a:rPr sz="975">
+                <a:solidFill>
+                  <a:srgbClr val="657083"/>
+                </a:solidFill>
+              </a:rPr>
+              <a:t>EDU 웹개발 교육 플랫폼  ·  09</a:t>
+            </a:r>
+          </a:p>
+        </p:txBody>
+      </p:sp>
+      <p:sp>
+        <p:nvSpPr>
+          <p:cNvPr id="4" name="">
+            <a:extLst xmlns:a="http://schemas.openxmlformats.org/drawingml/2006/main">
+              <a:ext uri="{FF2B5EF4-FFF2-40B4-BE49-F238E27FC236}">
+                <a16:creationId xmlns:a16="http://schemas.microsoft.com/office/drawing/2014/main" id="{96C79C7B-9A77-4585-BE31-1DB8C292DAF8}"/>
+              </a:ext>
+            </a:extLst>
+          </p:cNvPr>
+          <p:cNvSpPr>
+            <a:spLocks xmlns:a="http://schemas.openxmlformats.org/drawingml/2006/main" noGrp="1"/>
+          </p:cNvSpPr>
+          <p:nvPr/>
+        </p:nvSpPr>
+        <p:spPr>
+          <a:xfrm xmlns:a="http://schemas.openxmlformats.org/drawingml/2006/main">
+            <a:off x="685800" y="1381125"/>
+            <a:ext cx="10820400" cy="1809750"/>
+          </a:xfrm>
+          <a:prstGeom xmlns:a="http://schemas.openxmlformats.org/drawingml/2006/main" prst="roundRect">
+            <a:avLst>
+              <a:gd name="adj" fmla="val 6316"/>
+            </a:avLst>
+          </a:prstGeom>
+          <a:solidFill xmlns:a="http://schemas.openxmlformats.org/drawingml/2006/main">
+            <a:srgbClr val="EEEAFE"/>
+          </a:solidFill>
+          <a:ln xmlns:a="http://schemas.openxmlformats.org/drawingml/2006/main" w="0">
+            <a:noFill/>
+            <a:prstDash val="solid"/>
+          </a:ln>
+        </p:spPr>
+      </p:sp>
+      <p:sp>
+        <p:nvSpPr>
+          <p:cNvPr id="5" name="">
+            <a:extLst xmlns:a="http://schemas.openxmlformats.org/drawingml/2006/main">
+              <a:ext uri="{FF2B5EF4-FFF2-40B4-BE49-F238E27FC236}">
+                <a16:creationId xmlns:a16="http://schemas.microsoft.com/office/drawing/2014/main" id="{479801A9-2B16-4156-9BC9-D8979CD1F4A1}"/>
+              </a:ext>
+            </a:extLst>
+          </p:cNvPr>
+          <p:cNvSpPr>
+            <a:spLocks xmlns:a="http://schemas.openxmlformats.org/drawingml/2006/main" noGrp="1"/>
+          </p:cNvSpPr>
+          <p:nvPr/>
+        </p:nvSpPr>
+        <p:spPr>
+          <a:xfrm xmlns:a="http://schemas.openxmlformats.org/drawingml/2006/main">
+            <a:off x="1066800" y="1762125"/>
+            <a:ext cx="10058400" cy="1143000"/>
+          </a:xfrm>
+          <a:prstGeom xmlns:a="http://schemas.openxmlformats.org/drawingml/2006/main" prst="rect">
+            <a:avLst/>
+          </a:prstGeom>
+          <a:noFill xmlns:a="http://schemas.openxmlformats.org/drawingml/2006/main"/>
+          <a:ln xmlns:a="http://schemas.openxmlformats.org/drawingml/2006/main" w="0">
+            <a:noFill/>
+            <a:prstDash val="solid"/>
+          </a:ln>
+        </p:spPr>
+        <p:txBody>
+          <a:bodyPr xmlns:a="http://schemas.openxmlformats.org/drawingml/2006/main"/>
+          <a:lstStyle xmlns:a="http://schemas.openxmlformats.org/drawingml/2006/main"/>
+          <a:p xmlns:a="http://schemas.openxmlformats.org/drawingml/2006/main">
+            <a:pPr>
+              <a:defRPr sz="1875">
+                <a:solidFill>
+                  <a:srgbClr val="182235"/>
+                </a:solidFill>
+              </a:defRPr>
+            </a:pPr>
+            <a:r>
+              <a:rPr sz="1875">
+                <a:solidFill>
+                  <a:srgbClr val="182235"/>
+                </a:solidFill>
+              </a:rPr>
+              <a:t>GitHub에 작업 기록을 올리면 컴퓨터 문제가 생겨도 소스를 되찾고, 변경 과정을 안전하게 비교할 수 있습니다.</a:t>
+            </a:r>
+          </a:p>
+        </p:txBody>
+      </p:sp>
+      <p:sp>
+        <p:nvSpPr>
+          <p:cNvPr id="6" name="">
+            <a:extLst xmlns:a="http://schemas.openxmlformats.org/drawingml/2006/main">
+              <a:ext uri="{FF2B5EF4-FFF2-40B4-BE49-F238E27FC236}">
+                <a16:creationId xmlns:a16="http://schemas.microsoft.com/office/drawing/2014/main" id="{601F1D92-1ECE-4760-80FB-36A62F6C9FDD}"/>
+              </a:ext>
+            </a:extLst>
+          </p:cNvPr>
+          <p:cNvSpPr>
+            <a:spLocks xmlns:a="http://schemas.openxmlformats.org/drawingml/2006/main" noGrp="1"/>
+          </p:cNvSpPr>
+          <p:nvPr/>
+        </p:nvSpPr>
+        <p:spPr>
+          <a:xfrm xmlns:a="http://schemas.openxmlformats.org/drawingml/2006/main">
+            <a:off x="838200" y="3714750"/>
+            <a:ext cx="2476500" cy="323850"/>
+          </a:xfrm>
+          <a:prstGeom xmlns:a="http://schemas.openxmlformats.org/drawingml/2006/main" prst="rect">
+            <a:avLst/>
+          </a:prstGeom>
+          <a:noFill xmlns:a="http://schemas.openxmlformats.org/drawingml/2006/main"/>
+          <a:ln xmlns:a="http://schemas.openxmlformats.org/drawingml/2006/main" w="0">
+            <a:noFill/>
+            <a:prstDash val="solid"/>
+          </a:ln>
+        </p:spPr>
+        <p:txBody>
+          <a:bodyPr xmlns:a="http://schemas.openxmlformats.org/drawingml/2006/main"/>
+          <a:lstStyle xmlns:a="http://schemas.openxmlformats.org/drawingml/2006/main"/>
+          <a:p xmlns:a="http://schemas.openxmlformats.org/drawingml/2006/main">
+            <a:pPr>
+              <a:defRPr sz="1575" b="1">
+                <a:solidFill>
+                  <a:srgbClr val="6657E8"/>
+                </a:solidFill>
+              </a:defRPr>
+            </a:pPr>
+            <a:r>
+              <a:rPr sz="1575" b="1">
+                <a:solidFill>
+                  <a:srgbClr val="6657E8"/>
+                </a:solidFill>
+              </a:rPr>
+              <a:t>오늘 완성할 결과</a:t>
+            </a:r>
+          </a:p>
+        </p:txBody>
+      </p:sp>
+      <p:sp>
+        <p:nvSpPr>
+          <p:cNvPr id="7" name="">
+            <a:extLst xmlns:a="http://schemas.openxmlformats.org/drawingml/2006/main">
+              <a:ext uri="{FF2B5EF4-FFF2-40B4-BE49-F238E27FC236}">
+                <a16:creationId xmlns:a16="http://schemas.microsoft.com/office/drawing/2014/main" id="{AF850DCD-F52B-4015-A716-47330D4D5C92}"/>
+              </a:ext>
+            </a:extLst>
+          </p:cNvPr>
+          <p:cNvSpPr>
+            <a:spLocks xmlns:a="http://schemas.openxmlformats.org/drawingml/2006/main" noGrp="1"/>
+          </p:cNvSpPr>
+          <p:nvPr/>
+        </p:nvSpPr>
+        <p:spPr>
+          <a:xfrm xmlns:a="http://schemas.openxmlformats.org/drawingml/2006/main">
+            <a:off x="838200" y="4191000"/>
+            <a:ext cx="10096500" cy="857250"/>
+          </a:xfrm>
+          <a:prstGeom xmlns:a="http://schemas.openxmlformats.org/drawingml/2006/main" prst="rect">
+            <a:avLst/>
+          </a:prstGeom>
+          <a:noFill xmlns:a="http://schemas.openxmlformats.org/drawingml/2006/main"/>
+          <a:ln xmlns:a="http://schemas.openxmlformats.org/drawingml/2006/main" w="0">
+            <a:noFill/>
+            <a:prstDash val="solid"/>
+          </a:ln>
+        </p:spPr>
+        <p:txBody>
+          <a:bodyPr xmlns:a="http://schemas.openxmlformats.org/drawingml/2006/main"/>
+          <a:lstStyle xmlns:a="http://schemas.openxmlformats.org/drawingml/2006/main"/>
+          <a:p xmlns:a="http://schemas.openxmlformats.org/drawingml/2006/main">
+            <a:pPr>
+              <a:defRPr sz="2025" b="1">
+                <a:solidFill>
+                  <a:srgbClr val="182235"/>
+                </a:solidFill>
+              </a:defRPr>
+            </a:pPr>
+            <a:r>
+              <a:rPr sz="2025" b="1">
+                <a:solidFill>
+                  <a:srgbClr val="182235"/>
+                </a:solidFill>
+              </a:rPr>
+              <a:t>비밀 파일을 제외하고 변경 내용을 한 커밋으로 만들어 GitHub main에 올립니다.</a:t>
+            </a:r>
+          </a:p>
+        </p:txBody>
+      </p:sp>
+    </p:spTree>
+    <p:extLst>
+      <p:ext uri="{BB962C8B-B14F-4D97-AF65-F5344CB8AC3E}">
+        <p14:creationId xmlns:p14="http://schemas.microsoft.com/office/powerpoint/2010/main" val="1227369098"/>
       </p:ext>
     </p:extLst>
   </p:cSld>
